--- a/assets/Caregiver-Webinar-Nov13.pptx
+++ b/assets/Caregiver-Webinar-Nov13.pptx
@@ -18,7 +18,6 @@
     <p:sldId id="266" r:id="rId18"/>
     <p:sldId id="267" r:id="rId19"/>
     <p:sldId id="268" r:id="rId20"/>
-    <p:sldId id="269" r:id="rId21"/>
   </p:sldIdLst>
   <p:sldSz cx="12191695" cy="6858000" type="screen4x3"/>
   <p:notesSz cx="6858000" cy="9144000"/>
@@ -515,7 +514,7 @@
           <a:lstStyle/>
           <a:p>
             <a:r>
-              <a:t>[Minutes 0–2] Welcome everyone. Say: November is Family Caregivers Month, and tonight is for YOU — the parents and caregivers who help everyone else. Thank them for coming. Remind them: no cost, no sales pitch, and questions at the end — the ones sent in when they registered come first.</a:t>
+              <a:t>[Minutes 0–2] Welcome everyone. Say: November is Family Caregivers Month, and tonight is different — tonight is not a class about forms. Tonight is for YOU, the ones who help everyone else. No cost, no sales pitch. Questions at the end; the ones sent in at registration come first.</a:t>
             </a:r>
           </a:p>
         </p:txBody>
@@ -585,7 +584,7 @@
           <a:lstStyle/>
           <a:p>
             <a:r>
-              <a:t>[Minutes 27–30] Remind them 2-1-1 is free and local. Respite is not giving up — it is how caregivers last. Encourage one small ask this month.</a:t>
+              <a:t>[Minutes 30–33] Many parents have never heard the word respite. A rested caregiver is a safer caregiver. Encourage one small ask this month.</a:t>
             </a:r>
           </a:p>
         </p:txBody>
@@ -655,7 +654,7 @@
           <a:lstStyle/>
           <a:p>
             <a:r>
-              <a:t>[Minutes 30–33] This is Southern Oak's specialty. A plan takes all the pieces families carry in their heads and puts them in order, with next steps. No prices tonight — the first talk is free and that is where we look at your family.</a:t>
+              <a:t>[Minutes 33–35] End the teaching with one doable step, not pressure. Then move to questions.</a:t>
             </a:r>
           </a:p>
         </p:txBody>
@@ -725,7 +724,7 @@
           <a:lstStyle/>
           <a:p>
             <a:r>
-              <a:t>[Minutes 33–35] End teaching with action, not pressure. One small step this week. Then move to questions.</a:t>
+              <a:t>[Minutes 35–45] Registered questions first, as promised. Keep group answers general; private details belong in the free talk.</a:t>
             </a:r>
           </a:p>
         </p:txBody>
@@ -795,77 +794,7 @@
           <a:lstStyle/>
           <a:p>
             <a:r>
-              <a:t>[Minutes 35–45] Answer registered questions first, like we promise. Keep answers general. If a question needs a family's private details, invite them to the free talk instead of answering it in the group.</a:t>
-            </a:r>
-          </a:p>
-        </p:txBody>
-      </p:sp>
-      <p:sp>
-        <p:nvSpPr>
-          <p:cNvPr id="4" name="Slide Number Placeholder 3"/>
-          <p:cNvSpPr>
-            <a:spLocks noGrp="1"/>
-          </p:cNvSpPr>
-          <p:nvPr>
-            <p:ph type="sldNum" idx="5" sz="quarter"/>
-          </p:nvPr>
-        </p:nvSpPr>
-        <p:spPr/>
-      </p:sp>
-    </p:spTree>
-  </p:cSld>
-  <p:clrMapOvr>
-    <a:masterClrMapping/>
-  </p:clrMapOvr>
-</p:notes>
-</file>
-
-<file path=ppt/notesSlides/notesSlide14.xml><?xml version="1.0" encoding="utf-8"?>
-<p:notes xmlns:a="http://schemas.openxmlformats.org/drawingml/2006/main" xmlns:p="http://schemas.openxmlformats.org/presentationml/2006/main" xmlns:r="http://schemas.openxmlformats.org/officeDocument/2006/relationships">
-  <p:cSld>
-    <p:spTree>
-      <p:nvGrpSpPr>
-        <p:cNvPr id="1" name=""/>
-        <p:cNvGrpSpPr/>
-        <p:nvPr/>
-      </p:nvGrpSpPr>
-      <p:grpSpPr>
-        <a:xfrm>
-          <a:off x="0" y="0"/>
-          <a:ext cx="0" cy="0"/>
-          <a:chOff x="0" y="0"/>
-          <a:chExt cx="0" cy="0"/>
-        </a:xfrm>
-      </p:grpSpPr>
-      <p:sp>
-        <p:nvSpPr>
-          <p:cNvPr id="2" name="Slide Image Placeholder 1"/>
-          <p:cNvSpPr>
-            <a:spLocks noGrp="1"/>
-          </p:cNvSpPr>
-          <p:nvPr>
-            <p:ph type="sldImg" idx="2"/>
-          </p:nvPr>
-        </p:nvSpPr>
-        <p:spPr/>
-      </p:sp>
-      <p:sp>
-        <p:nvSpPr>
-          <p:cNvPr id="3" name="Notes Placeholder 2"/>
-          <p:cNvSpPr>
-            <a:spLocks noGrp="1"/>
-          </p:cNvSpPr>
-          <p:nvPr>
-            <p:ph type="body" idx="3" sz="quarter"/>
-          </p:nvPr>
-        </p:nvSpPr>
-        <p:spPr/>
-        <p:txBody>
-          <a:bodyPr/>
-          <a:lstStyle/>
-          <a:p>
-            <a:r>
-              <a:t>[Close] Thank them warmly. Say Happy Thanksgiving. Remind them the first talk is free and there is no pressure — we are here when they are ready.</a:t>
+              <a:t>[Close] Thank them warmly and say Happy Thanksgiving. Remind them: the medication check and the first talk are free — we are here when they are ready.</a:t>
             </a:r>
           </a:p>
         </p:txBody>
@@ -935,7 +864,7 @@
           <a:lstStyle/>
           <a:p>
             <a:r>
-              <a:t>[Minutes 2–3] Read the road map out loud so families know where the night is going. Tell them a pen and paper will help for the tips.</a:t>
+              <a:t>[Minutes 2–3] Read the road map out loud. Tell them: everything tonight is something you can do from home — this whole night was built for real caregiver life.</a:t>
             </a:r>
           </a:p>
         </p:txBody>
@@ -1005,7 +934,7 @@
           <a:lstStyle/>
           <a:p>
             <a:r>
-              <a:t>[Minutes 3–6] Speak from the heart here. Many parents never hear this. Say: the best thing you can give your child is a caregiver who is still standing. Tonight we cover your child's benefits AND your own load.</a:t>
+              <a:t>[Minutes 3–6] Speak from the heart. Many parents never hear anyone say this out loud. This is the heart of the night — slow down here.</a:t>
             </a:r>
           </a:p>
         </p:txBody>
@@ -1075,7 +1004,7 @@
           <a:lstStyle/>
           <a:p>
             <a:r>
-              <a:t>[Minutes 6–8] Set up the map. Say: these three get mixed up all the time. Tonight we keep it simple — what each one is and who it is for. Details for one family belong in a free first talk, not a group class.</a:t>
+              <a:t>[Minutes 6–10] Read the signs slowly — let them land. Say: if you nodded at two or more, tonight matters for you. Running on empty is normal for caregivers; it is not weakness, and it is not forever.</a:t>
             </a:r>
           </a:p>
         </p:txBody>
@@ -1145,7 +1074,7 @@
           <a:lstStyle/>
           <a:p>
             <a:r>
-              <a:t>[Minutes 8–11] Plain words only. SSI looks at the disability AND the money side. For a child, the parents' income counts too. Never promise anyone they will be approved — SSA decides.</a:t>
+              <a:t>[Minutes 10–14] Practical and doable tonight. One list ends so much daily stress — no more guessing at the pharmacy or the doctor's office.</a:t>
             </a:r>
           </a:p>
         </p:txBody>
@@ -1215,7 +1144,7 @@
           <a:lstStyle/>
           <a:p>
             <a:r>
-              <a:t>[Minutes 11–14] DAC is the one families miss most. Key line: if a parent is about to file for retirement, talk to us FIRST — the order of filings can protect the child's Medicaid. Never promise amounts; SSA decides.</a:t>
+              <a:t>[Minutes 14–18] This is the help caregivers look for most: medication costs. Explain plainly what the check is and that it costs nothing. Invite them to book one after class — first talk is free too.</a:t>
             </a:r>
           </a:p>
         </p:txBody>
@@ -1285,7 +1214,7 @@
           <a:lstStyle/>
           <a:p>
             <a:r>
-              <a:t>[Minutes 14–17] Walk through the three questions slowly. These answers point to the right door. Tell them: you do not have to figure this out alone tonight — that is what the free talk is for.</a:t>
+              <a:t>[Minutes 18–23] Gentle, no shame about money — ever. One page of bills is the start of every budget we build with a family. Just teach the step tonight; prices stay out of the class.</a:t>
             </a:r>
           </a:p>
         </p:txBody>
@@ -1355,7 +1284,7 @@
           <a:lstStyle/>
           <a:p>
             <a:r>
-              <a:t>[Minutes 17–22] This is real help families can use right away. Explain what a check is: we look at the full list, look for help programs, and show you the steps. The check itself is free for everyone.</a:t>
+              <a:t>[Minutes 23–27] Families are surprised this works. Phone, internet, and medical bills are the best first calls. The worst they can say is no — and often they say yes.</a:t>
             </a:r>
           </a:p>
         </p:txBody>
@@ -1425,7 +1354,7 @@
           <a:lstStyle/>
           <a:p>
             <a:r>
-              <a:t>[Minutes 22–27] Keep it gentle — no shame about money, ever. Share the call-companies tip: many companies have hardship or discount programs, but you have to ask. That one call can free up real money.</a:t>
+              <a:t>[Minutes 27–30] 2-1-1 is the front door to local help and Southern Oak is joining its listings. Tell them to save the number in their phone tonight.</a:t>
             </a:r>
           </a:p>
         </p:txBody>
@@ -4529,7 +4458,7 @@
                 </a:solidFill>
                 <a:latin typeface="Georgia"/>
               </a:rPr>
-              <a:t>Thankful Hearts, Clear Steps</a:t>
+              <a:t>Caring for the Caregiver</a:t>
             </a:r>
           </a:p>
         </p:txBody>
@@ -4564,7 +4493,7 @@
                 </a:solidFill>
                 <a:latin typeface="Calibri"/>
               </a:rPr>
-              <a:t>Help for the Ones Who Help Everyone Else</a:t>
+              <a:t>A Night for the Ones Who Help Everyone Else</a:t>
             </a:r>
           </a:p>
         </p:txBody>
@@ -4775,7 +4704,7 @@
                 </a:solidFill>
                 <a:latin typeface="Georgia"/>
               </a:rPr>
-              <a:t>Asking for Help Is a Strength</a:t>
+              <a:t>Real Breaks: Respite</a:t>
             </a:r>
           </a:p>
         </p:txBody>
@@ -4810,7 +4739,7 @@
                 </a:solidFill>
                 <a:latin typeface="Calibri"/>
               </a:rPr>
-              <a:t>•  Dial 2-1-1 for local help — food, bills, respite and more</a:t>
+              <a:t>•  Respite means a trained person stays with your child</a:t>
             </a:r>
           </a:p>
           <a:p>
@@ -4822,7 +4751,7 @@
                 </a:solidFill>
                 <a:latin typeface="Calibri"/>
               </a:rPr>
-              <a:t>•  Respite care gives caregivers a real break</a:t>
+              <a:t>•  So you can rest, shop, or just breathe</a:t>
             </a:r>
           </a:p>
           <a:p>
@@ -4834,7 +4763,7 @@
                 </a:solidFill>
                 <a:latin typeface="Calibri"/>
               </a:rPr>
-              <a:t>•  Parent groups understand your life like no one else</a:t>
+              <a:t>•  Ask 2-1-1 and your local disability organizations</a:t>
             </a:r>
           </a:p>
           <a:p>
@@ -4846,7 +4775,7 @@
                 </a:solidFill>
                 <a:latin typeface="Calibri"/>
               </a:rPr>
-              <a:t>•  Accepting help protects your whole family</a:t>
+              <a:t>•  A break is not giving up — it is how caregivers last</a:t>
             </a:r>
           </a:p>
         </p:txBody>
@@ -5022,7 +4951,7 @@
                 </a:solidFill>
                 <a:latin typeface="Georgia"/>
               </a:rPr>
-              <a:t>Your Child's Personal Plan</a:t>
+              <a:t>One Small Break This Month</a:t>
             </a:r>
           </a:p>
         </p:txBody>
@@ -5057,7 +4986,7 @@
                 </a:solidFill>
                 <a:latin typeface="Calibri"/>
               </a:rPr>
-              <a:t>•  A plan made only for YOUR child — no two are the same</a:t>
+              <a:t>•  Pick ONE small thing:</a:t>
             </a:r>
           </a:p>
           <a:p>
@@ -5069,7 +4998,7 @@
                 </a:solidFill>
                 <a:latin typeface="Calibri"/>
               </a:rPr>
-              <a:t>•  It covers benefits, medication, school steps and the future</a:t>
+              <a:t>•  One hour that is only yours</a:t>
             </a:r>
           </a:p>
           <a:p>
@@ -5081,7 +5010,7 @@
                 </a:solidFill>
                 <a:latin typeface="Calibri"/>
               </a:rPr>
-              <a:t>•  For ages 5 to 26 — child plans and young-adult transition</a:t>
+              <a:t>•  One call — 2-1-1, the pharmacy, or a bill company</a:t>
             </a:r>
           </a:p>
           <a:p>
@@ -5093,7 +5022,19 @@
                 </a:solidFill>
                 <a:latin typeface="Calibri"/>
               </a:rPr>
-              <a:t>•  It grows and updates as your child's life changes</a:t>
+              <a:t>•  One page — the medication list or the bill list</a:t>
+            </a:r>
+          </a:p>
+          <a:p>
+            <a:pPr algn="l"/>
+            <a:r>
+              <a:rPr sz="2700" b="0">
+                <a:solidFill>
+                  <a:srgbClr val="222222"/>
+                </a:solidFill>
+                <a:latin typeface="Calibri"/>
+              </a:rPr>
+              <a:t>•  Small is enough. Start there.</a:t>
             </a:r>
           </a:p>
         </p:txBody>
@@ -5269,7 +5210,7 @@
                 </a:solidFill>
                 <a:latin typeface="Georgia"/>
               </a:rPr>
-              <a:t>One Small Step This Week</a:t>
+              <a:t>Questions</a:t>
             </a:r>
           </a:p>
         </p:txBody>
@@ -5304,7 +5245,7 @@
                 </a:solidFill>
                 <a:latin typeface="Calibri"/>
               </a:rPr>
-              <a:t>•  Pick ONE — small is enough:</a:t>
+              <a:t>•  Questions sent in at registration come first</a:t>
             </a:r>
           </a:p>
           <a:p>
@@ -5316,7 +5257,7 @@
                 </a:solidFill>
                 <a:latin typeface="Calibri"/>
               </a:rPr>
-              <a:t>•  Book your free first talk</a:t>
+              <a:t>•  Then open questions</a:t>
             </a:r>
           </a:p>
           <a:p>
@@ -5328,31 +5269,7 @@
                 </a:solidFill>
                 <a:latin typeface="Calibri"/>
               </a:rPr>
-              <a:t>•  Ask for your free medication check</a:t>
-            </a:r>
-          </a:p>
-          <a:p>
-            <a:pPr algn="l"/>
-            <a:r>
-              <a:rPr sz="2700" b="0">
-                <a:solidFill>
-                  <a:srgbClr val="222222"/>
-                </a:solidFill>
-                <a:latin typeface="Calibri"/>
-              </a:rPr>
-              <a:t>•  Call 2-1-1 and ask what help is near you</a:t>
-            </a:r>
-          </a:p>
-          <a:p>
-            <a:pPr algn="l"/>
-            <a:r>
-              <a:rPr sz="2700" b="0">
-                <a:solidFill>
-                  <a:srgbClr val="222222"/>
-                </a:solidFill>
-                <a:latin typeface="Calibri"/>
-              </a:rPr>
-              <a:t>•  Write your child's medication list on one page</a:t>
+              <a:t>•  Personal cases: book your free first talk — we keep private things private</a:t>
             </a:r>
           </a:p>
         </p:txBody>
@@ -5456,241 +5373,6 @@
       </p:sp>
       <p:sp>
         <p:nvSpPr>
-          <p:cNvPr id="3" name="Rectangle 2"/>
-          <p:cNvSpPr/>
-          <p:nvPr/>
-        </p:nvSpPr>
-        <p:spPr>
-          <a:xfrm>
-            <a:off x="0" y="0"/>
-            <a:ext cx="12191695" cy="1051560"/>
-          </a:xfrm>
-          <a:prstGeom prst="rect">
-            <a:avLst/>
-          </a:prstGeom>
-          <a:solidFill>
-            <a:srgbClr val="2E4A2B"/>
-          </a:solidFill>
-          <a:ln>
-            <a:noFill/>
-          </a:ln>
-          <a:effectLst/>
-        </p:spPr>
-        <p:style>
-          <a:lnRef idx="1">
-            <a:schemeClr val="accent1"/>
-          </a:lnRef>
-          <a:fillRef idx="3">
-            <a:schemeClr val="accent1"/>
-          </a:fillRef>
-          <a:effectRef idx="2">
-            <a:schemeClr val="accent1"/>
-          </a:effectRef>
-          <a:fontRef idx="minor">
-            <a:schemeClr val="lt1"/>
-          </a:fontRef>
-        </p:style>
-        <p:txBody>
-          <a:bodyPr rtlCol="0" anchor="ctr"/>
-          <a:lstStyle/>
-          <a:p>
-            <a:pPr algn="ctr"/>
-          </a:p>
-        </p:txBody>
-      </p:sp>
-      <p:sp>
-        <p:nvSpPr>
-          <p:cNvPr id="4" name="TextBox 3"/>
-          <p:cNvSpPr txBox="1"/>
-          <p:nvPr/>
-        </p:nvSpPr>
-        <p:spPr>
-          <a:xfrm>
-            <a:off x="548640" y="164592"/>
-            <a:ext cx="11064240" cy="777240"/>
-          </a:xfrm>
-          <a:prstGeom prst="rect">
-            <a:avLst/>
-          </a:prstGeom>
-          <a:noFill/>
-        </p:spPr>
-        <p:txBody>
-          <a:bodyPr wrap="square">
-            <a:spAutoFit/>
-          </a:bodyPr>
-          <a:lstStyle/>
-          <a:p>
-            <a:pPr algn="l"/>
-            <a:r>
-              <a:rPr sz="4000" b="1">
-                <a:solidFill>
-                  <a:srgbClr val="FFFFFF"/>
-                </a:solidFill>
-                <a:latin typeface="Georgia"/>
-              </a:rPr>
-              <a:t>Questions</a:t>
-            </a:r>
-          </a:p>
-        </p:txBody>
-      </p:sp>
-      <p:sp>
-        <p:nvSpPr>
-          <p:cNvPr id="5" name="TextBox 4"/>
-          <p:cNvSpPr txBox="1"/>
-          <p:nvPr/>
-        </p:nvSpPr>
-        <p:spPr>
-          <a:xfrm>
-            <a:off x="822960" y="1554480"/>
-            <a:ext cx="10607040" cy="4480560"/>
-          </a:xfrm>
-          <a:prstGeom prst="rect">
-            <a:avLst/>
-          </a:prstGeom>
-          <a:noFill/>
-        </p:spPr>
-        <p:txBody>
-          <a:bodyPr wrap="square">
-            <a:spAutoFit/>
-          </a:bodyPr>
-          <a:lstStyle/>
-          <a:p>
-            <a:pPr algn="l"/>
-            <a:r>
-              <a:rPr sz="2700" b="0">
-                <a:solidFill>
-                  <a:srgbClr val="222222"/>
-                </a:solidFill>
-                <a:latin typeface="Calibri"/>
-              </a:rPr>
-              <a:t>•  Questions sent in at registration come first</a:t>
-            </a:r>
-          </a:p>
-          <a:p>
-            <a:pPr algn="l"/>
-            <a:r>
-              <a:rPr sz="2700" b="0">
-                <a:solidFill>
-                  <a:srgbClr val="222222"/>
-                </a:solidFill>
-                <a:latin typeface="Calibri"/>
-              </a:rPr>
-              <a:t>•  Then open questions</a:t>
-            </a:r>
-          </a:p>
-          <a:p>
-            <a:pPr algn="l"/>
-            <a:r>
-              <a:rPr sz="2700" b="0">
-                <a:solidFill>
-                  <a:srgbClr val="222222"/>
-                </a:solidFill>
-                <a:latin typeface="Calibri"/>
-              </a:rPr>
-              <a:t>•  Personal cases: book your free first talk — we keep private things private</a:t>
-            </a:r>
-          </a:p>
-        </p:txBody>
-      </p:sp>
-      <p:sp>
-        <p:nvSpPr>
-          <p:cNvPr id="6" name="TextBox 5"/>
-          <p:cNvSpPr txBox="1"/>
-          <p:nvPr/>
-        </p:nvSpPr>
-        <p:spPr>
-          <a:xfrm>
-            <a:off x="548640" y="6355080"/>
-            <a:ext cx="11064240" cy="365760"/>
-          </a:xfrm>
-          <a:prstGeom prst="rect">
-            <a:avLst/>
-          </a:prstGeom>
-          <a:noFill/>
-        </p:spPr>
-        <p:txBody>
-          <a:bodyPr wrap="square">
-            <a:spAutoFit/>
-          </a:bodyPr>
-          <a:lstStyle/>
-          <a:p>
-            <a:pPr algn="l"/>
-            <a:r>
-              <a:rPr sz="1400" b="0">
-                <a:solidFill>
-                  <a:srgbClr val="2E4A2B"/>
-                </a:solidFill>
-                <a:latin typeface="Calibri"/>
-              </a:rPr>
-              <a:t>Southern Oak Financial &amp; Wellness — Free Zoom Webinar</a:t>
-            </a:r>
-          </a:p>
-        </p:txBody>
-      </p:sp>
-    </p:spTree>
-  </p:cSld>
-  <p:clrMapOvr>
-    <a:masterClrMapping/>
-  </p:clrMapOvr>
-</p:sld>
-</file>
-
-<file path=ppt/slides/slide14.xml><?xml version="1.0" encoding="utf-8"?>
-<p:sld xmlns:a="http://schemas.openxmlformats.org/drawingml/2006/main" xmlns:p="http://schemas.openxmlformats.org/presentationml/2006/main" xmlns:r="http://schemas.openxmlformats.org/officeDocument/2006/relationships">
-  <p:cSld>
-    <p:spTree>
-      <p:nvGrpSpPr>
-        <p:cNvPr id="1" name=""/>
-        <p:cNvGrpSpPr/>
-        <p:nvPr/>
-      </p:nvGrpSpPr>
-      <p:grpSpPr/>
-      <p:sp>
-        <p:nvSpPr>
-          <p:cNvPr id="2" name="Rectangle 1"/>
-          <p:cNvSpPr/>
-          <p:nvPr/>
-        </p:nvSpPr>
-        <p:spPr>
-          <a:xfrm>
-            <a:off x="0" y="0"/>
-            <a:ext cx="12191695" cy="6858000"/>
-          </a:xfrm>
-          <a:prstGeom prst="rect">
-            <a:avLst/>
-          </a:prstGeom>
-          <a:solidFill>
-            <a:srgbClr val="FAF4E6"/>
-          </a:solidFill>
-          <a:ln>
-            <a:noFill/>
-          </a:ln>
-          <a:effectLst/>
-        </p:spPr>
-        <p:style>
-          <a:lnRef idx="1">
-            <a:schemeClr val="accent1"/>
-          </a:lnRef>
-          <a:fillRef idx="3">
-            <a:schemeClr val="accent1"/>
-          </a:fillRef>
-          <a:effectRef idx="2">
-            <a:schemeClr val="accent1"/>
-          </a:effectRef>
-          <a:fontRef idx="minor">
-            <a:schemeClr val="lt1"/>
-          </a:fontRef>
-        </p:style>
-        <p:txBody>
-          <a:bodyPr rtlCol="0" anchor="ctr"/>
-          <a:lstStyle/>
-          <a:p>
-            <a:pPr algn="ctr"/>
-          </a:p>
-        </p:txBody>
-      </p:sp>
-      <p:sp>
-        <p:nvSpPr>
           <p:cNvPr id="3" name="TextBox 2"/>
           <p:cNvSpPr txBox="1"/>
           <p:nvPr/>
@@ -6001,7 +5683,7 @@
                 </a:solidFill>
                 <a:latin typeface="Calibri"/>
               </a:rPr>
-              <a:t>•  First: a word for you, the caregiver</a:t>
+              <a:t>•  The signs of running on empty — and what helps</a:t>
             </a:r>
           </a:p>
           <a:p>
@@ -6013,7 +5695,7 @@
                 </a:solidFill>
                 <a:latin typeface="Calibri"/>
               </a:rPr>
-              <a:t>•  The benefits map: SSI, SSDI &amp; DAC in plain words</a:t>
+              <a:t>•  Making medication time easier (your check is free)</a:t>
             </a:r>
           </a:p>
           <a:p>
@@ -6025,7 +5707,7 @@
                 </a:solidFill>
                 <a:latin typeface="Calibri"/>
               </a:rPr>
-              <a:t>•  Medication help — your check is free</a:t>
+              <a:t>•  Money basics for caregiving families</a:t>
             </a:r>
           </a:p>
           <a:p>
@@ -6037,7 +5719,7 @@
                 </a:solidFill>
                 <a:latin typeface="Calibri"/>
               </a:rPr>
-              <a:t>•  Caring for YOU: budget basics &amp; asking for help</a:t>
+              <a:t>•  Where help lives: 2-1-1, respite, parent support</a:t>
             </a:r>
           </a:p>
           <a:p>
@@ -6049,7 +5731,7 @@
                 </a:solidFill>
                 <a:latin typeface="Calibri"/>
               </a:rPr>
-              <a:t>•  Your child's personal plan</a:t>
+              <a:t>•  One small break you can take this month</a:t>
             </a:r>
           </a:p>
           <a:p>
@@ -6237,7 +5919,7 @@
                 </a:solidFill>
                 <a:latin typeface="Georgia"/>
               </a:rPr>
-              <a:t>First, a Word for YOU</a:t>
+              <a:t>Why Tonight Is About You</a:t>
             </a:r>
           </a:p>
         </p:txBody>
@@ -6272,7 +5954,7 @@
                 </a:solidFill>
                 <a:latin typeface="Calibri"/>
               </a:rPr>
-              <a:t>•  You give all day, every day</a:t>
+              <a:t>•  You give all day, every day — meds, rides, calls, papers</a:t>
             </a:r>
           </a:p>
           <a:p>
@@ -6284,7 +5966,7 @@
                 </a:solidFill>
                 <a:latin typeface="Calibri"/>
               </a:rPr>
-              <a:t>•  Caregivers get tired — that is normal, not weak</a:t>
+              <a:t>•  Your child needs you healthy and standing</a:t>
             </a:r>
           </a:p>
           <a:p>
@@ -6308,7 +5990,7 @@
                 </a:solidFill>
                 <a:latin typeface="Calibri"/>
               </a:rPr>
-              <a:t>•  Tonight, some of this help is for YOU</a:t>
+              <a:t>•  Caring for yourself IS caring for your child</a:t>
             </a:r>
           </a:p>
         </p:txBody>
@@ -6484,7 +6166,7 @@
                 </a:solidFill>
                 <a:latin typeface="Georgia"/>
               </a:rPr>
-              <a:t>The Benefits Map</a:t>
+              <a:t>Signs You Are Running on Empty</a:t>
             </a:r>
           </a:p>
         </p:txBody>
@@ -6519,7 +6201,7 @@
                 </a:solidFill>
                 <a:latin typeface="Calibri"/>
               </a:rPr>
-              <a:t>•  Three names come up again and again:</a:t>
+              <a:t>•  Tired all the time, even after sleep</a:t>
             </a:r>
           </a:p>
           <a:p>
@@ -6531,7 +6213,7 @@
                 </a:solidFill>
                 <a:latin typeface="Calibri"/>
               </a:rPr>
-              <a:t>•  SSI — Supplemental Security Income</a:t>
+              <a:t>•  No real break in weeks</a:t>
             </a:r>
           </a:p>
           <a:p>
@@ -6543,7 +6225,7 @@
                 </a:solidFill>
                 <a:latin typeface="Calibri"/>
               </a:rPr>
-              <a:t>•  SSDI — Social Security Disability Insurance</a:t>
+              <a:t>•  Snapping at people you love</a:t>
             </a:r>
           </a:p>
           <a:p>
@@ -6555,7 +6237,7 @@
                 </a:solidFill>
                 <a:latin typeface="Calibri"/>
               </a:rPr>
-              <a:t>•  DAC — Disabled Adult Child benefits</a:t>
+              <a:t>•  Forgetting your OWN medicines and appointments</a:t>
             </a:r>
           </a:p>
           <a:p>
@@ -6567,7 +6249,7 @@
                 </a:solidFill>
                 <a:latin typeface="Calibri"/>
               </a:rPr>
-              <a:t>•  Each one has its own rules</a:t>
+              <a:t>•  Feeling like nobody understands</a:t>
             </a:r>
           </a:p>
         </p:txBody>
@@ -6743,7 +6425,7 @@
                 </a:solidFill>
                 <a:latin typeface="Georgia"/>
               </a:rPr>
-              <a:t>SSI in Plain Words</a:t>
+              <a:t>First Help: Make Medication Time Easier</a:t>
             </a:r>
           </a:p>
         </p:txBody>
@@ -6778,7 +6460,7 @@
                 </a:solidFill>
                 <a:latin typeface="Calibri"/>
               </a:rPr>
-              <a:t>•  SSI is based on need</a:t>
+              <a:t>•  One clean list: name, dose, and what it is for</a:t>
             </a:r>
           </a:p>
           <a:p>
@@ -6790,7 +6472,7 @@
                 </a:solidFill>
                 <a:latin typeface="Calibri"/>
               </a:rPr>
-              <a:t>•  It helps children and adults with disabilities</a:t>
+              <a:t>•  Same time each day, tied to a routine you already do</a:t>
             </a:r>
           </a:p>
           <a:p>
@@ -6802,7 +6484,7 @@
                 </a:solidFill>
                 <a:latin typeface="Calibri"/>
               </a:rPr>
-              <a:t>•  Income and resources count</a:t>
+              <a:t>•  Ask the pharmacy your questions — that is their job</a:t>
             </a:r>
           </a:p>
           <a:p>
@@ -6814,19 +6496,7 @@
                 </a:solidFill>
                 <a:latin typeface="Calibri"/>
               </a:rPr>
-              <a:t>•  Many children with disabilities qualify</a:t>
-            </a:r>
-          </a:p>
-          <a:p>
-            <a:pPr algn="l"/>
-            <a:r>
-              <a:rPr sz="2700" b="0">
-                <a:solidFill>
-                  <a:srgbClr val="222222"/>
-                </a:solidFill>
-                <a:latin typeface="Calibri"/>
-              </a:rPr>
-              <a:t>•  Applying takes papers and patience — and help exists</a:t>
+              <a:t>•  Keep the list on your phone AND on paper</a:t>
             </a:r>
           </a:p>
         </p:txBody>
@@ -7002,7 +6672,7 @@
                 </a:solidFill>
                 <a:latin typeface="Georgia"/>
               </a:rPr>
-              <a:t>SSDI &amp; DAC in Plain Words</a:t>
+              <a:t>Your Free Medication Check</a:t>
             </a:r>
           </a:p>
         </p:txBody>
@@ -7037,7 +6707,7 @@
                 </a:solidFill>
                 <a:latin typeface="Calibri"/>
               </a:rPr>
-              <a:t>•  SSDI is based on a work record</a:t>
+              <a:t>•  We look at your child's full medication list with you</a:t>
             </a:r>
           </a:p>
           <a:p>
@@ -7049,7 +6719,7 @@
                 </a:solidFill>
                 <a:latin typeface="Calibri"/>
               </a:rPr>
-              <a:t>•  DAC is for an adult child with a disability that began before age 22</a:t>
+              <a:t>•  We look for programs that can lower the cost</a:t>
             </a:r>
           </a:p>
           <a:p>
@@ -7061,7 +6731,7 @@
                 </a:solidFill>
                 <a:latin typeface="Calibri"/>
               </a:rPr>
-              <a:t>•  DAC pays on a parent's work record</a:t>
+              <a:t>•  Many families pay more than they have to</a:t>
             </a:r>
           </a:p>
           <a:p>
@@ -7073,19 +6743,7 @@
                 </a:solidFill>
                 <a:latin typeface="Calibri"/>
               </a:rPr>
-              <a:t>•  A parent must be retired, disabled, or passed away</a:t>
-            </a:r>
-          </a:p>
-          <a:p>
-            <a:pPr algn="l"/>
-            <a:r>
-              <a:rPr sz="2700" b="0">
-                <a:solidFill>
-                  <a:srgbClr val="222222"/>
-                </a:solidFill>
-                <a:latin typeface="Calibri"/>
-              </a:rPr>
-              <a:t>•  DAC can connect to Medicaid — timing matters, ask before filing</a:t>
+              <a:t>•  The check is FREE for everyone — always</a:t>
             </a:r>
           </a:p>
         </p:txBody>
@@ -7261,7 +6919,7 @@
                 </a:solidFill>
                 <a:latin typeface="Georgia"/>
               </a:rPr>
-              <a:t>Which One Fits Your Family?</a:t>
+              <a:t>Money Basics for Caregiving Families</a:t>
             </a:r>
           </a:p>
         </p:txBody>
@@ -7296,7 +6954,7 @@
                 </a:solidFill>
                 <a:latin typeface="Calibri"/>
               </a:rPr>
-              <a:t>•  Is the child under 18, or a young adult?</a:t>
+              <a:t>•  Know what comes in and what goes out</a:t>
             </a:r>
           </a:p>
           <a:p>
@@ -7308,7 +6966,7 @@
                 </a:solidFill>
                 <a:latin typeface="Calibri"/>
               </a:rPr>
-              <a:t>•  Has a parent worked and paid into Social Security?</a:t>
+              <a:t>•  Write the bills on one page — that page is your map</a:t>
             </a:r>
           </a:p>
           <a:p>
@@ -7320,7 +6978,7 @@
                 </a:solidFill>
                 <a:latin typeface="Calibri"/>
               </a:rPr>
-              <a:t>•  Is a parent near retirement?</a:t>
+              <a:t>•  Look for the bills that can be lowered first</a:t>
             </a:r>
           </a:p>
           <a:p>
@@ -7332,7 +6990,7 @@
                 </a:solidFill>
                 <a:latin typeface="Calibri"/>
               </a:rPr>
-              <a:t>•  Write your answers down — bring them to your free first talk</a:t>
+              <a:t>•  Small steps beat big stress</a:t>
             </a:r>
           </a:p>
         </p:txBody>
@@ -7508,7 +7166,7 @@
                 </a:solidFill>
                 <a:latin typeface="Georgia"/>
               </a:rPr>
-              <a:t>Medication Help</a:t>
+              <a:t>Call and Ask: Bill Companies</a:t>
             </a:r>
           </a:p>
         </p:txBody>
@@ -7543,7 +7201,7 @@
                 </a:solidFill>
                 <a:latin typeface="Calibri"/>
               </a:rPr>
-              <a:t>•  Medication costs can often be lowered</a:t>
+              <a:t>•  Many companies have hardship or discount programs</a:t>
             </a:r>
           </a:p>
           <a:p>
@@ -7555,7 +7213,7 @@
                 </a:solidFill>
                 <a:latin typeface="Calibri"/>
               </a:rPr>
-              <a:t>•  Help programs exist for many medicines</a:t>
+              <a:t>•  You can ask for a lower price or more time</a:t>
             </a:r>
           </a:p>
           <a:p>
@@ -7567,7 +7225,7 @@
                 </a:solidFill>
                 <a:latin typeface="Calibri"/>
               </a:rPr>
-              <a:t>•  A medication check looks at every medicine your child takes</a:t>
+              <a:t>•  Be kind, be honest, write down who you talked to</a:t>
             </a:r>
           </a:p>
           <a:p>
@@ -7579,19 +7237,7 @@
                 </a:solidFill>
                 <a:latin typeface="Calibri"/>
               </a:rPr>
-              <a:t>•  Your medication check at Southern Oak is always FREE</a:t>
-            </a:r>
-          </a:p>
-          <a:p>
-            <a:pPr algn="l"/>
-            <a:r>
-              <a:rPr sz="2700" b="0">
-                <a:solidFill>
-                  <a:srgbClr val="222222"/>
-                </a:solidFill>
-                <a:latin typeface="Calibri"/>
-              </a:rPr>
-              <a:t>•  Bring your medication list — we go through it together</a:t>
+              <a:t>•  One call can free up real money every month</a:t>
             </a:r>
           </a:p>
         </p:txBody>
@@ -7767,7 +7413,7 @@
                 </a:solidFill>
                 <a:latin typeface="Georgia"/>
               </a:rPr>
-              <a:t>Caring for YOU: Budget Basics</a:t>
+              <a:t>Where Help Lives: 2-1-1</a:t>
             </a:r>
           </a:p>
         </p:txBody>
@@ -7802,7 +7448,7 @@
                 </a:solidFill>
                 <a:latin typeface="Calibri"/>
               </a:rPr>
-              <a:t>•  Know what comes in and what goes out</a:t>
+              <a:t>•  Dial 2-1-1 — free, local, real people</a:t>
             </a:r>
           </a:p>
           <a:p>
@@ -7814,7 +7460,7 @@
                 </a:solidFill>
                 <a:latin typeface="Calibri"/>
               </a:rPr>
-              <a:t>•  Write the bills down — one page is enough to start</a:t>
+              <a:t>•  Food, bills, rides, respite and more</a:t>
             </a:r>
           </a:p>
           <a:p>
@@ -7826,7 +7472,7 @@
                 </a:solidFill>
                 <a:latin typeface="Calibri"/>
               </a:rPr>
-              <a:t>•  You can call bill companies and ask for lower prices or more time</a:t>
+              <a:t>•  Help for San Antonio and the Rio Grande Valley</a:t>
             </a:r>
           </a:p>
           <a:p>
@@ -7838,19 +7484,7 @@
                 </a:solidFill>
                 <a:latin typeface="Calibri"/>
               </a:rPr>
-              <a:t>•  Small steps beat big stress</a:t>
-            </a:r>
-          </a:p>
-          <a:p>
-            <a:pPr algn="l"/>
-            <a:r>
-              <a:rPr sz="2700" b="0">
-                <a:solidFill>
-                  <a:srgbClr val="222222"/>
-                </a:solidFill>
-                <a:latin typeface="Calibri"/>
-              </a:rPr>
-              <a:t>•  Budget help is one of the things we do with families</a:t>
+              <a:t>•  You do not have to know what to ask for — just call</a:t>
             </a:r>
           </a:p>
         </p:txBody>

--- a/assets/Caregiver-Webinar-Nov13.pptx
+++ b/assets/Caregiver-Webinar-Nov13.pptx
@@ -16,8 +16,6 @@
     <p:sldId id="264" r:id="rId16"/>
     <p:sldId id="265" r:id="rId17"/>
     <p:sldId id="266" r:id="rId18"/>
-    <p:sldId id="267" r:id="rId19"/>
-    <p:sldId id="268" r:id="rId20"/>
   </p:sldIdLst>
   <p:sldSz cx="12191695" cy="6858000" type="screen4x3"/>
   <p:notesSz cx="6858000" cy="9144000"/>
@@ -514,7 +512,7 @@
           <a:lstStyle/>
           <a:p>
             <a:r>
-              <a:t>[Minutes 0–2] Welcome everyone. Say: November is Family Caregivers Month, and tonight is different — tonight is not a class about forms. Tonight is for YOU, the ones who help everyone else. No cost, no sales pitch. Questions at the end; the ones sent in at registration come first.</a:t>
+              <a:t>Welcome everyone. Tonight is for YOU — the parents and caregivers. You take care of everyone else. Tonight we talk about taking care of you, and why life insurance coverage matters for the person who gives the care. Keep it warm and simple. This is education, not a sales talk.</a:t>
             </a:r>
           </a:p>
         </p:txBody>
@@ -584,7 +582,7 @@
           <a:lstStyle/>
           <a:p>
             <a:r>
-              <a:t>[Minutes 30–33] Many parents have never heard the word respite. A rested caregiver is a safer caregiver. Encourage one small ask this month.</a:t>
+              <a:t>Close warm. Your talk and quote are free until you agree to a policy. If they want a talk, they can book on the website or send an email. Thank them for caring for their families — and for coming tonight.</a:t>
             </a:r>
           </a:p>
         </p:txBody>
@@ -654,147 +652,7 @@
           <a:lstStyle/>
           <a:p>
             <a:r>
-              <a:t>[Minutes 33–35] End the teaching with one doable step, not pressure. Then move to questions.</a:t>
-            </a:r>
-          </a:p>
-        </p:txBody>
-      </p:sp>
-      <p:sp>
-        <p:nvSpPr>
-          <p:cNvPr id="4" name="Slide Number Placeholder 3"/>
-          <p:cNvSpPr>
-            <a:spLocks noGrp="1"/>
-          </p:cNvSpPr>
-          <p:nvPr>
-            <p:ph type="sldNum" idx="5" sz="quarter"/>
-          </p:nvPr>
-        </p:nvSpPr>
-        <p:spPr/>
-      </p:sp>
-    </p:spTree>
-  </p:cSld>
-  <p:clrMapOvr>
-    <a:masterClrMapping/>
-  </p:clrMapOvr>
-</p:notes>
-</file>
-
-<file path=ppt/notesSlides/notesSlide12.xml><?xml version="1.0" encoding="utf-8"?>
-<p:notes xmlns:a="http://schemas.openxmlformats.org/drawingml/2006/main" xmlns:p="http://schemas.openxmlformats.org/presentationml/2006/main" xmlns:r="http://schemas.openxmlformats.org/officeDocument/2006/relationships">
-  <p:cSld>
-    <p:spTree>
-      <p:nvGrpSpPr>
-        <p:cNvPr id="1" name=""/>
-        <p:cNvGrpSpPr/>
-        <p:nvPr/>
-      </p:nvGrpSpPr>
-      <p:grpSpPr>
-        <a:xfrm>
-          <a:off x="0" y="0"/>
-          <a:ext cx="0" cy="0"/>
-          <a:chOff x="0" y="0"/>
-          <a:chExt cx="0" cy="0"/>
-        </a:xfrm>
-      </p:grpSpPr>
-      <p:sp>
-        <p:nvSpPr>
-          <p:cNvPr id="2" name="Slide Image Placeholder 1"/>
-          <p:cNvSpPr>
-            <a:spLocks noGrp="1"/>
-          </p:cNvSpPr>
-          <p:nvPr>
-            <p:ph type="sldImg" idx="2"/>
-          </p:nvPr>
-        </p:nvSpPr>
-        <p:spPr/>
-      </p:sp>
-      <p:sp>
-        <p:nvSpPr>
-          <p:cNvPr id="3" name="Notes Placeholder 2"/>
-          <p:cNvSpPr>
-            <a:spLocks noGrp="1"/>
-          </p:cNvSpPr>
-          <p:nvPr>
-            <p:ph type="body" idx="3" sz="quarter"/>
-          </p:nvPr>
-        </p:nvSpPr>
-        <p:spPr/>
-        <p:txBody>
-          <a:bodyPr/>
-          <a:lstStyle/>
-          <a:p>
-            <a:r>
-              <a:t>[Minutes 35–45] Registered questions first, as promised. Keep group answers general; private details belong in the free talk.</a:t>
-            </a:r>
-          </a:p>
-        </p:txBody>
-      </p:sp>
-      <p:sp>
-        <p:nvSpPr>
-          <p:cNvPr id="4" name="Slide Number Placeholder 3"/>
-          <p:cNvSpPr>
-            <a:spLocks noGrp="1"/>
-          </p:cNvSpPr>
-          <p:nvPr>
-            <p:ph type="sldNum" idx="5" sz="quarter"/>
-          </p:nvPr>
-        </p:nvSpPr>
-        <p:spPr/>
-      </p:sp>
-    </p:spTree>
-  </p:cSld>
-  <p:clrMapOvr>
-    <a:masterClrMapping/>
-  </p:clrMapOvr>
-</p:notes>
-</file>
-
-<file path=ppt/notesSlides/notesSlide13.xml><?xml version="1.0" encoding="utf-8"?>
-<p:notes xmlns:a="http://schemas.openxmlformats.org/drawingml/2006/main" xmlns:p="http://schemas.openxmlformats.org/presentationml/2006/main" xmlns:r="http://schemas.openxmlformats.org/officeDocument/2006/relationships">
-  <p:cSld>
-    <p:spTree>
-      <p:nvGrpSpPr>
-        <p:cNvPr id="1" name=""/>
-        <p:cNvGrpSpPr/>
-        <p:nvPr/>
-      </p:nvGrpSpPr>
-      <p:grpSpPr>
-        <a:xfrm>
-          <a:off x="0" y="0"/>
-          <a:ext cx="0" cy="0"/>
-          <a:chOff x="0" y="0"/>
-          <a:chExt cx="0" cy="0"/>
-        </a:xfrm>
-      </p:grpSpPr>
-      <p:sp>
-        <p:nvSpPr>
-          <p:cNvPr id="2" name="Slide Image Placeholder 1"/>
-          <p:cNvSpPr>
-            <a:spLocks noGrp="1"/>
-          </p:cNvSpPr>
-          <p:nvPr>
-            <p:ph type="sldImg" idx="2"/>
-          </p:nvPr>
-        </p:nvSpPr>
-        <p:spPr/>
-      </p:sp>
-      <p:sp>
-        <p:nvSpPr>
-          <p:cNvPr id="3" name="Notes Placeholder 2"/>
-          <p:cNvSpPr>
-            <a:spLocks noGrp="1"/>
-          </p:cNvSpPr>
-          <p:nvPr>
-            <p:ph type="body" idx="3" sz="quarter"/>
-          </p:nvPr>
-        </p:nvSpPr>
-        <p:spPr/>
-        <p:txBody>
-          <a:bodyPr/>
-          <a:lstStyle/>
-          <a:p>
-            <a:r>
-              <a:t>[Close] Thank them warmly and say Happy Thanksgiving. Remind them: the medication check and the first talk are free — we are here when they are ready.</a:t>
+              <a:t>Thank everyone. Take questions. Remind them: the Dec 11 webinar is 'Turning 18: What Changes.' Registration is on the website. 20 spots.</a:t>
             </a:r>
           </a:p>
         </p:txBody>
@@ -864,7 +722,7 @@
           <a:lstStyle/>
           <a:p>
             <a:r>
-              <a:t>[Minutes 2–3] Read the road map out loud. Tell them: everything tonight is something you can do from home — this whole night was built for real caregiver life.</a:t>
+              <a:t>Start here. Most caregivers never stop to think about themselves. Ask them to think about one question tonight: if I could not care for my loved one tomorrow, what would happen? We will answer it step by step. No pressure, no sales talk.</a:t>
             </a:r>
           </a:p>
         </p:txBody>
@@ -934,7 +792,7 @@
           <a:lstStyle/>
           <a:p>
             <a:r>
-              <a:t>[Minutes 3–6] Speak from the heart. Many parents never hear anyone say this out loud. This is the heart of the night — slow down here.</a:t>
+              <a:t>Say this gently. This is not to scare anyone. It is a plan, like a fire drill. The money from a policy can help pay for care and help the family keep going while they adjust.</a:t>
             </a:r>
           </a:p>
         </p:txBody>
@@ -1004,7 +862,7 @@
           <a:lstStyle/>
           <a:p>
             <a:r>
-              <a:t>[Minutes 6–10] Read the signs slowly — let them land. Say: if you nodded at two or more, tonight matters for you. Running on empty is normal for caregivers; it is not weakness, and it is not forever.</a:t>
+              <a:t>Keep it very plain. A policy is a written promise. The amount and rules are in the policy. Tonight is education only — no one has to decide anything tonight.</a:t>
             </a:r>
           </a:p>
         </p:txBody>
@@ -1074,7 +932,7 @@
           <a:lstStyle/>
           <a:p>
             <a:r>
-              <a:t>[Minutes 10–14] Practical and doable tonight. One list ends so much daily stress — no more guessing at the pharmacy or the doctor's office.</a:t>
+              <a:t>Living Benefits come from Accelerated Benefits Riders. The money is paid on a discounted basis and lowers the final amount. It is not long-term care insurance. Keep the honest lines: rules, limits, and waiting times apply, and it can affect taxes and public benefits — we always say to ask a tax person.</a:t>
             </a:r>
           </a:p>
         </p:txBody>
@@ -1144,7 +1002,7 @@
           <a:lstStyle/>
           <a:p>
             <a:r>
-              <a:t>[Minutes 14–18] This is the help caregivers look for most: medication costs. Explain plainly what the check is and that it costs nothing. Invite them to book one after class — first talk is free too.</a:t>
+              <a:t>This is the heart of the night. The caregiver IS the plan right now. Insurance turns 'me' into a real plan that still works if something happens to me.</a:t>
             </a:r>
           </a:p>
         </p:txBody>
@@ -1214,7 +1072,7 @@
           <a:lstStyle/>
           <a:p>
             <a:r>
-              <a:t>[Minutes 18–23] Gentle, no shame about money — ever. One page of bills is the start of every budget we build with a family. Just teach the step tonight; prices stay out of the class.</a:t>
+              <a:t>Many families think they must start big. They do not. Start where the budget fits. And be honest: if health changes, a person may not be able to get coverage later. Getting it while you can is the point.</a:t>
             </a:r>
           </a:p>
         </p:txBody>
@@ -1284,7 +1142,7 @@
           <a:lstStyle/>
           <a:p>
             <a:r>
-              <a:t>[Minutes 23–27] Families are surprised this works. Phone, internet, and medical bills are the best first calls. The worst they can say is no — and often they say yes.</a:t>
+              <a:t>Say this clearly. This is the mistake we never want a family to make. The trust is usually the one named in the policy. Southern Oak does not set up trusts — an attorney does. We help families see the whole picture before they sign anything.</a:t>
             </a:r>
           </a:p>
         </p:txBody>
@@ -1354,7 +1212,7 @@
           <a:lstStyle/>
           <a:p>
             <a:r>
-              <a:t>[Minutes 27–30] 2-1-1 is the front door to local help and Southern Oak is joining its listings. Tell them to save the number in their phone tonight.</a:t>
+              <a:t>Our honest slide. Families trust us because we say the hard parts out loud. Everything is in the policy, and we go through it line by line in a free talk before anyone agrees to anything.</a:t>
             </a:r>
           </a:p>
         </p:txBody>
@@ -4353,6 +4211,14 @@
 <file path=ppt/slides/slide1.xml><?xml version="1.0" encoding="utf-8"?>
 <p:sld xmlns:a="http://schemas.openxmlformats.org/drawingml/2006/main" xmlns:p="http://schemas.openxmlformats.org/presentationml/2006/main" xmlns:r="http://schemas.openxmlformats.org/officeDocument/2006/relationships">
   <p:cSld>
+    <p:bg>
+      <p:bgPr>
+        <a:solidFill>
+          <a:srgbClr val="3E4A2E"/>
+        </a:solidFill>
+        <a:effectLst/>
+      </p:bgPr>
+    </p:bg>
     <p:spTree>
       <p:nvGrpSpPr>
         <p:cNvPr id="1" name=""/>
@@ -4360,6 +4226,228 @@
         <p:nvPr/>
       </p:nvGrpSpPr>
       <p:grpSpPr/>
+      <p:pic>
+        <p:nvPicPr>
+          <p:cNvPr id="2" name="Picture 1" descr="southern-oak-logo.png"/>
+          <p:cNvPicPr>
+            <a:picLocks noChangeAspect="1"/>
+          </p:cNvPicPr>
+          <p:nvPr/>
+        </p:nvPicPr>
+        <p:blipFill>
+          <a:blip r:embed="rId2"/>
+          <a:stretch>
+            <a:fillRect/>
+          </a:stretch>
+        </p:blipFill>
+        <p:spPr>
+          <a:xfrm>
+            <a:off x="4956048" y="502920"/>
+            <a:ext cx="1425325" cy="1737360"/>
+          </a:xfrm>
+          <a:prstGeom prst="rect">
+            <a:avLst/>
+          </a:prstGeom>
+        </p:spPr>
+      </p:pic>
+      <p:sp>
+        <p:nvSpPr>
+          <p:cNvPr id="3" name="TextBox 2"/>
+          <p:cNvSpPr txBox="1"/>
+          <p:nvPr/>
+        </p:nvSpPr>
+        <p:spPr>
+          <a:xfrm>
+            <a:off x="731520" y="2468880"/>
+            <a:ext cx="10698480" cy="1737360"/>
+          </a:xfrm>
+          <a:prstGeom prst="rect">
+            <a:avLst/>
+          </a:prstGeom>
+          <a:noFill/>
+        </p:spPr>
+        <p:txBody>
+          <a:bodyPr wrap="square" anchor="t">
+            <a:spAutoFit/>
+          </a:bodyPr>
+          <a:lstStyle/>
+          <a:p>
+            <a:pPr algn="ctr">
+              <a:lnSpc>
+                <a:spcPct val="115000"/>
+              </a:lnSpc>
+            </a:pPr>
+            <a:r>
+              <a:rPr sz="4300" b="1" i="0">
+                <a:solidFill>
+                  <a:srgbClr val="FFFFFF"/>
+                </a:solidFill>
+                <a:latin typeface="Georgia"/>
+              </a:rPr>
+              <a:t>Caregivers:</a:t>
+            </a:r>
+          </a:p>
+          <a:p>
+            <a:pPr algn="ctr">
+              <a:lnSpc>
+                <a:spcPct val="115000"/>
+              </a:lnSpc>
+            </a:pPr>
+            <a:r>
+              <a:rPr sz="4300" b="1" i="0">
+                <a:solidFill>
+                  <a:srgbClr val="FFFFFF"/>
+                </a:solidFill>
+                <a:latin typeface="Georgia"/>
+              </a:rPr>
+              <a:t>Why You Need Life Insurance Coverage</a:t>
+            </a:r>
+          </a:p>
+        </p:txBody>
+      </p:sp>
+      <p:sp>
+        <p:nvSpPr>
+          <p:cNvPr id="4" name="TextBox 3"/>
+          <p:cNvSpPr txBox="1"/>
+          <p:nvPr/>
+        </p:nvSpPr>
+        <p:spPr>
+          <a:xfrm>
+            <a:off x="731520" y="4343400"/>
+            <a:ext cx="10698480" cy="548640"/>
+          </a:xfrm>
+          <a:prstGeom prst="rect">
+            <a:avLst/>
+          </a:prstGeom>
+          <a:noFill/>
+        </p:spPr>
+        <p:txBody>
+          <a:bodyPr wrap="square" anchor="t">
+            <a:spAutoFit/>
+          </a:bodyPr>
+          <a:lstStyle/>
+          <a:p>
+            <a:pPr algn="ctr">
+              <a:lnSpc>
+                <a:spcPct val="112000"/>
+              </a:lnSpc>
+            </a:pPr>
+            <a:r>
+              <a:rPr sz="2200" b="0" i="0">
+                <a:solidFill>
+                  <a:srgbClr val="E9DFC8"/>
+                </a:solidFill>
+                <a:latin typeface="Verdana"/>
+              </a:rPr>
+              <a:t>A Free Zoom Webinar for Family Caregivers</a:t>
+            </a:r>
+          </a:p>
+        </p:txBody>
+      </p:sp>
+      <p:sp>
+        <p:nvSpPr>
+          <p:cNvPr id="5" name="TextBox 4"/>
+          <p:cNvSpPr txBox="1"/>
+          <p:nvPr/>
+        </p:nvSpPr>
+        <p:spPr>
+          <a:xfrm>
+            <a:off x="731520" y="5029200"/>
+            <a:ext cx="10698480" cy="548640"/>
+          </a:xfrm>
+          <a:prstGeom prst="rect">
+            <a:avLst/>
+          </a:prstGeom>
+          <a:noFill/>
+        </p:spPr>
+        <p:txBody>
+          <a:bodyPr wrap="square" anchor="t">
+            <a:spAutoFit/>
+          </a:bodyPr>
+          <a:lstStyle/>
+          <a:p>
+            <a:pPr algn="ctr">
+              <a:lnSpc>
+                <a:spcPct val="112000"/>
+              </a:lnSpc>
+            </a:pPr>
+            <a:r>
+              <a:rPr sz="2000" b="0" i="0">
+                <a:solidFill>
+                  <a:srgbClr val="FFFFFF"/>
+                </a:solidFill>
+                <a:latin typeface="Verdana"/>
+              </a:rPr>
+              <a:t>Friday, November 13, 2026  •  6:30–7:15 PM Central Time</a:t>
+            </a:r>
+          </a:p>
+        </p:txBody>
+      </p:sp>
+      <p:sp>
+        <p:nvSpPr>
+          <p:cNvPr id="6" name="TextBox 5"/>
+          <p:cNvSpPr txBox="1"/>
+          <p:nvPr/>
+        </p:nvSpPr>
+        <p:spPr>
+          <a:xfrm>
+            <a:off x="731520" y="5806440"/>
+            <a:ext cx="10698480" cy="457200"/>
+          </a:xfrm>
+          <a:prstGeom prst="rect">
+            <a:avLst/>
+          </a:prstGeom>
+          <a:noFill/>
+        </p:spPr>
+        <p:txBody>
+          <a:bodyPr wrap="square" anchor="t">
+            <a:spAutoFit/>
+          </a:bodyPr>
+          <a:lstStyle/>
+          <a:p>
+            <a:pPr algn="ctr">
+              <a:lnSpc>
+                <a:spcPct val="112000"/>
+              </a:lnSpc>
+            </a:pPr>
+            <a:r>
+              <a:rPr sz="1700" b="0" i="0">
+                <a:solidFill>
+                  <a:srgbClr val="E9DFC8"/>
+                </a:solidFill>
+                <a:latin typeface="Verdana"/>
+              </a:rPr>
+              <a:t>Jessica Alvarez  •  Southern Oak Financial &amp; Wellness</a:t>
+            </a:r>
+          </a:p>
+        </p:txBody>
+      </p:sp>
+    </p:spTree>
+  </p:cSld>
+  <p:clrMapOvr>
+    <a:masterClrMapping/>
+  </p:clrMapOvr>
+</p:sld>
+</file>
+
+<file path=ppt/slides/slide10.xml><?xml version="1.0" encoding="utf-8"?>
+<p:sld xmlns:a="http://schemas.openxmlformats.org/drawingml/2006/main" xmlns:p="http://schemas.openxmlformats.org/presentationml/2006/main" xmlns:r="http://schemas.openxmlformats.org/officeDocument/2006/relationships">
+  <p:cSld>
+    <p:bg>
+      <p:bgPr>
+        <a:solidFill>
+          <a:srgbClr val="FAF5EA"/>
+        </a:solidFill>
+        <a:effectLst/>
+      </p:bgPr>
+    </p:bg>
+    <p:spTree>
+      <p:nvGrpSpPr>
+        <p:cNvPr id="1" name=""/>
+        <p:cNvGrpSpPr/>
+        <p:nvPr/>
+      </p:nvGrpSpPr>
+      <p:grpSpPr/>
       <p:sp>
         <p:nvSpPr>
           <p:cNvPr id="2" name="Rectangle 1"/>
@@ -4369,13 +4457,13 @@
         <p:spPr>
           <a:xfrm>
             <a:off x="0" y="0"/>
-            <a:ext cx="12191695" cy="6858000"/>
+            <a:ext cx="12191695" cy="1078992"/>
           </a:xfrm>
           <a:prstGeom prst="rect">
             <a:avLst/>
           </a:prstGeom>
           <a:solidFill>
-            <a:srgbClr val="FAF4E6"/>
+            <a:srgbClr val="3E4A2E"/>
           </a:solidFill>
           <a:ln>
             <a:noFill/>
@@ -4404,204 +4492,22 @@
           </a:p>
         </p:txBody>
       </p:sp>
-      <p:pic>
-        <p:nvPicPr>
-          <p:cNvPr id="3" name="Picture 2" descr="southern-oak-logo.png"/>
-          <p:cNvPicPr>
-            <a:picLocks noChangeAspect="1"/>
-          </p:cNvPicPr>
-          <p:nvPr/>
-        </p:nvPicPr>
-        <p:blipFill>
-          <a:blip r:embed="rId2"/>
-          <a:stretch>
-            <a:fillRect/>
-          </a:stretch>
-        </p:blipFill>
-        <p:spPr>
-          <a:xfrm>
-            <a:off x="457200" y="320040"/>
-            <a:ext cx="1125257" cy="1371600"/>
-          </a:xfrm>
-          <a:prstGeom prst="rect">
-            <a:avLst/>
-          </a:prstGeom>
-        </p:spPr>
-      </p:pic>
-      <p:sp>
-        <p:nvSpPr>
-          <p:cNvPr id="4" name="TextBox 3"/>
-          <p:cNvSpPr txBox="1"/>
-          <p:nvPr/>
-        </p:nvSpPr>
-        <p:spPr>
-          <a:xfrm>
-            <a:off x="1097280" y="1828800"/>
-            <a:ext cx="9966960" cy="1737360"/>
-          </a:xfrm>
-          <a:prstGeom prst="rect">
-            <a:avLst/>
-          </a:prstGeom>
-          <a:noFill/>
-        </p:spPr>
-        <p:txBody>
-          <a:bodyPr wrap="square">
-            <a:spAutoFit/>
-          </a:bodyPr>
-          <a:lstStyle/>
-          <a:p>
-            <a:pPr algn="ctr"/>
-            <a:r>
-              <a:rPr sz="5400" b="1">
-                <a:solidFill>
-                  <a:srgbClr val="2E4A2B"/>
-                </a:solidFill>
-                <a:latin typeface="Georgia"/>
-              </a:rPr>
-              <a:t>Caring for the Caregiver</a:t>
-            </a:r>
-          </a:p>
-        </p:txBody>
-      </p:sp>
-      <p:sp>
-        <p:nvSpPr>
-          <p:cNvPr id="5" name="TextBox 4"/>
-          <p:cNvSpPr txBox="1"/>
-          <p:nvPr/>
-        </p:nvSpPr>
-        <p:spPr>
-          <a:xfrm>
-            <a:off x="1097280" y="3429000"/>
-            <a:ext cx="9966960" cy="731520"/>
-          </a:xfrm>
-          <a:prstGeom prst="rect">
-            <a:avLst/>
-          </a:prstGeom>
-          <a:noFill/>
-        </p:spPr>
-        <p:txBody>
-          <a:bodyPr wrap="square">
-            <a:spAutoFit/>
-          </a:bodyPr>
-          <a:lstStyle/>
-          <a:p>
-            <a:pPr algn="ctr"/>
-            <a:r>
-              <a:rPr sz="3000" b="0">
-                <a:solidFill>
-                  <a:srgbClr val="C76624"/>
-                </a:solidFill>
-                <a:latin typeface="Calibri"/>
-              </a:rPr>
-              <a:t>A Night for the Ones Who Help Everyone Else</a:t>
-            </a:r>
-          </a:p>
-        </p:txBody>
-      </p:sp>
-      <p:sp>
-        <p:nvSpPr>
-          <p:cNvPr id="6" name="TextBox 5"/>
-          <p:cNvSpPr txBox="1"/>
-          <p:nvPr/>
-        </p:nvSpPr>
-        <p:spPr>
-          <a:xfrm>
-            <a:off x="1097280" y="4206240"/>
-            <a:ext cx="9966960" cy="640080"/>
-          </a:xfrm>
-          <a:prstGeom prst="rect">
-            <a:avLst/>
-          </a:prstGeom>
-          <a:noFill/>
-        </p:spPr>
-        <p:txBody>
-          <a:bodyPr wrap="square">
-            <a:spAutoFit/>
-          </a:bodyPr>
-          <a:lstStyle/>
-          <a:p>
-            <a:pPr algn="ctr"/>
-            <a:r>
-              <a:rPr sz="2400" b="0">
-                <a:solidFill>
-                  <a:srgbClr val="222222"/>
-                </a:solidFill>
-                <a:latin typeface="Calibri"/>
-              </a:rPr>
-              <a:t>Friday, November 13, 2026 · 6:30–7:15 PM CT · Live on Zoom</a:t>
-            </a:r>
-          </a:p>
-        </p:txBody>
-      </p:sp>
-      <p:sp>
-        <p:nvSpPr>
-          <p:cNvPr id="7" name="TextBox 6"/>
-          <p:cNvSpPr txBox="1"/>
-          <p:nvPr/>
-        </p:nvSpPr>
-        <p:spPr>
-          <a:xfrm>
-            <a:off x="1097280" y="6035040"/>
-            <a:ext cx="9966960" cy="457200"/>
-          </a:xfrm>
-          <a:prstGeom prst="rect">
-            <a:avLst/>
-          </a:prstGeom>
-          <a:noFill/>
-        </p:spPr>
-        <p:txBody>
-          <a:bodyPr wrap="square">
-            <a:spAutoFit/>
-          </a:bodyPr>
-          <a:lstStyle/>
-          <a:p>
-            <a:pPr algn="ctr"/>
-            <a:r>
-              <a:rPr sz="1800" b="0">
-                <a:solidFill>
-                  <a:srgbClr val="2E4A2B"/>
-                </a:solidFill>
-                <a:latin typeface="Calibri"/>
-              </a:rPr>
-              <a:t>Jessica Alvarez  |  Southern Oak Financial &amp; Wellness</a:t>
-            </a:r>
-          </a:p>
-        </p:txBody>
-      </p:sp>
-    </p:spTree>
-  </p:cSld>
-  <p:clrMapOvr>
-    <a:masterClrMapping/>
-  </p:clrMapOvr>
-</p:sld>
-</file>
-
-<file path=ppt/slides/slide10.xml><?xml version="1.0" encoding="utf-8"?>
-<p:sld xmlns:a="http://schemas.openxmlformats.org/drawingml/2006/main" xmlns:p="http://schemas.openxmlformats.org/presentationml/2006/main" xmlns:r="http://schemas.openxmlformats.org/officeDocument/2006/relationships">
-  <p:cSld>
-    <p:spTree>
-      <p:nvGrpSpPr>
-        <p:cNvPr id="1" name=""/>
-        <p:cNvGrpSpPr/>
-        <p:nvPr/>
-      </p:nvGrpSpPr>
-      <p:grpSpPr/>
-      <p:sp>
-        <p:nvSpPr>
-          <p:cNvPr id="2" name="Rectangle 1"/>
+      <p:sp>
+        <p:nvSpPr>
+          <p:cNvPr id="3" name="Rectangle 2"/>
           <p:cNvSpPr/>
           <p:nvPr/>
         </p:nvSpPr>
         <p:spPr>
           <a:xfrm>
-            <a:off x="0" y="0"/>
-            <a:ext cx="12191695" cy="6858000"/>
+            <a:off x="0" y="1078992"/>
+            <a:ext cx="12191695" cy="50292"/>
           </a:xfrm>
           <a:prstGeom prst="rect">
             <a:avLst/>
           </a:prstGeom>
           <a:solidFill>
-            <a:srgbClr val="FAF4E6"/>
+            <a:srgbClr val="C46224"/>
           </a:solidFill>
           <a:ln>
             <a:noFill/>
@@ -4632,23 +4538,223 @@
       </p:sp>
       <p:sp>
         <p:nvSpPr>
-          <p:cNvPr id="3" name="Rectangle 2"/>
+          <p:cNvPr id="4" name="TextBox 3"/>
+          <p:cNvSpPr txBox="1"/>
+          <p:nvPr/>
+        </p:nvSpPr>
+        <p:spPr>
+          <a:xfrm>
+            <a:off x="502920" y="146304"/>
+            <a:ext cx="9692640" cy="822960"/>
+          </a:xfrm>
+          <a:prstGeom prst="rect">
+            <a:avLst/>
+          </a:prstGeom>
+          <a:noFill/>
+        </p:spPr>
+        <p:txBody>
+          <a:bodyPr wrap="square" anchor="ctr">
+            <a:spAutoFit/>
+          </a:bodyPr>
+          <a:lstStyle/>
+          <a:p>
+            <a:pPr algn="l">
+              <a:lnSpc>
+                <a:spcPct val="112000"/>
+              </a:lnSpc>
+            </a:pPr>
+            <a:r>
+              <a:rPr sz="3100" b="1" i="0">
+                <a:solidFill>
+                  <a:srgbClr val="FFFFFF"/>
+                </a:solidFill>
+                <a:latin typeface="Georgia"/>
+              </a:rPr>
+              <a:t>Your Free Talk</a:t>
+            </a:r>
+          </a:p>
+        </p:txBody>
+      </p:sp>
+      <p:pic>
+        <p:nvPicPr>
+          <p:cNvPr id="5" name="Picture 4" descr="southern-oak-logo.png"/>
+          <p:cNvPicPr>
+            <a:picLocks noChangeAspect="1"/>
+          </p:cNvPicPr>
+          <p:nvPr/>
+        </p:nvPicPr>
+        <p:blipFill>
+          <a:blip r:embed="rId2"/>
+          <a:stretch>
+            <a:fillRect/>
+          </a:stretch>
+        </p:blipFill>
+        <p:spPr>
+          <a:xfrm>
+            <a:off x="11018520" y="82296"/>
+            <a:ext cx="750171" cy="914400"/>
+          </a:xfrm>
+          <a:prstGeom prst="rect">
+            <a:avLst/>
+          </a:prstGeom>
+        </p:spPr>
+      </p:pic>
+      <p:sp>
+        <p:nvSpPr>
+          <p:cNvPr id="6" name="TextBox 5"/>
+          <p:cNvSpPr txBox="1"/>
+          <p:nvPr/>
+        </p:nvSpPr>
+        <p:spPr>
+          <a:xfrm>
+            <a:off x="640080" y="1600200"/>
+            <a:ext cx="10881360" cy="3108960"/>
+          </a:xfrm>
+          <a:prstGeom prst="rect">
+            <a:avLst/>
+          </a:prstGeom>
+          <a:noFill/>
+        </p:spPr>
+        <p:txBody>
+          <a:bodyPr wrap="square">
+            <a:spAutoFit/>
+          </a:bodyPr>
+          <a:lstStyle/>
+          <a:p>
+            <a:pPr>
+              <a:lnSpc>
+                <a:spcPct val="115000"/>
+              </a:lnSpc>
+              <a:spcAft>
+                <a:spcPts val="1200"/>
+              </a:spcAft>
+            </a:pPr>
+            <a:r>
+              <a:rPr sz="2300" b="1">
+                <a:solidFill>
+                  <a:srgbClr val="C46224"/>
+                </a:solidFill>
+                <a:latin typeface="Verdana"/>
+              </a:rPr>
+              <a:t>▸  </a:t>
+            </a:r>
+            <a:r>
+              <a:rPr sz="2300">
+                <a:solidFill>
+                  <a:srgbClr val="2B2B26"/>
+                </a:solidFill>
+                <a:latin typeface="Verdana"/>
+              </a:rPr>
+              <a:t>Your life insurance talk and your quote are FREE.</a:t>
+            </a:r>
+          </a:p>
+          <a:p>
+            <a:pPr>
+              <a:lnSpc>
+                <a:spcPct val="115000"/>
+              </a:lnSpc>
+              <a:spcAft>
+                <a:spcPts val="1200"/>
+              </a:spcAft>
+            </a:pPr>
+            <a:r>
+              <a:rPr sz="2300" b="1">
+                <a:solidFill>
+                  <a:srgbClr val="C46224"/>
+                </a:solidFill>
+                <a:latin typeface="Verdana"/>
+              </a:rPr>
+              <a:t>▸  </a:t>
+            </a:r>
+            <a:r>
+              <a:rPr sz="2300">
+                <a:solidFill>
+                  <a:srgbClr val="2B2B26"/>
+                </a:solidFill>
+                <a:latin typeface="Verdana"/>
+              </a:rPr>
+              <a:t>You pay only if you say yes to a policy.</a:t>
+            </a:r>
+          </a:p>
+          <a:p>
+            <a:pPr>
+              <a:lnSpc>
+                <a:spcPct val="115000"/>
+              </a:lnSpc>
+              <a:spcAft>
+                <a:spcPts val="1200"/>
+              </a:spcAft>
+            </a:pPr>
+            <a:r>
+              <a:rPr sz="2300" b="1">
+                <a:solidFill>
+                  <a:srgbClr val="C46224"/>
+                </a:solidFill>
+                <a:latin typeface="Verdana"/>
+              </a:rPr>
+              <a:t>▸  </a:t>
+            </a:r>
+            <a:r>
+              <a:rPr sz="2300">
+                <a:solidFill>
+                  <a:srgbClr val="2B2B26"/>
+                </a:solidFill>
+                <a:latin typeface="Verdana"/>
+              </a:rPr>
+              <a:t>We go at your pace. No pressure, ever.</a:t>
+            </a:r>
+          </a:p>
+          <a:p>
+            <a:pPr>
+              <a:lnSpc>
+                <a:spcPct val="115000"/>
+              </a:lnSpc>
+              <a:spcAft>
+                <a:spcPts val="1200"/>
+              </a:spcAft>
+            </a:pPr>
+            <a:r>
+              <a:rPr sz="2300" b="1">
+                <a:solidFill>
+                  <a:srgbClr val="C46224"/>
+                </a:solidFill>
+                <a:latin typeface="Verdana"/>
+              </a:rPr>
+              <a:t>▸  </a:t>
+            </a:r>
+            <a:r>
+              <a:rPr sz="2300">
+                <a:solidFill>
+                  <a:srgbClr val="2B2B26"/>
+                </a:solidFill>
+                <a:latin typeface="Verdana"/>
+              </a:rPr>
+              <a:t>Book at southernoakfw.org — or email southernoakfw@gmail.com.</a:t>
+            </a:r>
+          </a:p>
+        </p:txBody>
+      </p:sp>
+      <p:sp>
+        <p:nvSpPr>
+          <p:cNvPr id="7" name="Rectangle 6"/>
           <p:cNvSpPr/>
           <p:nvPr/>
         </p:nvSpPr>
         <p:spPr>
           <a:xfrm>
-            <a:off x="0" y="0"/>
-            <a:ext cx="12191695" cy="1051560"/>
+            <a:off x="640080" y="4709160"/>
+            <a:ext cx="10881360" cy="1325880"/>
           </a:xfrm>
           <a:prstGeom prst="rect">
             <a:avLst/>
           </a:prstGeom>
           <a:solidFill>
-            <a:srgbClr val="2E4A2B"/>
+            <a:srgbClr val="FFFFFF"/>
           </a:solidFill>
-          <a:ln>
-            <a:noFill/>
+          <a:ln w="12700">
+            <a:solidFill>
+              <a:srgbClr val="E9DFC8"/>
+            </a:solidFill>
           </a:ln>
           <a:effectLst/>
         </p:spPr>
@@ -4674,16 +4780,64 @@
           </a:p>
         </p:txBody>
       </p:sp>
-      <p:sp>
-        <p:nvSpPr>
-          <p:cNvPr id="4" name="TextBox 3"/>
+      <p:pic>
+        <p:nvPicPr>
+          <p:cNvPr id="8" name="Picture 7" descr="pfa-logo-trim.png"/>
+          <p:cNvPicPr>
+            <a:picLocks noChangeAspect="1"/>
+          </p:cNvPicPr>
+          <p:nvPr/>
+        </p:nvPicPr>
+        <p:blipFill>
+          <a:blip r:embed="rId3"/>
+          <a:stretch>
+            <a:fillRect/>
+          </a:stretch>
+        </p:blipFill>
+        <p:spPr>
+          <a:xfrm>
+            <a:off x="1463040" y="5029200"/>
+            <a:ext cx="2568844" cy="685800"/>
+          </a:xfrm>
+          <a:prstGeom prst="rect">
+            <a:avLst/>
+          </a:prstGeom>
+        </p:spPr>
+      </p:pic>
+      <p:pic>
+        <p:nvPicPr>
+          <p:cNvPr id="9" name="Picture 8" descr="nlg-logo-trim.png"/>
+          <p:cNvPicPr>
+            <a:picLocks noChangeAspect="1"/>
+          </p:cNvPicPr>
+          <p:nvPr/>
+        </p:nvPicPr>
+        <p:blipFill>
+          <a:blip r:embed="rId4"/>
+          <a:stretch>
+            <a:fillRect/>
+          </a:stretch>
+        </p:blipFill>
+        <p:spPr>
+          <a:xfrm>
+            <a:off x="5577840" y="5029200"/>
+            <a:ext cx="2617092" cy="685800"/>
+          </a:xfrm>
+          <a:prstGeom prst="rect">
+            <a:avLst/>
+          </a:prstGeom>
+        </p:spPr>
+      </p:pic>
+      <p:sp>
+        <p:nvSpPr>
+          <p:cNvPr id="10" name="TextBox 9"/>
           <p:cNvSpPr txBox="1"/>
           <p:nvPr/>
         </p:nvSpPr>
         <p:spPr>
           <a:xfrm>
-            <a:off x="548640" y="164592"/>
-            <a:ext cx="11064240" cy="777240"/>
+            <a:off x="8503920" y="5074920"/>
+            <a:ext cx="2834640" cy="731520"/>
           </a:xfrm>
           <a:prstGeom prst="rect">
             <a:avLst/>
@@ -4691,34 +4845,38 @@
           <a:noFill/>
         </p:spPr>
         <p:txBody>
-          <a:bodyPr wrap="square">
+          <a:bodyPr wrap="square" anchor="t">
             <a:spAutoFit/>
           </a:bodyPr>
           <a:lstStyle/>
           <a:p>
-            <a:pPr algn="l"/>
-            <a:r>
-              <a:rPr sz="4000" b="1">
-                <a:solidFill>
-                  <a:srgbClr val="FFFFFF"/>
-                </a:solidFill>
-                <a:latin typeface="Georgia"/>
-              </a:rPr>
-              <a:t>Real Breaks: Respite</a:t>
-            </a:r>
-          </a:p>
-        </p:txBody>
-      </p:sp>
-      <p:sp>
-        <p:nvSpPr>
-          <p:cNvPr id="5" name="TextBox 4"/>
+            <a:pPr algn="l">
+              <a:lnSpc>
+                <a:spcPct val="112000"/>
+              </a:lnSpc>
+            </a:pPr>
+            <a:r>
+              <a:rPr sz="1350" b="0" i="0">
+                <a:solidFill>
+                  <a:srgbClr val="2B2B26"/>
+                </a:solidFill>
+                <a:latin typeface="Verdana"/>
+              </a:rPr>
+              <a:t>Life insurance through Premier Financial Alliance and National Life Group.</a:t>
+            </a:r>
+          </a:p>
+        </p:txBody>
+      </p:sp>
+      <p:sp>
+        <p:nvSpPr>
+          <p:cNvPr id="11" name="TextBox 10"/>
           <p:cNvSpPr txBox="1"/>
           <p:nvPr/>
         </p:nvSpPr>
         <p:spPr>
           <a:xfrm>
-            <a:off x="822960" y="1554480"/>
-            <a:ext cx="10607040" cy="4480560"/>
+            <a:off x="502920" y="6473952"/>
+            <a:ext cx="11155680" cy="292608"/>
           </a:xfrm>
           <a:prstGeom prst="rect">
             <a:avLst/>
@@ -4726,91 +4884,24 @@
           <a:noFill/>
         </p:spPr>
         <p:txBody>
-          <a:bodyPr wrap="square">
+          <a:bodyPr wrap="square" anchor="t">
             <a:spAutoFit/>
           </a:bodyPr>
           <a:lstStyle/>
           <a:p>
-            <a:pPr algn="l"/>
-            <a:r>
-              <a:rPr sz="2700" b="0">
-                <a:solidFill>
-                  <a:srgbClr val="222222"/>
-                </a:solidFill>
-                <a:latin typeface="Calibri"/>
-              </a:rPr>
-              <a:t>•  Respite means a trained person stays with your child</a:t>
-            </a:r>
-          </a:p>
-          <a:p>
-            <a:pPr algn="l"/>
-            <a:r>
-              <a:rPr sz="2700" b="0">
-                <a:solidFill>
-                  <a:srgbClr val="222222"/>
-                </a:solidFill>
-                <a:latin typeface="Calibri"/>
-              </a:rPr>
-              <a:t>•  So you can rest, shop, or just breathe</a:t>
-            </a:r>
-          </a:p>
-          <a:p>
-            <a:pPr algn="l"/>
-            <a:r>
-              <a:rPr sz="2700" b="0">
-                <a:solidFill>
-                  <a:srgbClr val="222222"/>
-                </a:solidFill>
-                <a:latin typeface="Calibri"/>
-              </a:rPr>
-              <a:t>•  Ask 2-1-1 and your local disability organizations</a:t>
-            </a:r>
-          </a:p>
-          <a:p>
-            <a:pPr algn="l"/>
-            <a:r>
-              <a:rPr sz="2700" b="0">
-                <a:solidFill>
-                  <a:srgbClr val="222222"/>
-                </a:solidFill>
-                <a:latin typeface="Calibri"/>
-              </a:rPr>
-              <a:t>•  A break is not giving up — it is how caregivers last</a:t>
-            </a:r>
-          </a:p>
-        </p:txBody>
-      </p:sp>
-      <p:sp>
-        <p:nvSpPr>
-          <p:cNvPr id="6" name="TextBox 5"/>
-          <p:cNvSpPr txBox="1"/>
-          <p:nvPr/>
-        </p:nvSpPr>
-        <p:spPr>
-          <a:xfrm>
-            <a:off x="548640" y="6355080"/>
-            <a:ext cx="11064240" cy="365760"/>
-          </a:xfrm>
-          <a:prstGeom prst="rect">
-            <a:avLst/>
-          </a:prstGeom>
-          <a:noFill/>
-        </p:spPr>
-        <p:txBody>
-          <a:bodyPr wrap="square">
-            <a:spAutoFit/>
-          </a:bodyPr>
-          <a:lstStyle/>
-          <a:p>
-            <a:pPr algn="l"/>
-            <a:r>
-              <a:rPr sz="1400" b="0">
-                <a:solidFill>
-                  <a:srgbClr val="2E4A2B"/>
-                </a:solidFill>
-                <a:latin typeface="Calibri"/>
-              </a:rPr>
-              <a:t>Southern Oak Financial &amp; Wellness — Free Zoom Webinar</a:t>
+            <a:pPr algn="l">
+              <a:lnSpc>
+                <a:spcPct val="112000"/>
+              </a:lnSpc>
+            </a:pPr>
+            <a:r>
+              <a:rPr sz="1150" b="0" i="0">
+                <a:solidFill>
+                  <a:srgbClr val="7A7466"/>
+                </a:solidFill>
+                <a:latin typeface="Verdana"/>
+              </a:rPr>
+              <a:t>Southern Oak Financial &amp; Wellness  •  southernoakfw.org</a:t>
             </a:r>
           </a:p>
         </p:txBody>
@@ -4826,6 +4917,14 @@
 <file path=ppt/slides/slide11.xml><?xml version="1.0" encoding="utf-8"?>
 <p:sld xmlns:a="http://schemas.openxmlformats.org/drawingml/2006/main" xmlns:p="http://schemas.openxmlformats.org/presentationml/2006/main" xmlns:r="http://schemas.openxmlformats.org/officeDocument/2006/relationships">
   <p:cSld>
+    <p:bg>
+      <p:bgPr>
+        <a:solidFill>
+          <a:srgbClr val="3E4A2E"/>
+        </a:solidFill>
+        <a:effectLst/>
+      </p:bgPr>
+    </p:bg>
     <p:spTree>
       <p:nvGrpSpPr>
         <p:cNvPr id="1" name=""/>
@@ -4835,6 +4934,188 @@
       <p:grpSpPr/>
       <p:sp>
         <p:nvSpPr>
+          <p:cNvPr id="2" name="TextBox 1"/>
+          <p:cNvSpPr txBox="1"/>
+          <p:nvPr/>
+        </p:nvSpPr>
+        <p:spPr>
+          <a:xfrm>
+            <a:off x="731520" y="2011680"/>
+            <a:ext cx="10698480" cy="1097280"/>
+          </a:xfrm>
+          <a:prstGeom prst="rect">
+            <a:avLst/>
+          </a:prstGeom>
+          <a:noFill/>
+        </p:spPr>
+        <p:txBody>
+          <a:bodyPr wrap="square" anchor="t">
+            <a:spAutoFit/>
+          </a:bodyPr>
+          <a:lstStyle/>
+          <a:p>
+            <a:pPr algn="ctr">
+              <a:lnSpc>
+                <a:spcPct val="112000"/>
+              </a:lnSpc>
+            </a:pPr>
+            <a:r>
+              <a:rPr sz="4800" b="1" i="0">
+                <a:solidFill>
+                  <a:srgbClr val="FFFFFF"/>
+                </a:solidFill>
+                <a:latin typeface="Georgia"/>
+              </a:rPr>
+              <a:t>Thank You</a:t>
+            </a:r>
+          </a:p>
+        </p:txBody>
+      </p:sp>
+      <p:sp>
+        <p:nvSpPr>
+          <p:cNvPr id="3" name="TextBox 2"/>
+          <p:cNvSpPr txBox="1"/>
+          <p:nvPr/>
+        </p:nvSpPr>
+        <p:spPr>
+          <a:xfrm>
+            <a:off x="731520" y="3291840"/>
+            <a:ext cx="10698480" cy="548640"/>
+          </a:xfrm>
+          <a:prstGeom prst="rect">
+            <a:avLst/>
+          </a:prstGeom>
+          <a:noFill/>
+        </p:spPr>
+        <p:txBody>
+          <a:bodyPr wrap="square" anchor="t">
+            <a:spAutoFit/>
+          </a:bodyPr>
+          <a:lstStyle/>
+          <a:p>
+            <a:pPr algn="ctr">
+              <a:lnSpc>
+                <a:spcPct val="112000"/>
+              </a:lnSpc>
+            </a:pPr>
+            <a:r>
+              <a:rPr sz="2200" b="0" i="0">
+                <a:solidFill>
+                  <a:srgbClr val="E9DFC8"/>
+                </a:solidFill>
+                <a:latin typeface="Verdana"/>
+              </a:rPr>
+              <a:t>Questions? Ask away — that is what tonight is for.</a:t>
+            </a:r>
+          </a:p>
+        </p:txBody>
+      </p:sp>
+      <p:sp>
+        <p:nvSpPr>
+          <p:cNvPr id="4" name="TextBox 3"/>
+          <p:cNvSpPr txBox="1"/>
+          <p:nvPr/>
+        </p:nvSpPr>
+        <p:spPr>
+          <a:xfrm>
+            <a:off x="731520" y="4114800"/>
+            <a:ext cx="10698480" cy="548640"/>
+          </a:xfrm>
+          <a:prstGeom prst="rect">
+            <a:avLst/>
+          </a:prstGeom>
+          <a:noFill/>
+        </p:spPr>
+        <p:txBody>
+          <a:bodyPr wrap="square" anchor="t">
+            <a:spAutoFit/>
+          </a:bodyPr>
+          <a:lstStyle/>
+          <a:p>
+            <a:pPr algn="ctr">
+              <a:lnSpc>
+                <a:spcPct val="112000"/>
+              </a:lnSpc>
+            </a:pPr>
+            <a:r>
+              <a:rPr sz="1900" b="0" i="0">
+                <a:solidFill>
+                  <a:srgbClr val="FFFFFF"/>
+                </a:solidFill>
+                <a:latin typeface="Verdana"/>
+              </a:rPr>
+              <a:t>southernoakfw@gmail.com  •  southernoakfw.org</a:t>
+            </a:r>
+          </a:p>
+        </p:txBody>
+      </p:sp>
+      <p:sp>
+        <p:nvSpPr>
+          <p:cNvPr id="5" name="TextBox 4"/>
+          <p:cNvSpPr txBox="1"/>
+          <p:nvPr/>
+        </p:nvSpPr>
+        <p:spPr>
+          <a:xfrm>
+            <a:off x="731520" y="4846320"/>
+            <a:ext cx="10698480" cy="457200"/>
+          </a:xfrm>
+          <a:prstGeom prst="rect">
+            <a:avLst/>
+          </a:prstGeom>
+          <a:noFill/>
+        </p:spPr>
+        <p:txBody>
+          <a:bodyPr wrap="square" anchor="t">
+            <a:spAutoFit/>
+          </a:bodyPr>
+          <a:lstStyle/>
+          <a:p>
+            <a:pPr algn="ctr">
+              <a:lnSpc>
+                <a:spcPct val="112000"/>
+              </a:lnSpc>
+            </a:pPr>
+            <a:r>
+              <a:rPr sz="1650" b="0" i="0">
+                <a:solidFill>
+                  <a:srgbClr val="E9DFC8"/>
+                </a:solidFill>
+                <a:latin typeface="Verdana"/>
+              </a:rPr>
+              <a:t>Next free webinar: Friday, December 11 — “Turning 18: What Changes.”</a:t>
+            </a:r>
+          </a:p>
+        </p:txBody>
+      </p:sp>
+    </p:spTree>
+  </p:cSld>
+  <p:clrMapOvr>
+    <a:masterClrMapping/>
+  </p:clrMapOvr>
+</p:sld>
+</file>
+
+<file path=ppt/slides/slide2.xml><?xml version="1.0" encoding="utf-8"?>
+<p:sld xmlns:a="http://schemas.openxmlformats.org/drawingml/2006/main" xmlns:p="http://schemas.openxmlformats.org/presentationml/2006/main" xmlns:r="http://schemas.openxmlformats.org/officeDocument/2006/relationships">
+  <p:cSld>
+    <p:bg>
+      <p:bgPr>
+        <a:solidFill>
+          <a:srgbClr val="FAF5EA"/>
+        </a:solidFill>
+        <a:effectLst/>
+      </p:bgPr>
+    </p:bg>
+    <p:spTree>
+      <p:nvGrpSpPr>
+        <p:cNvPr id="1" name=""/>
+        <p:cNvGrpSpPr/>
+        <p:nvPr/>
+      </p:nvGrpSpPr>
+      <p:grpSpPr/>
+      <p:sp>
+        <p:nvSpPr>
           <p:cNvPr id="2" name="Rectangle 1"/>
           <p:cNvSpPr/>
           <p:nvPr/>
@@ -4842,13 +5123,13 @@
         <p:spPr>
           <a:xfrm>
             <a:off x="0" y="0"/>
-            <a:ext cx="12191695" cy="6858000"/>
+            <a:ext cx="12191695" cy="1078992"/>
           </a:xfrm>
           <a:prstGeom prst="rect">
             <a:avLst/>
           </a:prstGeom>
           <a:solidFill>
-            <a:srgbClr val="FAF4E6"/>
+            <a:srgbClr val="3E4A2E"/>
           </a:solidFill>
           <a:ln>
             <a:noFill/>
@@ -4885,14 +5166,14 @@
         </p:nvSpPr>
         <p:spPr>
           <a:xfrm>
-            <a:off x="0" y="0"/>
-            <a:ext cx="12191695" cy="1051560"/>
+            <a:off x="0" y="1078992"/>
+            <a:ext cx="12191695" cy="50292"/>
           </a:xfrm>
           <a:prstGeom prst="rect">
             <a:avLst/>
           </a:prstGeom>
           <a:solidFill>
-            <a:srgbClr val="2E4A2B"/>
+            <a:srgbClr val="C46224"/>
           </a:solidFill>
           <a:ln>
             <a:noFill/>
@@ -4929,8 +5210,8 @@
         </p:nvSpPr>
         <p:spPr>
           <a:xfrm>
-            <a:off x="548640" y="164592"/>
-            <a:ext cx="11064240" cy="777240"/>
+            <a:off x="502920" y="146304"/>
+            <a:ext cx="9692640" cy="822960"/>
           </a:xfrm>
           <a:prstGeom prst="rect">
             <a:avLst/>
@@ -4938,34 +5219,62 @@
           <a:noFill/>
         </p:spPr>
         <p:txBody>
-          <a:bodyPr wrap="square">
+          <a:bodyPr wrap="square" anchor="ctr">
             <a:spAutoFit/>
           </a:bodyPr>
           <a:lstStyle/>
           <a:p>
-            <a:pPr algn="l"/>
-            <a:r>
-              <a:rPr sz="4000" b="1">
+            <a:pPr algn="l">
+              <a:lnSpc>
+                <a:spcPct val="112000"/>
+              </a:lnSpc>
+            </a:pPr>
+            <a:r>
+              <a:rPr sz="3100" b="1" i="0">
                 <a:solidFill>
                   <a:srgbClr val="FFFFFF"/>
                 </a:solidFill>
                 <a:latin typeface="Georgia"/>
               </a:rPr>
-              <a:t>One Small Break This Month</a:t>
-            </a:r>
-          </a:p>
-        </p:txBody>
-      </p:sp>
-      <p:sp>
-        <p:nvSpPr>
-          <p:cNvPr id="5" name="TextBox 4"/>
+              <a:t>Tonight Is for You</a:t>
+            </a:r>
+          </a:p>
+        </p:txBody>
+      </p:sp>
+      <p:pic>
+        <p:nvPicPr>
+          <p:cNvPr id="5" name="Picture 4" descr="southern-oak-logo.png"/>
+          <p:cNvPicPr>
+            <a:picLocks noChangeAspect="1"/>
+          </p:cNvPicPr>
+          <p:nvPr/>
+        </p:nvPicPr>
+        <p:blipFill>
+          <a:blip r:embed="rId2"/>
+          <a:stretch>
+            <a:fillRect/>
+          </a:stretch>
+        </p:blipFill>
+        <p:spPr>
+          <a:xfrm>
+            <a:off x="11018520" y="82296"/>
+            <a:ext cx="750171" cy="914400"/>
+          </a:xfrm>
+          <a:prstGeom prst="rect">
+            <a:avLst/>
+          </a:prstGeom>
+        </p:spPr>
+      </p:pic>
+      <p:sp>
+        <p:nvSpPr>
+          <p:cNvPr id="6" name="TextBox 5"/>
           <p:cNvSpPr txBox="1"/>
           <p:nvPr/>
         </p:nvSpPr>
         <p:spPr>
           <a:xfrm>
-            <a:off x="822960" y="1554480"/>
-            <a:ext cx="10607040" cy="4480560"/>
+            <a:off x="640080" y="1600200"/>
+            <a:ext cx="10881360" cy="4572000"/>
           </a:xfrm>
           <a:prstGeom prst="rect">
             <a:avLst/>
@@ -4978,77 +5287,129 @@
           </a:bodyPr>
           <a:lstStyle/>
           <a:p>
-            <a:pPr algn="l"/>
-            <a:r>
-              <a:rPr sz="2700" b="0">
-                <a:solidFill>
-                  <a:srgbClr val="222222"/>
-                </a:solidFill>
-                <a:latin typeface="Calibri"/>
-              </a:rPr>
-              <a:t>•  Pick ONE small thing:</a:t>
-            </a:r>
-          </a:p>
-          <a:p>
-            <a:pPr algn="l"/>
-            <a:r>
-              <a:rPr sz="2700" b="0">
-                <a:solidFill>
-                  <a:srgbClr val="222222"/>
-                </a:solidFill>
-                <a:latin typeface="Calibri"/>
-              </a:rPr>
-              <a:t>•  One hour that is only yours</a:t>
-            </a:r>
-          </a:p>
-          <a:p>
-            <a:pPr algn="l"/>
-            <a:r>
-              <a:rPr sz="2700" b="0">
-                <a:solidFill>
-                  <a:srgbClr val="222222"/>
-                </a:solidFill>
-                <a:latin typeface="Calibri"/>
-              </a:rPr>
-              <a:t>•  One call — 2-1-1, the pharmacy, or a bill company</a:t>
-            </a:r>
-          </a:p>
-          <a:p>
-            <a:pPr algn="l"/>
-            <a:r>
-              <a:rPr sz="2700" b="0">
-                <a:solidFill>
-                  <a:srgbClr val="222222"/>
-                </a:solidFill>
-                <a:latin typeface="Calibri"/>
-              </a:rPr>
-              <a:t>•  One page — the medication list or the bill list</a:t>
-            </a:r>
-          </a:p>
-          <a:p>
-            <a:pPr algn="l"/>
-            <a:r>
-              <a:rPr sz="2700" b="0">
-                <a:solidFill>
-                  <a:srgbClr val="222222"/>
-                </a:solidFill>
-                <a:latin typeface="Calibri"/>
-              </a:rPr>
-              <a:t>•  Small is enough. Start there.</a:t>
-            </a:r>
-          </a:p>
-        </p:txBody>
-      </p:sp>
-      <p:sp>
-        <p:nvSpPr>
-          <p:cNvPr id="6" name="TextBox 5"/>
+            <a:pPr>
+              <a:lnSpc>
+                <a:spcPct val="115000"/>
+              </a:lnSpc>
+              <a:spcAft>
+                <a:spcPts val="1200"/>
+              </a:spcAft>
+            </a:pPr>
+            <a:r>
+              <a:rPr sz="2300" b="1">
+                <a:solidFill>
+                  <a:srgbClr val="C46224"/>
+                </a:solidFill>
+                <a:latin typeface="Verdana"/>
+              </a:rPr>
+              <a:t>▸  </a:t>
+            </a:r>
+            <a:r>
+              <a:rPr sz="2300">
+                <a:solidFill>
+                  <a:srgbClr val="2B2B26"/>
+                </a:solidFill>
+                <a:latin typeface="Verdana"/>
+              </a:rPr>
+              <a:t>You care for your child or loved one every day.</a:t>
+            </a:r>
+          </a:p>
+          <a:p>
+            <a:pPr>
+              <a:lnSpc>
+                <a:spcPct val="115000"/>
+              </a:lnSpc>
+              <a:spcAft>
+                <a:spcPts val="1200"/>
+              </a:spcAft>
+            </a:pPr>
+            <a:r>
+              <a:rPr sz="2300" b="1">
+                <a:solidFill>
+                  <a:srgbClr val="C46224"/>
+                </a:solidFill>
+                <a:latin typeface="Verdana"/>
+              </a:rPr>
+              <a:t>▸  </a:t>
+            </a:r>
+            <a:r>
+              <a:rPr sz="2300">
+                <a:solidFill>
+                  <a:srgbClr val="2B2B26"/>
+                </a:solidFill>
+                <a:latin typeface="Verdana"/>
+              </a:rPr>
+              <a:t>You give your time, your sleep, and your money.</a:t>
+            </a:r>
+          </a:p>
+          <a:p>
+            <a:pPr>
+              <a:lnSpc>
+                <a:spcPct val="115000"/>
+              </a:lnSpc>
+              <a:spcAft>
+                <a:spcPts val="1200"/>
+              </a:spcAft>
+            </a:pPr>
+            <a:r>
+              <a:rPr sz="2300" b="1">
+                <a:solidFill>
+                  <a:srgbClr val="C46224"/>
+                </a:solidFill>
+                <a:latin typeface="Verdana"/>
+              </a:rPr>
+              <a:t>▸  </a:t>
+            </a:r>
+            <a:r>
+              <a:rPr sz="2300">
+                <a:solidFill>
+                  <a:srgbClr val="2B2B26"/>
+                </a:solidFill>
+                <a:latin typeface="Verdana"/>
+              </a:rPr>
+              <a:t>But who takes care of things if something happens to YOU?</a:t>
+            </a:r>
+          </a:p>
+          <a:p>
+            <a:pPr>
+              <a:lnSpc>
+                <a:spcPct val="115000"/>
+              </a:lnSpc>
+              <a:spcAft>
+                <a:spcPts val="1200"/>
+              </a:spcAft>
+            </a:pPr>
+            <a:r>
+              <a:rPr sz="2300" b="1">
+                <a:solidFill>
+                  <a:srgbClr val="C46224"/>
+                </a:solidFill>
+                <a:latin typeface="Verdana"/>
+              </a:rPr>
+              <a:t>▸  </a:t>
+            </a:r>
+            <a:r>
+              <a:rPr sz="2300">
+                <a:solidFill>
+                  <a:srgbClr val="2B2B26"/>
+                </a:solidFill>
+                <a:latin typeface="Verdana"/>
+              </a:rPr>
+              <a:t>Tonight we talk about that — in plain, simple words.</a:t>
+            </a:r>
+          </a:p>
+        </p:txBody>
+      </p:sp>
+      <p:sp>
+        <p:nvSpPr>
+          <p:cNvPr id="7" name="TextBox 6"/>
           <p:cNvSpPr txBox="1"/>
           <p:nvPr/>
         </p:nvSpPr>
         <p:spPr>
           <a:xfrm>
-            <a:off x="548640" y="6355080"/>
-            <a:ext cx="11064240" cy="365760"/>
+            <a:off x="502920" y="6473952"/>
+            <a:ext cx="11155680" cy="292608"/>
           </a:xfrm>
           <a:prstGeom prst="rect">
             <a:avLst/>
@@ -5056,20 +5417,24 @@
           <a:noFill/>
         </p:spPr>
         <p:txBody>
-          <a:bodyPr wrap="square">
+          <a:bodyPr wrap="square" anchor="t">
             <a:spAutoFit/>
           </a:bodyPr>
           <a:lstStyle/>
           <a:p>
-            <a:pPr algn="l"/>
-            <a:r>
-              <a:rPr sz="1400" b="0">
-                <a:solidFill>
-                  <a:srgbClr val="2E4A2B"/>
-                </a:solidFill>
-                <a:latin typeface="Calibri"/>
-              </a:rPr>
-              <a:t>Southern Oak Financial &amp; Wellness — Free Zoom Webinar</a:t>
+            <a:pPr algn="l">
+              <a:lnSpc>
+                <a:spcPct val="112000"/>
+              </a:lnSpc>
+            </a:pPr>
+            <a:r>
+              <a:rPr sz="1150" b="0" i="0">
+                <a:solidFill>
+                  <a:srgbClr val="7A7466"/>
+                </a:solidFill>
+                <a:latin typeface="Verdana"/>
+              </a:rPr>
+              <a:t>Southern Oak Financial &amp; Wellness  •  southernoakfw.org</a:t>
             </a:r>
           </a:p>
         </p:txBody>
@@ -5082,9 +5447,17 @@
 </p:sld>
 </file>
 
-<file path=ppt/slides/slide12.xml><?xml version="1.0" encoding="utf-8"?>
+<file path=ppt/slides/slide3.xml><?xml version="1.0" encoding="utf-8"?>
 <p:sld xmlns:a="http://schemas.openxmlformats.org/drawingml/2006/main" xmlns:p="http://schemas.openxmlformats.org/presentationml/2006/main" xmlns:r="http://schemas.openxmlformats.org/officeDocument/2006/relationships">
   <p:cSld>
+    <p:bg>
+      <p:bgPr>
+        <a:solidFill>
+          <a:srgbClr val="FAF5EA"/>
+        </a:solidFill>
+        <a:effectLst/>
+      </p:bgPr>
+    </p:bg>
     <p:spTree>
       <p:nvGrpSpPr>
         <p:cNvPr id="1" name=""/>
@@ -5101,13 +5474,13 @@
         <p:spPr>
           <a:xfrm>
             <a:off x="0" y="0"/>
-            <a:ext cx="12191695" cy="6858000"/>
+            <a:ext cx="12191695" cy="1078992"/>
           </a:xfrm>
           <a:prstGeom prst="rect">
             <a:avLst/>
           </a:prstGeom>
           <a:solidFill>
-            <a:srgbClr val="FAF4E6"/>
+            <a:srgbClr val="3E4A2E"/>
           </a:solidFill>
           <a:ln>
             <a:noFill/>
@@ -5144,14 +5517,14 @@
         </p:nvSpPr>
         <p:spPr>
           <a:xfrm>
-            <a:off x="0" y="0"/>
-            <a:ext cx="12191695" cy="1051560"/>
+            <a:off x="0" y="1078992"/>
+            <a:ext cx="12191695" cy="50292"/>
           </a:xfrm>
           <a:prstGeom prst="rect">
             <a:avLst/>
           </a:prstGeom>
           <a:solidFill>
-            <a:srgbClr val="2E4A2B"/>
+            <a:srgbClr val="C46224"/>
           </a:solidFill>
           <a:ln>
             <a:noFill/>
@@ -5188,8 +5561,8 @@
         </p:nvSpPr>
         <p:spPr>
           <a:xfrm>
-            <a:off x="548640" y="164592"/>
-            <a:ext cx="11064240" cy="777240"/>
+            <a:off x="502920" y="146304"/>
+            <a:ext cx="9692640" cy="822960"/>
           </a:xfrm>
           <a:prstGeom prst="rect">
             <a:avLst/>
@@ -5197,34 +5570,62 @@
           <a:noFill/>
         </p:spPr>
         <p:txBody>
-          <a:bodyPr wrap="square">
+          <a:bodyPr wrap="square" anchor="ctr">
             <a:spAutoFit/>
           </a:bodyPr>
           <a:lstStyle/>
           <a:p>
-            <a:pPr algn="l"/>
-            <a:r>
-              <a:rPr sz="4000" b="1">
+            <a:pPr algn="l">
+              <a:lnSpc>
+                <a:spcPct val="112000"/>
+              </a:lnSpc>
+            </a:pPr>
+            <a:r>
+              <a:rPr sz="3100" b="1" i="0">
                 <a:solidFill>
                   <a:srgbClr val="FFFFFF"/>
                 </a:solidFill>
                 <a:latin typeface="Georgia"/>
               </a:rPr>
-              <a:t>Questions</a:t>
-            </a:r>
-          </a:p>
-        </p:txBody>
-      </p:sp>
-      <p:sp>
-        <p:nvSpPr>
-          <p:cNvPr id="5" name="TextBox 4"/>
+              <a:t>The Hard Question</a:t>
+            </a:r>
+          </a:p>
+        </p:txBody>
+      </p:sp>
+      <p:pic>
+        <p:nvPicPr>
+          <p:cNvPr id="5" name="Picture 4" descr="southern-oak-logo.png"/>
+          <p:cNvPicPr>
+            <a:picLocks noChangeAspect="1"/>
+          </p:cNvPicPr>
+          <p:nvPr/>
+        </p:nvPicPr>
+        <p:blipFill>
+          <a:blip r:embed="rId2"/>
+          <a:stretch>
+            <a:fillRect/>
+          </a:stretch>
+        </p:blipFill>
+        <p:spPr>
+          <a:xfrm>
+            <a:off x="11018520" y="82296"/>
+            <a:ext cx="750171" cy="914400"/>
+          </a:xfrm>
+          <a:prstGeom prst="rect">
+            <a:avLst/>
+          </a:prstGeom>
+        </p:spPr>
+      </p:pic>
+      <p:sp>
+        <p:nvSpPr>
+          <p:cNvPr id="6" name="TextBox 5"/>
           <p:cNvSpPr txBox="1"/>
           <p:nvPr/>
         </p:nvSpPr>
         <p:spPr>
           <a:xfrm>
-            <a:off x="822960" y="1554480"/>
-            <a:ext cx="10607040" cy="4480560"/>
+            <a:off x="640080" y="1600200"/>
+            <a:ext cx="10881360" cy="4572000"/>
           </a:xfrm>
           <a:prstGeom prst="rect">
             <a:avLst/>
@@ -5237,53 +5638,129 @@
           </a:bodyPr>
           <a:lstStyle/>
           <a:p>
-            <a:pPr algn="l"/>
-            <a:r>
-              <a:rPr sz="2700" b="0">
-                <a:solidFill>
-                  <a:srgbClr val="222222"/>
-                </a:solidFill>
-                <a:latin typeface="Calibri"/>
-              </a:rPr>
-              <a:t>•  Questions sent in at registration come first</a:t>
-            </a:r>
-          </a:p>
-          <a:p>
-            <a:pPr algn="l"/>
-            <a:r>
-              <a:rPr sz="2700" b="0">
-                <a:solidFill>
-                  <a:srgbClr val="222222"/>
-                </a:solidFill>
-                <a:latin typeface="Calibri"/>
-              </a:rPr>
-              <a:t>•  Then open questions</a:t>
-            </a:r>
-          </a:p>
-          <a:p>
-            <a:pPr algn="l"/>
-            <a:r>
-              <a:rPr sz="2700" b="0">
-                <a:solidFill>
-                  <a:srgbClr val="222222"/>
-                </a:solidFill>
-                <a:latin typeface="Calibri"/>
-              </a:rPr>
-              <a:t>•  Personal cases: book your free first talk — we keep private things private</a:t>
-            </a:r>
-          </a:p>
-        </p:txBody>
-      </p:sp>
-      <p:sp>
-        <p:nvSpPr>
-          <p:cNvPr id="6" name="TextBox 5"/>
+            <a:pPr>
+              <a:lnSpc>
+                <a:spcPct val="115000"/>
+              </a:lnSpc>
+              <a:spcAft>
+                <a:spcPts val="1200"/>
+              </a:spcAft>
+            </a:pPr>
+            <a:r>
+              <a:rPr sz="2300" b="1">
+                <a:solidFill>
+                  <a:srgbClr val="C46224"/>
+                </a:solidFill>
+                <a:latin typeface="Verdana"/>
+              </a:rPr>
+              <a:t>▸  </a:t>
+            </a:r>
+            <a:r>
+              <a:rPr sz="2300">
+                <a:solidFill>
+                  <a:srgbClr val="2B2B26"/>
+                </a:solidFill>
+                <a:latin typeface="Verdana"/>
+              </a:rPr>
+              <a:t>If you got very sick, hurt, or passed away — who would step in?</a:t>
+            </a:r>
+          </a:p>
+          <a:p>
+            <a:pPr>
+              <a:lnSpc>
+                <a:spcPct val="115000"/>
+              </a:lnSpc>
+              <a:spcAft>
+                <a:spcPts val="1200"/>
+              </a:spcAft>
+            </a:pPr>
+            <a:r>
+              <a:rPr sz="2300" b="1">
+                <a:solidFill>
+                  <a:srgbClr val="C46224"/>
+                </a:solidFill>
+                <a:latin typeface="Verdana"/>
+              </a:rPr>
+              <a:t>▸  </a:t>
+            </a:r>
+            <a:r>
+              <a:rPr sz="2300">
+                <a:solidFill>
+                  <a:srgbClr val="2B2B26"/>
+                </a:solidFill>
+                <a:latin typeface="Verdana"/>
+              </a:rPr>
+              <a:t>Who knows your child's medicine, doctors, and daily care?</a:t>
+            </a:r>
+          </a:p>
+          <a:p>
+            <a:pPr>
+              <a:lnSpc>
+                <a:spcPct val="115000"/>
+              </a:lnSpc>
+              <a:spcAft>
+                <a:spcPts val="1200"/>
+              </a:spcAft>
+            </a:pPr>
+            <a:r>
+              <a:rPr sz="2300" b="1">
+                <a:solidFill>
+                  <a:srgbClr val="C46224"/>
+                </a:solidFill>
+                <a:latin typeface="Verdana"/>
+              </a:rPr>
+              <a:t>▸  </a:t>
+            </a:r>
+            <a:r>
+              <a:rPr sz="2300">
+                <a:solidFill>
+                  <a:srgbClr val="2B2B26"/>
+                </a:solidFill>
+                <a:latin typeface="Verdana"/>
+              </a:rPr>
+              <a:t>Care like yours costs money. A new caregiver must be paid.</a:t>
+            </a:r>
+          </a:p>
+          <a:p>
+            <a:pPr>
+              <a:lnSpc>
+                <a:spcPct val="115000"/>
+              </a:lnSpc>
+              <a:spcAft>
+                <a:spcPts val="1200"/>
+              </a:spcAft>
+            </a:pPr>
+            <a:r>
+              <a:rPr sz="2300" b="1">
+                <a:solidFill>
+                  <a:srgbClr val="C46224"/>
+                </a:solidFill>
+                <a:latin typeface="Verdana"/>
+              </a:rPr>
+              <a:t>▸  </a:t>
+            </a:r>
+            <a:r>
+              <a:rPr sz="2300">
+                <a:solidFill>
+                  <a:srgbClr val="2B2B26"/>
+                </a:solidFill>
+                <a:latin typeface="Verdana"/>
+              </a:rPr>
+              <a:t>Life insurance is one way to make sure the money is there.</a:t>
+            </a:r>
+          </a:p>
+        </p:txBody>
+      </p:sp>
+      <p:sp>
+        <p:nvSpPr>
+          <p:cNvPr id="7" name="TextBox 6"/>
           <p:cNvSpPr txBox="1"/>
           <p:nvPr/>
         </p:nvSpPr>
         <p:spPr>
           <a:xfrm>
-            <a:off x="548640" y="6355080"/>
-            <a:ext cx="11064240" cy="365760"/>
+            <a:off x="502920" y="6473952"/>
+            <a:ext cx="11155680" cy="292608"/>
           </a:xfrm>
           <a:prstGeom prst="rect">
             <a:avLst/>
@@ -5291,20 +5768,24 @@
           <a:noFill/>
         </p:spPr>
         <p:txBody>
-          <a:bodyPr wrap="square">
+          <a:bodyPr wrap="square" anchor="t">
             <a:spAutoFit/>
           </a:bodyPr>
           <a:lstStyle/>
           <a:p>
-            <a:pPr algn="l"/>
-            <a:r>
-              <a:rPr sz="1400" b="0">
-                <a:solidFill>
-                  <a:srgbClr val="2E4A2B"/>
-                </a:solidFill>
-                <a:latin typeface="Calibri"/>
-              </a:rPr>
-              <a:t>Southern Oak Financial &amp; Wellness — Free Zoom Webinar</a:t>
+            <a:pPr algn="l">
+              <a:lnSpc>
+                <a:spcPct val="112000"/>
+              </a:lnSpc>
+            </a:pPr>
+            <a:r>
+              <a:rPr sz="1150" b="0" i="0">
+                <a:solidFill>
+                  <a:srgbClr val="7A7466"/>
+                </a:solidFill>
+                <a:latin typeface="Verdana"/>
+              </a:rPr>
+              <a:t>Southern Oak Financial &amp; Wellness  •  southernoakfw.org</a:t>
             </a:r>
           </a:p>
         </p:txBody>
@@ -5317,9 +5798,17 @@
 </p:sld>
 </file>
 
-<file path=ppt/slides/slide13.xml><?xml version="1.0" encoding="utf-8"?>
+<file path=ppt/slides/slide4.xml><?xml version="1.0" encoding="utf-8"?>
 <p:sld xmlns:a="http://schemas.openxmlformats.org/drawingml/2006/main" xmlns:p="http://schemas.openxmlformats.org/presentationml/2006/main" xmlns:r="http://schemas.openxmlformats.org/officeDocument/2006/relationships">
   <p:cSld>
+    <p:bg>
+      <p:bgPr>
+        <a:solidFill>
+          <a:srgbClr val="FAF5EA"/>
+        </a:solidFill>
+        <a:effectLst/>
+      </p:bgPr>
+    </p:bg>
     <p:spTree>
       <p:nvGrpSpPr>
         <p:cNvPr id="1" name=""/>
@@ -5336,13 +5825,13 @@
         <p:spPr>
           <a:xfrm>
             <a:off x="0" y="0"/>
-            <a:ext cx="12191695" cy="6858000"/>
+            <a:ext cx="12191695" cy="1078992"/>
           </a:xfrm>
           <a:prstGeom prst="rect">
             <a:avLst/>
           </a:prstGeom>
           <a:solidFill>
-            <a:srgbClr val="FAF4E6"/>
+            <a:srgbClr val="3E4A2E"/>
           </a:solidFill>
           <a:ln>
             <a:noFill/>
@@ -5373,179 +5862,20 @@
       </p:sp>
       <p:sp>
         <p:nvSpPr>
-          <p:cNvPr id="3" name="TextBox 2"/>
-          <p:cNvSpPr txBox="1"/>
-          <p:nvPr/>
-        </p:nvSpPr>
-        <p:spPr>
-          <a:xfrm>
-            <a:off x="1097280" y="1463040"/>
-            <a:ext cx="9966960" cy="1097280"/>
-          </a:xfrm>
-          <a:prstGeom prst="rect">
-            <a:avLst/>
-          </a:prstGeom>
-          <a:noFill/>
-        </p:spPr>
-        <p:txBody>
-          <a:bodyPr wrap="square">
-            <a:spAutoFit/>
-          </a:bodyPr>
-          <a:lstStyle/>
-          <a:p>
-            <a:pPr algn="ctr"/>
-            <a:r>
-              <a:rPr sz="4800" b="1">
-                <a:solidFill>
-                  <a:srgbClr val="2E4A2B"/>
-                </a:solidFill>
-                <a:latin typeface="Georgia"/>
-              </a:rPr>
-              <a:t>Thank You — and Happy Thanksgiving!</a:t>
-            </a:r>
-          </a:p>
-        </p:txBody>
-      </p:sp>
-      <p:sp>
-        <p:nvSpPr>
-          <p:cNvPr id="4" name="TextBox 3"/>
-          <p:cNvSpPr txBox="1"/>
-          <p:nvPr/>
-        </p:nvSpPr>
-        <p:spPr>
-          <a:xfrm>
-            <a:off x="1554480" y="2834640"/>
-            <a:ext cx="9052560" cy="2377440"/>
-          </a:xfrm>
-          <a:prstGeom prst="rect">
-            <a:avLst/>
-          </a:prstGeom>
-          <a:noFill/>
-        </p:spPr>
-        <p:txBody>
-          <a:bodyPr wrap="square">
-            <a:spAutoFit/>
-          </a:bodyPr>
-          <a:lstStyle/>
-          <a:p>
-            <a:pPr algn="ctr"/>
-            <a:r>
-              <a:rPr sz="2600" b="0">
-                <a:solidFill>
-                  <a:srgbClr val="222222"/>
-                </a:solidFill>
-                <a:latin typeface="Calibri"/>
-              </a:rPr>
-              <a:t>Thank you for all you do, every single day</a:t>
-            </a:r>
-          </a:p>
-          <a:p>
-            <a:pPr algn="ctr"/>
-            <a:r>
-              <a:rPr sz="2600" b="0">
-                <a:solidFill>
-                  <a:srgbClr val="222222"/>
-                </a:solidFill>
-                <a:latin typeface="Calibri"/>
-              </a:rPr>
-              <a:t>Your first talk with us is always free</a:t>
-            </a:r>
-          </a:p>
-          <a:p>
-            <a:pPr algn="ctr"/>
-            <a:r>
-              <a:rPr sz="2600" b="0">
-                <a:solidFill>
-                  <a:srgbClr val="222222"/>
-                </a:solidFill>
-                <a:latin typeface="Calibri"/>
-              </a:rPr>
-              <a:t>Book at southernoakfw.org/book</a:t>
-            </a:r>
-          </a:p>
-          <a:p>
-            <a:pPr algn="ctr"/>
-            <a:r>
-              <a:rPr sz="2600" b="0">
-                <a:solidFill>
-                  <a:srgbClr val="222222"/>
-                </a:solidFill>
-                <a:latin typeface="Calibri"/>
-              </a:rPr>
-              <a:t>Email: southernoakfw@gmail.com</a:t>
-            </a:r>
-          </a:p>
-        </p:txBody>
-      </p:sp>
-      <p:sp>
-        <p:nvSpPr>
-          <p:cNvPr id="5" name="TextBox 4"/>
-          <p:cNvSpPr txBox="1"/>
-          <p:nvPr/>
-        </p:nvSpPr>
-        <p:spPr>
-          <a:xfrm>
-            <a:off x="1097280" y="6035040"/>
-            <a:ext cx="9966960" cy="457200"/>
-          </a:xfrm>
-          <a:prstGeom prst="rect">
-            <a:avLst/>
-          </a:prstGeom>
-          <a:noFill/>
-        </p:spPr>
-        <p:txBody>
-          <a:bodyPr wrap="square">
-            <a:spAutoFit/>
-          </a:bodyPr>
-          <a:lstStyle/>
-          <a:p>
-            <a:pPr algn="ctr"/>
-            <a:r>
-              <a:rPr sz="1800" b="0">
-                <a:solidFill>
-                  <a:srgbClr val="2E4A2B"/>
-                </a:solidFill>
-                <a:latin typeface="Calibri"/>
-              </a:rPr>
-              <a:t>Jessica Alvarez  |  Southern Oak Financial &amp; Wellness</a:t>
-            </a:r>
-          </a:p>
-        </p:txBody>
-      </p:sp>
-    </p:spTree>
-  </p:cSld>
-  <p:clrMapOvr>
-    <a:masterClrMapping/>
-  </p:clrMapOvr>
-</p:sld>
-</file>
-
-<file path=ppt/slides/slide2.xml><?xml version="1.0" encoding="utf-8"?>
-<p:sld xmlns:a="http://schemas.openxmlformats.org/drawingml/2006/main" xmlns:p="http://schemas.openxmlformats.org/presentationml/2006/main" xmlns:r="http://schemas.openxmlformats.org/officeDocument/2006/relationships">
-  <p:cSld>
-    <p:spTree>
-      <p:nvGrpSpPr>
-        <p:cNvPr id="1" name=""/>
-        <p:cNvGrpSpPr/>
-        <p:nvPr/>
-      </p:nvGrpSpPr>
-      <p:grpSpPr/>
-      <p:sp>
-        <p:nvSpPr>
-          <p:cNvPr id="2" name="Rectangle 1"/>
+          <p:cNvPr id="3" name="Rectangle 2"/>
           <p:cNvSpPr/>
           <p:nvPr/>
         </p:nvSpPr>
         <p:spPr>
           <a:xfrm>
-            <a:off x="0" y="0"/>
-            <a:ext cx="12191695" cy="6858000"/>
+            <a:off x="0" y="1078992"/>
+            <a:ext cx="12191695" cy="50292"/>
           </a:xfrm>
           <a:prstGeom prst="rect">
             <a:avLst/>
           </a:prstGeom>
           <a:solidFill>
-            <a:srgbClr val="FAF4E6"/>
+            <a:srgbClr val="C46224"/>
           </a:solidFill>
           <a:ln>
             <a:noFill/>
@@ -5576,20 +5906,283 @@
       </p:sp>
       <p:sp>
         <p:nvSpPr>
-          <p:cNvPr id="3" name="Rectangle 2"/>
+          <p:cNvPr id="4" name="TextBox 3"/>
+          <p:cNvSpPr txBox="1"/>
+          <p:nvPr/>
+        </p:nvSpPr>
+        <p:spPr>
+          <a:xfrm>
+            <a:off x="502920" y="146304"/>
+            <a:ext cx="9692640" cy="822960"/>
+          </a:xfrm>
+          <a:prstGeom prst="rect">
+            <a:avLst/>
+          </a:prstGeom>
+          <a:noFill/>
+        </p:spPr>
+        <p:txBody>
+          <a:bodyPr wrap="square" anchor="ctr">
+            <a:spAutoFit/>
+          </a:bodyPr>
+          <a:lstStyle/>
+          <a:p>
+            <a:pPr algn="l">
+              <a:lnSpc>
+                <a:spcPct val="112000"/>
+              </a:lnSpc>
+            </a:pPr>
+            <a:r>
+              <a:rPr sz="3100" b="1" i="0">
+                <a:solidFill>
+                  <a:srgbClr val="FFFFFF"/>
+                </a:solidFill>
+                <a:latin typeface="Georgia"/>
+              </a:rPr>
+              <a:t>What Life Insurance Does</a:t>
+            </a:r>
+          </a:p>
+        </p:txBody>
+      </p:sp>
+      <p:pic>
+        <p:nvPicPr>
+          <p:cNvPr id="5" name="Picture 4" descr="southern-oak-logo.png"/>
+          <p:cNvPicPr>
+            <a:picLocks noChangeAspect="1"/>
+          </p:cNvPicPr>
+          <p:nvPr/>
+        </p:nvPicPr>
+        <p:blipFill>
+          <a:blip r:embed="rId2"/>
+          <a:stretch>
+            <a:fillRect/>
+          </a:stretch>
+        </p:blipFill>
+        <p:spPr>
+          <a:xfrm>
+            <a:off x="11018520" y="82296"/>
+            <a:ext cx="750171" cy="914400"/>
+          </a:xfrm>
+          <a:prstGeom prst="rect">
+            <a:avLst/>
+          </a:prstGeom>
+        </p:spPr>
+      </p:pic>
+      <p:sp>
+        <p:nvSpPr>
+          <p:cNvPr id="6" name="TextBox 5"/>
+          <p:cNvSpPr txBox="1"/>
+          <p:nvPr/>
+        </p:nvSpPr>
+        <p:spPr>
+          <a:xfrm>
+            <a:off x="640080" y="1600200"/>
+            <a:ext cx="10881360" cy="4572000"/>
+          </a:xfrm>
+          <a:prstGeom prst="rect">
+            <a:avLst/>
+          </a:prstGeom>
+          <a:noFill/>
+        </p:spPr>
+        <p:txBody>
+          <a:bodyPr wrap="square">
+            <a:spAutoFit/>
+          </a:bodyPr>
+          <a:lstStyle/>
+          <a:p>
+            <a:pPr>
+              <a:lnSpc>
+                <a:spcPct val="115000"/>
+              </a:lnSpc>
+              <a:spcAft>
+                <a:spcPts val="1200"/>
+              </a:spcAft>
+            </a:pPr>
+            <a:r>
+              <a:rPr sz="2300" b="1">
+                <a:solidFill>
+                  <a:srgbClr val="C46224"/>
+                </a:solidFill>
+                <a:latin typeface="Verdana"/>
+              </a:rPr>
+              <a:t>▸  </a:t>
+            </a:r>
+            <a:r>
+              <a:rPr sz="2300">
+                <a:solidFill>
+                  <a:srgbClr val="2B2B26"/>
+                </a:solidFill>
+                <a:latin typeface="Verdana"/>
+              </a:rPr>
+              <a:t>You pay a small amount each month.</a:t>
+            </a:r>
+          </a:p>
+          <a:p>
+            <a:pPr>
+              <a:lnSpc>
+                <a:spcPct val="115000"/>
+              </a:lnSpc>
+              <a:spcAft>
+                <a:spcPts val="1200"/>
+              </a:spcAft>
+            </a:pPr>
+            <a:r>
+              <a:rPr sz="2300" b="1">
+                <a:solidFill>
+                  <a:srgbClr val="C46224"/>
+                </a:solidFill>
+                <a:latin typeface="Verdana"/>
+              </a:rPr>
+              <a:t>▸  </a:t>
+            </a:r>
+            <a:r>
+              <a:rPr sz="2300">
+                <a:solidFill>
+                  <a:srgbClr val="2B2B26"/>
+                </a:solidFill>
+                <a:latin typeface="Verdana"/>
+              </a:rPr>
+              <a:t>If you pass away, the company pays money to your family.</a:t>
+            </a:r>
+          </a:p>
+          <a:p>
+            <a:pPr>
+              <a:lnSpc>
+                <a:spcPct val="115000"/>
+              </a:lnSpc>
+              <a:spcAft>
+                <a:spcPts val="1200"/>
+              </a:spcAft>
+            </a:pPr>
+            <a:r>
+              <a:rPr sz="2300" b="1">
+                <a:solidFill>
+                  <a:srgbClr val="C46224"/>
+                </a:solidFill>
+                <a:latin typeface="Verdana"/>
+              </a:rPr>
+              <a:t>▸  </a:t>
+            </a:r>
+            <a:r>
+              <a:rPr sz="2300">
+                <a:solidFill>
+                  <a:srgbClr val="2B2B26"/>
+                </a:solidFill>
+                <a:latin typeface="Verdana"/>
+              </a:rPr>
+              <a:t>Your family can use it for care, the home, bills, and daily life.</a:t>
+            </a:r>
+          </a:p>
+          <a:p>
+            <a:pPr>
+              <a:lnSpc>
+                <a:spcPct val="115000"/>
+              </a:lnSpc>
+              <a:spcAft>
+                <a:spcPts val="1200"/>
+              </a:spcAft>
+            </a:pPr>
+            <a:r>
+              <a:rPr sz="2300" b="1">
+                <a:solidFill>
+                  <a:srgbClr val="C46224"/>
+                </a:solidFill>
+                <a:latin typeface="Verdana"/>
+              </a:rPr>
+              <a:t>▸  </a:t>
+            </a:r>
+            <a:r>
+              <a:rPr sz="2300">
+                <a:solidFill>
+                  <a:srgbClr val="2B2B26"/>
+                </a:solidFill>
+                <a:latin typeface="Verdana"/>
+              </a:rPr>
+              <a:t>It is a promise, in writing, in a policy.</a:t>
+            </a:r>
+          </a:p>
+        </p:txBody>
+      </p:sp>
+      <p:sp>
+        <p:nvSpPr>
+          <p:cNvPr id="7" name="TextBox 6"/>
+          <p:cNvSpPr txBox="1"/>
+          <p:nvPr/>
+        </p:nvSpPr>
+        <p:spPr>
+          <a:xfrm>
+            <a:off x="502920" y="6473952"/>
+            <a:ext cx="11155680" cy="292608"/>
+          </a:xfrm>
+          <a:prstGeom prst="rect">
+            <a:avLst/>
+          </a:prstGeom>
+          <a:noFill/>
+        </p:spPr>
+        <p:txBody>
+          <a:bodyPr wrap="square" anchor="t">
+            <a:spAutoFit/>
+          </a:bodyPr>
+          <a:lstStyle/>
+          <a:p>
+            <a:pPr algn="l">
+              <a:lnSpc>
+                <a:spcPct val="112000"/>
+              </a:lnSpc>
+            </a:pPr>
+            <a:r>
+              <a:rPr sz="1150" b="0" i="0">
+                <a:solidFill>
+                  <a:srgbClr val="7A7466"/>
+                </a:solidFill>
+                <a:latin typeface="Verdana"/>
+              </a:rPr>
+              <a:t>Southern Oak Financial &amp; Wellness  •  southernoakfw.org</a:t>
+            </a:r>
+          </a:p>
+        </p:txBody>
+      </p:sp>
+    </p:spTree>
+  </p:cSld>
+  <p:clrMapOvr>
+    <a:masterClrMapping/>
+  </p:clrMapOvr>
+</p:sld>
+</file>
+
+<file path=ppt/slides/slide5.xml><?xml version="1.0" encoding="utf-8"?>
+<p:sld xmlns:a="http://schemas.openxmlformats.org/drawingml/2006/main" xmlns:p="http://schemas.openxmlformats.org/presentationml/2006/main" xmlns:r="http://schemas.openxmlformats.org/officeDocument/2006/relationships">
+  <p:cSld>
+    <p:bg>
+      <p:bgPr>
+        <a:solidFill>
+          <a:srgbClr val="FAF5EA"/>
+        </a:solidFill>
+        <a:effectLst/>
+      </p:bgPr>
+    </p:bg>
+    <p:spTree>
+      <p:nvGrpSpPr>
+        <p:cNvPr id="1" name=""/>
+        <p:cNvGrpSpPr/>
+        <p:nvPr/>
+      </p:nvGrpSpPr>
+      <p:grpSpPr/>
+      <p:sp>
+        <p:nvSpPr>
+          <p:cNvPr id="2" name="Rectangle 1"/>
           <p:cNvSpPr/>
           <p:nvPr/>
         </p:nvSpPr>
         <p:spPr>
           <a:xfrm>
             <a:off x="0" y="0"/>
-            <a:ext cx="12191695" cy="1051560"/>
+            <a:ext cx="12191695" cy="1078992"/>
           </a:xfrm>
           <a:prstGeom prst="rect">
             <a:avLst/>
           </a:prstGeom>
           <a:solidFill>
-            <a:srgbClr val="2E4A2B"/>
+            <a:srgbClr val="3E4A2E"/>
           </a:solidFill>
           <a:ln>
             <a:noFill/>
@@ -5620,203 +6213,20 @@
       </p:sp>
       <p:sp>
         <p:nvSpPr>
-          <p:cNvPr id="4" name="TextBox 3"/>
-          <p:cNvSpPr txBox="1"/>
-          <p:nvPr/>
-        </p:nvSpPr>
-        <p:spPr>
-          <a:xfrm>
-            <a:off x="548640" y="164592"/>
-            <a:ext cx="11064240" cy="777240"/>
-          </a:xfrm>
-          <a:prstGeom prst="rect">
-            <a:avLst/>
-          </a:prstGeom>
-          <a:noFill/>
-        </p:spPr>
-        <p:txBody>
-          <a:bodyPr wrap="square">
-            <a:spAutoFit/>
-          </a:bodyPr>
-          <a:lstStyle/>
-          <a:p>
-            <a:pPr algn="l"/>
-            <a:r>
-              <a:rPr sz="4000" b="1">
-                <a:solidFill>
-                  <a:srgbClr val="FFFFFF"/>
-                </a:solidFill>
-                <a:latin typeface="Georgia"/>
-              </a:rPr>
-              <a:t>Tonight's Road Map</a:t>
-            </a:r>
-          </a:p>
-        </p:txBody>
-      </p:sp>
-      <p:sp>
-        <p:nvSpPr>
-          <p:cNvPr id="5" name="TextBox 4"/>
-          <p:cNvSpPr txBox="1"/>
-          <p:nvPr/>
-        </p:nvSpPr>
-        <p:spPr>
-          <a:xfrm>
-            <a:off x="822960" y="1554480"/>
-            <a:ext cx="10607040" cy="4480560"/>
-          </a:xfrm>
-          <a:prstGeom prst="rect">
-            <a:avLst/>
-          </a:prstGeom>
-          <a:noFill/>
-        </p:spPr>
-        <p:txBody>
-          <a:bodyPr wrap="square">
-            <a:spAutoFit/>
-          </a:bodyPr>
-          <a:lstStyle/>
-          <a:p>
-            <a:pPr algn="l"/>
-            <a:r>
-              <a:rPr sz="2700" b="0">
-                <a:solidFill>
-                  <a:srgbClr val="222222"/>
-                </a:solidFill>
-                <a:latin typeface="Calibri"/>
-              </a:rPr>
-              <a:t>•  The signs of running on empty — and what helps</a:t>
-            </a:r>
-          </a:p>
-          <a:p>
-            <a:pPr algn="l"/>
-            <a:r>
-              <a:rPr sz="2700" b="0">
-                <a:solidFill>
-                  <a:srgbClr val="222222"/>
-                </a:solidFill>
-                <a:latin typeface="Calibri"/>
-              </a:rPr>
-              <a:t>•  Making medication time easier (your check is free)</a:t>
-            </a:r>
-          </a:p>
-          <a:p>
-            <a:pPr algn="l"/>
-            <a:r>
-              <a:rPr sz="2700" b="0">
-                <a:solidFill>
-                  <a:srgbClr val="222222"/>
-                </a:solidFill>
-                <a:latin typeface="Calibri"/>
-              </a:rPr>
-              <a:t>•  Money basics for caregiving families</a:t>
-            </a:r>
-          </a:p>
-          <a:p>
-            <a:pPr algn="l"/>
-            <a:r>
-              <a:rPr sz="2700" b="0">
-                <a:solidFill>
-                  <a:srgbClr val="222222"/>
-                </a:solidFill>
-                <a:latin typeface="Calibri"/>
-              </a:rPr>
-              <a:t>•  Where help lives: 2-1-1, respite, parent support</a:t>
-            </a:r>
-          </a:p>
-          <a:p>
-            <a:pPr algn="l"/>
-            <a:r>
-              <a:rPr sz="2700" b="0">
-                <a:solidFill>
-                  <a:srgbClr val="222222"/>
-                </a:solidFill>
-                <a:latin typeface="Calibri"/>
-              </a:rPr>
-              <a:t>•  One small break you can take this month</a:t>
-            </a:r>
-          </a:p>
-          <a:p>
-            <a:pPr algn="l"/>
-            <a:r>
-              <a:rPr sz="2700" b="0">
-                <a:solidFill>
-                  <a:srgbClr val="222222"/>
-                </a:solidFill>
-                <a:latin typeface="Calibri"/>
-              </a:rPr>
-              <a:t>•  Questions at the end</a:t>
-            </a:r>
-          </a:p>
-        </p:txBody>
-      </p:sp>
-      <p:sp>
-        <p:nvSpPr>
-          <p:cNvPr id="6" name="TextBox 5"/>
-          <p:cNvSpPr txBox="1"/>
-          <p:nvPr/>
-        </p:nvSpPr>
-        <p:spPr>
-          <a:xfrm>
-            <a:off x="548640" y="6355080"/>
-            <a:ext cx="11064240" cy="365760"/>
-          </a:xfrm>
-          <a:prstGeom prst="rect">
-            <a:avLst/>
-          </a:prstGeom>
-          <a:noFill/>
-        </p:spPr>
-        <p:txBody>
-          <a:bodyPr wrap="square">
-            <a:spAutoFit/>
-          </a:bodyPr>
-          <a:lstStyle/>
-          <a:p>
-            <a:pPr algn="l"/>
-            <a:r>
-              <a:rPr sz="1400" b="0">
-                <a:solidFill>
-                  <a:srgbClr val="2E4A2B"/>
-                </a:solidFill>
-                <a:latin typeface="Calibri"/>
-              </a:rPr>
-              <a:t>Southern Oak Financial &amp; Wellness — Free Zoom Webinar</a:t>
-            </a:r>
-          </a:p>
-        </p:txBody>
-      </p:sp>
-    </p:spTree>
-  </p:cSld>
-  <p:clrMapOvr>
-    <a:masterClrMapping/>
-  </p:clrMapOvr>
-</p:sld>
-</file>
-
-<file path=ppt/slides/slide3.xml><?xml version="1.0" encoding="utf-8"?>
-<p:sld xmlns:a="http://schemas.openxmlformats.org/drawingml/2006/main" xmlns:p="http://schemas.openxmlformats.org/presentationml/2006/main" xmlns:r="http://schemas.openxmlformats.org/officeDocument/2006/relationships">
-  <p:cSld>
-    <p:spTree>
-      <p:nvGrpSpPr>
-        <p:cNvPr id="1" name=""/>
-        <p:cNvGrpSpPr/>
-        <p:nvPr/>
-      </p:nvGrpSpPr>
-      <p:grpSpPr/>
-      <p:sp>
-        <p:nvSpPr>
-          <p:cNvPr id="2" name="Rectangle 1"/>
+          <p:cNvPr id="3" name="Rectangle 2"/>
           <p:cNvSpPr/>
           <p:nvPr/>
         </p:nvSpPr>
         <p:spPr>
           <a:xfrm>
-            <a:off x="0" y="0"/>
-            <a:ext cx="12191695" cy="6858000"/>
+            <a:off x="0" y="1078992"/>
+            <a:ext cx="12191695" cy="50292"/>
           </a:xfrm>
           <a:prstGeom prst="rect">
             <a:avLst/>
           </a:prstGeom>
           <a:solidFill>
-            <a:srgbClr val="FAF4E6"/>
+            <a:srgbClr val="C46224"/>
           </a:solidFill>
           <a:ln>
             <a:noFill/>
@@ -5847,20 +6257,283 @@
       </p:sp>
       <p:sp>
         <p:nvSpPr>
-          <p:cNvPr id="3" name="Rectangle 2"/>
+          <p:cNvPr id="4" name="TextBox 3"/>
+          <p:cNvSpPr txBox="1"/>
+          <p:nvPr/>
+        </p:nvSpPr>
+        <p:spPr>
+          <a:xfrm>
+            <a:off x="502920" y="146304"/>
+            <a:ext cx="9692640" cy="822960"/>
+          </a:xfrm>
+          <a:prstGeom prst="rect">
+            <a:avLst/>
+          </a:prstGeom>
+          <a:noFill/>
+        </p:spPr>
+        <p:txBody>
+          <a:bodyPr wrap="square" anchor="ctr">
+            <a:spAutoFit/>
+          </a:bodyPr>
+          <a:lstStyle/>
+          <a:p>
+            <a:pPr algn="l">
+              <a:lnSpc>
+                <a:spcPct val="112000"/>
+              </a:lnSpc>
+            </a:pPr>
+            <a:r>
+              <a:rPr sz="3100" b="1" i="0">
+                <a:solidFill>
+                  <a:srgbClr val="FFFFFF"/>
+                </a:solidFill>
+                <a:latin typeface="Georgia"/>
+              </a:rPr>
+              <a:t>Living Benefits: Help While You Are Living</a:t>
+            </a:r>
+          </a:p>
+        </p:txBody>
+      </p:sp>
+      <p:pic>
+        <p:nvPicPr>
+          <p:cNvPr id="5" name="Picture 4" descr="southern-oak-logo.png"/>
+          <p:cNvPicPr>
+            <a:picLocks noChangeAspect="1"/>
+          </p:cNvPicPr>
+          <p:nvPr/>
+        </p:nvPicPr>
+        <p:blipFill>
+          <a:blip r:embed="rId2"/>
+          <a:stretch>
+            <a:fillRect/>
+          </a:stretch>
+        </p:blipFill>
+        <p:spPr>
+          <a:xfrm>
+            <a:off x="11018520" y="82296"/>
+            <a:ext cx="750171" cy="914400"/>
+          </a:xfrm>
+          <a:prstGeom prst="rect">
+            <a:avLst/>
+          </a:prstGeom>
+        </p:spPr>
+      </p:pic>
+      <p:sp>
+        <p:nvSpPr>
+          <p:cNvPr id="6" name="TextBox 5"/>
+          <p:cNvSpPr txBox="1"/>
+          <p:nvPr/>
+        </p:nvSpPr>
+        <p:spPr>
+          <a:xfrm>
+            <a:off x="640080" y="1600200"/>
+            <a:ext cx="10881360" cy="4572000"/>
+          </a:xfrm>
+          <a:prstGeom prst="rect">
+            <a:avLst/>
+          </a:prstGeom>
+          <a:noFill/>
+        </p:spPr>
+        <p:txBody>
+          <a:bodyPr wrap="square">
+            <a:spAutoFit/>
+          </a:bodyPr>
+          <a:lstStyle/>
+          <a:p>
+            <a:pPr>
+              <a:lnSpc>
+                <a:spcPct val="115000"/>
+              </a:lnSpc>
+              <a:spcAft>
+                <a:spcPts val="1200"/>
+              </a:spcAft>
+            </a:pPr>
+            <a:r>
+              <a:rPr sz="2300" b="1">
+                <a:solidFill>
+                  <a:srgbClr val="C46224"/>
+                </a:solidFill>
+                <a:latin typeface="Verdana"/>
+              </a:rPr>
+              <a:t>▸  </a:t>
+            </a:r>
+            <a:r>
+              <a:rPr sz="2300">
+                <a:solidFill>
+                  <a:srgbClr val="2B2B26"/>
+                </a:solidFill>
+                <a:latin typeface="Verdana"/>
+              </a:rPr>
+              <a:t>Many policies from National Life Group have Living Benefits.</a:t>
+            </a:r>
+          </a:p>
+          <a:p>
+            <a:pPr>
+              <a:lnSpc>
+                <a:spcPct val="115000"/>
+              </a:lnSpc>
+              <a:spcAft>
+                <a:spcPts val="1200"/>
+              </a:spcAft>
+            </a:pPr>
+            <a:r>
+              <a:rPr sz="2300" b="1">
+                <a:solidFill>
+                  <a:srgbClr val="C46224"/>
+                </a:solidFill>
+                <a:latin typeface="Verdana"/>
+              </a:rPr>
+              <a:t>▸  </a:t>
+            </a:r>
+            <a:r>
+              <a:rPr sz="2300">
+                <a:solidFill>
+                  <a:srgbClr val="2B2B26"/>
+                </a:solidFill>
+                <a:latin typeface="Verdana"/>
+              </a:rPr>
+              <a:t>If you get very sick or hurt, you may be able to use part of the money early.</a:t>
+            </a:r>
+          </a:p>
+          <a:p>
+            <a:pPr>
+              <a:lnSpc>
+                <a:spcPct val="115000"/>
+              </a:lnSpc>
+              <a:spcAft>
+                <a:spcPts val="1200"/>
+              </a:spcAft>
+            </a:pPr>
+            <a:r>
+              <a:rPr sz="2300" b="1">
+                <a:solidFill>
+                  <a:srgbClr val="C46224"/>
+                </a:solidFill>
+                <a:latin typeface="Verdana"/>
+              </a:rPr>
+              <a:t>▸  </a:t>
+            </a:r>
+            <a:r>
+              <a:rPr sz="2300">
+                <a:solidFill>
+                  <a:srgbClr val="2B2B26"/>
+                </a:solidFill>
+                <a:latin typeface="Verdana"/>
+              </a:rPr>
+              <a:t>That money can help with bills and care while you get better.</a:t>
+            </a:r>
+          </a:p>
+          <a:p>
+            <a:pPr>
+              <a:lnSpc>
+                <a:spcPct val="115000"/>
+              </a:lnSpc>
+              <a:spcAft>
+                <a:spcPts val="1200"/>
+              </a:spcAft>
+            </a:pPr>
+            <a:r>
+              <a:rPr sz="2300" b="1">
+                <a:solidFill>
+                  <a:srgbClr val="C46224"/>
+                </a:solidFill>
+                <a:latin typeface="Verdana"/>
+              </a:rPr>
+              <a:t>▸  </a:t>
+            </a:r>
+            <a:r>
+              <a:rPr sz="2300">
+                <a:solidFill>
+                  <a:srgbClr val="2B2B26"/>
+                </a:solidFill>
+                <a:latin typeface="Verdana"/>
+              </a:rPr>
+              <a:t>Rules apply — we read them together, in the policy, before you decide.</a:t>
+            </a:r>
+          </a:p>
+        </p:txBody>
+      </p:sp>
+      <p:sp>
+        <p:nvSpPr>
+          <p:cNvPr id="7" name="TextBox 6"/>
+          <p:cNvSpPr txBox="1"/>
+          <p:nvPr/>
+        </p:nvSpPr>
+        <p:spPr>
+          <a:xfrm>
+            <a:off x="502920" y="6473952"/>
+            <a:ext cx="11155680" cy="292608"/>
+          </a:xfrm>
+          <a:prstGeom prst="rect">
+            <a:avLst/>
+          </a:prstGeom>
+          <a:noFill/>
+        </p:spPr>
+        <p:txBody>
+          <a:bodyPr wrap="square" anchor="t">
+            <a:spAutoFit/>
+          </a:bodyPr>
+          <a:lstStyle/>
+          <a:p>
+            <a:pPr algn="l">
+              <a:lnSpc>
+                <a:spcPct val="112000"/>
+              </a:lnSpc>
+            </a:pPr>
+            <a:r>
+              <a:rPr sz="1150" b="0" i="0">
+                <a:solidFill>
+                  <a:srgbClr val="7A7466"/>
+                </a:solidFill>
+                <a:latin typeface="Verdana"/>
+              </a:rPr>
+              <a:t>Southern Oak Financial &amp; Wellness  •  southernoakfw.org</a:t>
+            </a:r>
+          </a:p>
+        </p:txBody>
+      </p:sp>
+    </p:spTree>
+  </p:cSld>
+  <p:clrMapOvr>
+    <a:masterClrMapping/>
+  </p:clrMapOvr>
+</p:sld>
+</file>
+
+<file path=ppt/slides/slide6.xml><?xml version="1.0" encoding="utf-8"?>
+<p:sld xmlns:a="http://schemas.openxmlformats.org/drawingml/2006/main" xmlns:p="http://schemas.openxmlformats.org/presentationml/2006/main" xmlns:r="http://schemas.openxmlformats.org/officeDocument/2006/relationships">
+  <p:cSld>
+    <p:bg>
+      <p:bgPr>
+        <a:solidFill>
+          <a:srgbClr val="FAF5EA"/>
+        </a:solidFill>
+        <a:effectLst/>
+      </p:bgPr>
+    </p:bg>
+    <p:spTree>
+      <p:nvGrpSpPr>
+        <p:cNvPr id="1" name=""/>
+        <p:cNvGrpSpPr/>
+        <p:nvPr/>
+      </p:nvGrpSpPr>
+      <p:grpSpPr/>
+      <p:sp>
+        <p:nvSpPr>
+          <p:cNvPr id="2" name="Rectangle 1"/>
           <p:cNvSpPr/>
           <p:nvPr/>
         </p:nvSpPr>
         <p:spPr>
           <a:xfrm>
             <a:off x="0" y="0"/>
-            <a:ext cx="12191695" cy="1051560"/>
+            <a:ext cx="12191695" cy="1078992"/>
           </a:xfrm>
           <a:prstGeom prst="rect">
             <a:avLst/>
           </a:prstGeom>
           <a:solidFill>
-            <a:srgbClr val="2E4A2B"/>
+            <a:srgbClr val="3E4A2E"/>
           </a:solidFill>
           <a:ln>
             <a:noFill/>
@@ -5891,179 +6564,20 @@
       </p:sp>
       <p:sp>
         <p:nvSpPr>
-          <p:cNvPr id="4" name="TextBox 3"/>
-          <p:cNvSpPr txBox="1"/>
-          <p:nvPr/>
-        </p:nvSpPr>
-        <p:spPr>
-          <a:xfrm>
-            <a:off x="548640" y="164592"/>
-            <a:ext cx="11064240" cy="777240"/>
-          </a:xfrm>
-          <a:prstGeom prst="rect">
-            <a:avLst/>
-          </a:prstGeom>
-          <a:noFill/>
-        </p:spPr>
-        <p:txBody>
-          <a:bodyPr wrap="square">
-            <a:spAutoFit/>
-          </a:bodyPr>
-          <a:lstStyle/>
-          <a:p>
-            <a:pPr algn="l"/>
-            <a:r>
-              <a:rPr sz="4000" b="1">
-                <a:solidFill>
-                  <a:srgbClr val="FFFFFF"/>
-                </a:solidFill>
-                <a:latin typeface="Georgia"/>
-              </a:rPr>
-              <a:t>Why Tonight Is About You</a:t>
-            </a:r>
-          </a:p>
-        </p:txBody>
-      </p:sp>
-      <p:sp>
-        <p:nvSpPr>
-          <p:cNvPr id="5" name="TextBox 4"/>
-          <p:cNvSpPr txBox="1"/>
-          <p:nvPr/>
-        </p:nvSpPr>
-        <p:spPr>
-          <a:xfrm>
-            <a:off x="822960" y="1554480"/>
-            <a:ext cx="10607040" cy="4480560"/>
-          </a:xfrm>
-          <a:prstGeom prst="rect">
-            <a:avLst/>
-          </a:prstGeom>
-          <a:noFill/>
-        </p:spPr>
-        <p:txBody>
-          <a:bodyPr wrap="square">
-            <a:spAutoFit/>
-          </a:bodyPr>
-          <a:lstStyle/>
-          <a:p>
-            <a:pPr algn="l"/>
-            <a:r>
-              <a:rPr sz="2700" b="0">
-                <a:solidFill>
-                  <a:srgbClr val="222222"/>
-                </a:solidFill>
-                <a:latin typeface="Calibri"/>
-              </a:rPr>
-              <a:t>•  You give all day, every day — meds, rides, calls, papers</a:t>
-            </a:r>
-          </a:p>
-          <a:p>
-            <a:pPr algn="l"/>
-            <a:r>
-              <a:rPr sz="2700" b="0">
-                <a:solidFill>
-                  <a:srgbClr val="222222"/>
-                </a:solidFill>
-                <a:latin typeface="Calibri"/>
-              </a:rPr>
-              <a:t>•  Your child needs you healthy and standing</a:t>
-            </a:r>
-          </a:p>
-          <a:p>
-            <a:pPr algn="l"/>
-            <a:r>
-              <a:rPr sz="2700" b="0">
-                <a:solidFill>
-                  <a:srgbClr val="222222"/>
-                </a:solidFill>
-                <a:latin typeface="Calibri"/>
-              </a:rPr>
-              <a:t>•  You cannot pour from an empty cup</a:t>
-            </a:r>
-          </a:p>
-          <a:p>
-            <a:pPr algn="l"/>
-            <a:r>
-              <a:rPr sz="2700" b="0">
-                <a:solidFill>
-                  <a:srgbClr val="222222"/>
-                </a:solidFill>
-                <a:latin typeface="Calibri"/>
-              </a:rPr>
-              <a:t>•  Caring for yourself IS caring for your child</a:t>
-            </a:r>
-          </a:p>
-        </p:txBody>
-      </p:sp>
-      <p:sp>
-        <p:nvSpPr>
-          <p:cNvPr id="6" name="TextBox 5"/>
-          <p:cNvSpPr txBox="1"/>
-          <p:nvPr/>
-        </p:nvSpPr>
-        <p:spPr>
-          <a:xfrm>
-            <a:off x="548640" y="6355080"/>
-            <a:ext cx="11064240" cy="365760"/>
-          </a:xfrm>
-          <a:prstGeom prst="rect">
-            <a:avLst/>
-          </a:prstGeom>
-          <a:noFill/>
-        </p:spPr>
-        <p:txBody>
-          <a:bodyPr wrap="square">
-            <a:spAutoFit/>
-          </a:bodyPr>
-          <a:lstStyle/>
-          <a:p>
-            <a:pPr algn="l"/>
-            <a:r>
-              <a:rPr sz="1400" b="0">
-                <a:solidFill>
-                  <a:srgbClr val="2E4A2B"/>
-                </a:solidFill>
-                <a:latin typeface="Calibri"/>
-              </a:rPr>
-              <a:t>Southern Oak Financial &amp; Wellness — Free Zoom Webinar</a:t>
-            </a:r>
-          </a:p>
-        </p:txBody>
-      </p:sp>
-    </p:spTree>
-  </p:cSld>
-  <p:clrMapOvr>
-    <a:masterClrMapping/>
-  </p:clrMapOvr>
-</p:sld>
-</file>
-
-<file path=ppt/slides/slide4.xml><?xml version="1.0" encoding="utf-8"?>
-<p:sld xmlns:a="http://schemas.openxmlformats.org/drawingml/2006/main" xmlns:p="http://schemas.openxmlformats.org/presentationml/2006/main" xmlns:r="http://schemas.openxmlformats.org/officeDocument/2006/relationships">
-  <p:cSld>
-    <p:spTree>
-      <p:nvGrpSpPr>
-        <p:cNvPr id="1" name=""/>
-        <p:cNvGrpSpPr/>
-        <p:nvPr/>
-      </p:nvGrpSpPr>
-      <p:grpSpPr/>
-      <p:sp>
-        <p:nvSpPr>
-          <p:cNvPr id="2" name="Rectangle 1"/>
+          <p:cNvPr id="3" name="Rectangle 2"/>
           <p:cNvSpPr/>
           <p:nvPr/>
         </p:nvSpPr>
         <p:spPr>
           <a:xfrm>
-            <a:off x="0" y="0"/>
-            <a:ext cx="12191695" cy="6858000"/>
+            <a:off x="0" y="1078992"/>
+            <a:ext cx="12191695" cy="50292"/>
           </a:xfrm>
           <a:prstGeom prst="rect">
             <a:avLst/>
           </a:prstGeom>
           <a:solidFill>
-            <a:srgbClr val="FAF4E6"/>
+            <a:srgbClr val="C46224"/>
           </a:solidFill>
           <a:ln>
             <a:noFill/>
@@ -6094,20 +6608,283 @@
       </p:sp>
       <p:sp>
         <p:nvSpPr>
-          <p:cNvPr id="3" name="Rectangle 2"/>
+          <p:cNvPr id="4" name="TextBox 3"/>
+          <p:cNvSpPr txBox="1"/>
+          <p:nvPr/>
+        </p:nvSpPr>
+        <p:spPr>
+          <a:xfrm>
+            <a:off x="502920" y="146304"/>
+            <a:ext cx="9692640" cy="822960"/>
+          </a:xfrm>
+          <a:prstGeom prst="rect">
+            <a:avLst/>
+          </a:prstGeom>
+          <a:noFill/>
+        </p:spPr>
+        <p:txBody>
+          <a:bodyPr wrap="square" anchor="ctr">
+            <a:spAutoFit/>
+          </a:bodyPr>
+          <a:lstStyle/>
+          <a:p>
+            <a:pPr algn="l">
+              <a:lnSpc>
+                <a:spcPct val="112000"/>
+              </a:lnSpc>
+            </a:pPr>
+            <a:r>
+              <a:rPr sz="3100" b="1" i="0">
+                <a:solidFill>
+                  <a:srgbClr val="FFFFFF"/>
+                </a:solidFill>
+                <a:latin typeface="Georgia"/>
+              </a:rPr>
+              <a:t>Why Caregivers Need It Most</a:t>
+            </a:r>
+          </a:p>
+        </p:txBody>
+      </p:sp>
+      <p:pic>
+        <p:nvPicPr>
+          <p:cNvPr id="5" name="Picture 4" descr="southern-oak-logo.png"/>
+          <p:cNvPicPr>
+            <a:picLocks noChangeAspect="1"/>
+          </p:cNvPicPr>
+          <p:nvPr/>
+        </p:nvPicPr>
+        <p:blipFill>
+          <a:blip r:embed="rId2"/>
+          <a:stretch>
+            <a:fillRect/>
+          </a:stretch>
+        </p:blipFill>
+        <p:spPr>
+          <a:xfrm>
+            <a:off x="11018520" y="82296"/>
+            <a:ext cx="750171" cy="914400"/>
+          </a:xfrm>
+          <a:prstGeom prst="rect">
+            <a:avLst/>
+          </a:prstGeom>
+        </p:spPr>
+      </p:pic>
+      <p:sp>
+        <p:nvSpPr>
+          <p:cNvPr id="6" name="TextBox 5"/>
+          <p:cNvSpPr txBox="1"/>
+          <p:nvPr/>
+        </p:nvSpPr>
+        <p:spPr>
+          <a:xfrm>
+            <a:off x="640080" y="1600200"/>
+            <a:ext cx="10881360" cy="4572000"/>
+          </a:xfrm>
+          <a:prstGeom prst="rect">
+            <a:avLst/>
+          </a:prstGeom>
+          <a:noFill/>
+        </p:spPr>
+        <p:txBody>
+          <a:bodyPr wrap="square">
+            <a:spAutoFit/>
+          </a:bodyPr>
+          <a:lstStyle/>
+          <a:p>
+            <a:pPr>
+              <a:lnSpc>
+                <a:spcPct val="115000"/>
+              </a:lnSpc>
+              <a:spcAft>
+                <a:spcPts val="1200"/>
+              </a:spcAft>
+            </a:pPr>
+            <a:r>
+              <a:rPr sz="2300" b="1">
+                <a:solidFill>
+                  <a:srgbClr val="C46224"/>
+                </a:solidFill>
+                <a:latin typeface="Verdana"/>
+              </a:rPr>
+              <a:t>▸  </a:t>
+            </a:r>
+            <a:r>
+              <a:rPr sz="2300">
+                <a:solidFill>
+                  <a:srgbClr val="2B2B26"/>
+                </a:solidFill>
+                <a:latin typeface="Verdana"/>
+              </a:rPr>
+              <a:t>Your family counts on you every single day.</a:t>
+            </a:r>
+          </a:p>
+          <a:p>
+            <a:pPr>
+              <a:lnSpc>
+                <a:spcPct val="115000"/>
+              </a:lnSpc>
+              <a:spcAft>
+                <a:spcPts val="1200"/>
+              </a:spcAft>
+            </a:pPr>
+            <a:r>
+              <a:rPr sz="2300" b="1">
+                <a:solidFill>
+                  <a:srgbClr val="C46224"/>
+                </a:solidFill>
+                <a:latin typeface="Verdana"/>
+              </a:rPr>
+              <a:t>▸  </a:t>
+            </a:r>
+            <a:r>
+              <a:rPr sz="2300">
+                <a:solidFill>
+                  <a:srgbClr val="2B2B26"/>
+                </a:solidFill>
+                <a:latin typeface="Verdana"/>
+              </a:rPr>
+              <a:t>If you are gone, your loved one still needs the same care.</a:t>
+            </a:r>
+          </a:p>
+          <a:p>
+            <a:pPr>
+              <a:lnSpc>
+                <a:spcPct val="115000"/>
+              </a:lnSpc>
+              <a:spcAft>
+                <a:spcPts val="1200"/>
+              </a:spcAft>
+            </a:pPr>
+            <a:r>
+              <a:rPr sz="2300" b="1">
+                <a:solidFill>
+                  <a:srgbClr val="C46224"/>
+                </a:solidFill>
+                <a:latin typeface="Verdana"/>
+              </a:rPr>
+              <a:t>▸  </a:t>
+            </a:r>
+            <a:r>
+              <a:rPr sz="2300">
+                <a:solidFill>
+                  <a:srgbClr val="2B2B26"/>
+                </a:solidFill>
+                <a:latin typeface="Verdana"/>
+              </a:rPr>
+              <a:t>Coverage helps pay the people who would take over your care work.</a:t>
+            </a:r>
+          </a:p>
+          <a:p>
+            <a:pPr>
+              <a:lnSpc>
+                <a:spcPct val="115000"/>
+              </a:lnSpc>
+              <a:spcAft>
+                <a:spcPts val="1200"/>
+              </a:spcAft>
+            </a:pPr>
+            <a:r>
+              <a:rPr sz="2300" b="1">
+                <a:solidFill>
+                  <a:srgbClr val="C46224"/>
+                </a:solidFill>
+                <a:latin typeface="Verdana"/>
+              </a:rPr>
+              <a:t>▸  </a:t>
+            </a:r>
+            <a:r>
+              <a:rPr sz="2300">
+                <a:solidFill>
+                  <a:srgbClr val="2B2B26"/>
+                </a:solidFill>
+                <a:latin typeface="Verdana"/>
+              </a:rPr>
+              <a:t>It gives your family time — time to grieve, and time to plan.</a:t>
+            </a:r>
+          </a:p>
+        </p:txBody>
+      </p:sp>
+      <p:sp>
+        <p:nvSpPr>
+          <p:cNvPr id="7" name="TextBox 6"/>
+          <p:cNvSpPr txBox="1"/>
+          <p:nvPr/>
+        </p:nvSpPr>
+        <p:spPr>
+          <a:xfrm>
+            <a:off x="502920" y="6473952"/>
+            <a:ext cx="11155680" cy="292608"/>
+          </a:xfrm>
+          <a:prstGeom prst="rect">
+            <a:avLst/>
+          </a:prstGeom>
+          <a:noFill/>
+        </p:spPr>
+        <p:txBody>
+          <a:bodyPr wrap="square" anchor="t">
+            <a:spAutoFit/>
+          </a:bodyPr>
+          <a:lstStyle/>
+          <a:p>
+            <a:pPr algn="l">
+              <a:lnSpc>
+                <a:spcPct val="112000"/>
+              </a:lnSpc>
+            </a:pPr>
+            <a:r>
+              <a:rPr sz="1150" b="0" i="0">
+                <a:solidFill>
+                  <a:srgbClr val="7A7466"/>
+                </a:solidFill>
+                <a:latin typeface="Verdana"/>
+              </a:rPr>
+              <a:t>Southern Oak Financial &amp; Wellness  •  southernoakfw.org</a:t>
+            </a:r>
+          </a:p>
+        </p:txBody>
+      </p:sp>
+    </p:spTree>
+  </p:cSld>
+  <p:clrMapOvr>
+    <a:masterClrMapping/>
+  </p:clrMapOvr>
+</p:sld>
+</file>
+
+<file path=ppt/slides/slide7.xml><?xml version="1.0" encoding="utf-8"?>
+<p:sld xmlns:a="http://schemas.openxmlformats.org/drawingml/2006/main" xmlns:p="http://schemas.openxmlformats.org/presentationml/2006/main" xmlns:r="http://schemas.openxmlformats.org/officeDocument/2006/relationships">
+  <p:cSld>
+    <p:bg>
+      <p:bgPr>
+        <a:solidFill>
+          <a:srgbClr val="FAF5EA"/>
+        </a:solidFill>
+        <a:effectLst/>
+      </p:bgPr>
+    </p:bg>
+    <p:spTree>
+      <p:nvGrpSpPr>
+        <p:cNvPr id="1" name=""/>
+        <p:cNvGrpSpPr/>
+        <p:nvPr/>
+      </p:nvGrpSpPr>
+      <p:grpSpPr/>
+      <p:sp>
+        <p:nvSpPr>
+          <p:cNvPr id="2" name="Rectangle 1"/>
           <p:cNvSpPr/>
           <p:nvPr/>
         </p:nvSpPr>
         <p:spPr>
           <a:xfrm>
             <a:off x="0" y="0"/>
-            <a:ext cx="12191695" cy="1051560"/>
+            <a:ext cx="12191695" cy="1078992"/>
           </a:xfrm>
           <a:prstGeom prst="rect">
             <a:avLst/>
           </a:prstGeom>
           <a:solidFill>
-            <a:srgbClr val="2E4A2B"/>
+            <a:srgbClr val="3E4A2E"/>
           </a:solidFill>
           <a:ln>
             <a:noFill/>
@@ -6138,191 +6915,20 @@
       </p:sp>
       <p:sp>
         <p:nvSpPr>
-          <p:cNvPr id="4" name="TextBox 3"/>
-          <p:cNvSpPr txBox="1"/>
-          <p:nvPr/>
-        </p:nvSpPr>
-        <p:spPr>
-          <a:xfrm>
-            <a:off x="548640" y="164592"/>
-            <a:ext cx="11064240" cy="777240"/>
-          </a:xfrm>
-          <a:prstGeom prst="rect">
-            <a:avLst/>
-          </a:prstGeom>
-          <a:noFill/>
-        </p:spPr>
-        <p:txBody>
-          <a:bodyPr wrap="square">
-            <a:spAutoFit/>
-          </a:bodyPr>
-          <a:lstStyle/>
-          <a:p>
-            <a:pPr algn="l"/>
-            <a:r>
-              <a:rPr sz="4000" b="1">
-                <a:solidFill>
-                  <a:srgbClr val="FFFFFF"/>
-                </a:solidFill>
-                <a:latin typeface="Georgia"/>
-              </a:rPr>
-              <a:t>Signs You Are Running on Empty</a:t>
-            </a:r>
-          </a:p>
-        </p:txBody>
-      </p:sp>
-      <p:sp>
-        <p:nvSpPr>
-          <p:cNvPr id="5" name="TextBox 4"/>
-          <p:cNvSpPr txBox="1"/>
-          <p:nvPr/>
-        </p:nvSpPr>
-        <p:spPr>
-          <a:xfrm>
-            <a:off x="822960" y="1554480"/>
-            <a:ext cx="10607040" cy="4480560"/>
-          </a:xfrm>
-          <a:prstGeom prst="rect">
-            <a:avLst/>
-          </a:prstGeom>
-          <a:noFill/>
-        </p:spPr>
-        <p:txBody>
-          <a:bodyPr wrap="square">
-            <a:spAutoFit/>
-          </a:bodyPr>
-          <a:lstStyle/>
-          <a:p>
-            <a:pPr algn="l"/>
-            <a:r>
-              <a:rPr sz="2700" b="0">
-                <a:solidFill>
-                  <a:srgbClr val="222222"/>
-                </a:solidFill>
-                <a:latin typeface="Calibri"/>
-              </a:rPr>
-              <a:t>•  Tired all the time, even after sleep</a:t>
-            </a:r>
-          </a:p>
-          <a:p>
-            <a:pPr algn="l"/>
-            <a:r>
-              <a:rPr sz="2700" b="0">
-                <a:solidFill>
-                  <a:srgbClr val="222222"/>
-                </a:solidFill>
-                <a:latin typeface="Calibri"/>
-              </a:rPr>
-              <a:t>•  No real break in weeks</a:t>
-            </a:r>
-          </a:p>
-          <a:p>
-            <a:pPr algn="l"/>
-            <a:r>
-              <a:rPr sz="2700" b="0">
-                <a:solidFill>
-                  <a:srgbClr val="222222"/>
-                </a:solidFill>
-                <a:latin typeface="Calibri"/>
-              </a:rPr>
-              <a:t>•  Snapping at people you love</a:t>
-            </a:r>
-          </a:p>
-          <a:p>
-            <a:pPr algn="l"/>
-            <a:r>
-              <a:rPr sz="2700" b="0">
-                <a:solidFill>
-                  <a:srgbClr val="222222"/>
-                </a:solidFill>
-                <a:latin typeface="Calibri"/>
-              </a:rPr>
-              <a:t>•  Forgetting your OWN medicines and appointments</a:t>
-            </a:r>
-          </a:p>
-          <a:p>
-            <a:pPr algn="l"/>
-            <a:r>
-              <a:rPr sz="2700" b="0">
-                <a:solidFill>
-                  <a:srgbClr val="222222"/>
-                </a:solidFill>
-                <a:latin typeface="Calibri"/>
-              </a:rPr>
-              <a:t>•  Feeling like nobody understands</a:t>
-            </a:r>
-          </a:p>
-        </p:txBody>
-      </p:sp>
-      <p:sp>
-        <p:nvSpPr>
-          <p:cNvPr id="6" name="TextBox 5"/>
-          <p:cNvSpPr txBox="1"/>
-          <p:nvPr/>
-        </p:nvSpPr>
-        <p:spPr>
-          <a:xfrm>
-            <a:off x="548640" y="6355080"/>
-            <a:ext cx="11064240" cy="365760"/>
-          </a:xfrm>
-          <a:prstGeom prst="rect">
-            <a:avLst/>
-          </a:prstGeom>
-          <a:noFill/>
-        </p:spPr>
-        <p:txBody>
-          <a:bodyPr wrap="square">
-            <a:spAutoFit/>
-          </a:bodyPr>
-          <a:lstStyle/>
-          <a:p>
-            <a:pPr algn="l"/>
-            <a:r>
-              <a:rPr sz="1400" b="0">
-                <a:solidFill>
-                  <a:srgbClr val="2E4A2B"/>
-                </a:solidFill>
-                <a:latin typeface="Calibri"/>
-              </a:rPr>
-              <a:t>Southern Oak Financial &amp; Wellness — Free Zoom Webinar</a:t>
-            </a:r>
-          </a:p>
-        </p:txBody>
-      </p:sp>
-    </p:spTree>
-  </p:cSld>
-  <p:clrMapOvr>
-    <a:masterClrMapping/>
-  </p:clrMapOvr>
-</p:sld>
-</file>
-
-<file path=ppt/slides/slide5.xml><?xml version="1.0" encoding="utf-8"?>
-<p:sld xmlns:a="http://schemas.openxmlformats.org/drawingml/2006/main" xmlns:p="http://schemas.openxmlformats.org/presentationml/2006/main" xmlns:r="http://schemas.openxmlformats.org/officeDocument/2006/relationships">
-  <p:cSld>
-    <p:spTree>
-      <p:nvGrpSpPr>
-        <p:cNvPr id="1" name=""/>
-        <p:cNvGrpSpPr/>
-        <p:nvPr/>
-      </p:nvGrpSpPr>
-      <p:grpSpPr/>
-      <p:sp>
-        <p:nvSpPr>
-          <p:cNvPr id="2" name="Rectangle 1"/>
+          <p:cNvPr id="3" name="Rectangle 2"/>
           <p:cNvSpPr/>
           <p:nvPr/>
         </p:nvSpPr>
         <p:spPr>
           <a:xfrm>
-            <a:off x="0" y="0"/>
-            <a:ext cx="12191695" cy="6858000"/>
+            <a:off x="0" y="1078992"/>
+            <a:ext cx="12191695" cy="50292"/>
           </a:xfrm>
           <a:prstGeom prst="rect">
             <a:avLst/>
           </a:prstGeom>
           <a:solidFill>
-            <a:srgbClr val="FAF4E6"/>
+            <a:srgbClr val="C46224"/>
           </a:solidFill>
           <a:ln>
             <a:noFill/>
@@ -6353,20 +6959,283 @@
       </p:sp>
       <p:sp>
         <p:nvSpPr>
-          <p:cNvPr id="3" name="Rectangle 2"/>
+          <p:cNvPr id="4" name="TextBox 3"/>
+          <p:cNvSpPr txBox="1"/>
+          <p:nvPr/>
+        </p:nvSpPr>
+        <p:spPr>
+          <a:xfrm>
+            <a:off x="502920" y="146304"/>
+            <a:ext cx="9692640" cy="822960"/>
+          </a:xfrm>
+          <a:prstGeom prst="rect">
+            <a:avLst/>
+          </a:prstGeom>
+          <a:noFill/>
+        </p:spPr>
+        <p:txBody>
+          <a:bodyPr wrap="square" anchor="ctr">
+            <a:spAutoFit/>
+          </a:bodyPr>
+          <a:lstStyle/>
+          <a:p>
+            <a:pPr algn="l">
+              <a:lnSpc>
+                <a:spcPct val="112000"/>
+              </a:lnSpc>
+            </a:pPr>
+            <a:r>
+              <a:rPr sz="3100" b="1" i="0">
+                <a:solidFill>
+                  <a:srgbClr val="FFFFFF"/>
+                </a:solidFill>
+                <a:latin typeface="Georgia"/>
+              </a:rPr>
+              <a:t>Start Small — Start Now</a:t>
+            </a:r>
+          </a:p>
+        </p:txBody>
+      </p:sp>
+      <p:pic>
+        <p:nvPicPr>
+          <p:cNvPr id="5" name="Picture 4" descr="southern-oak-logo.png"/>
+          <p:cNvPicPr>
+            <a:picLocks noChangeAspect="1"/>
+          </p:cNvPicPr>
+          <p:nvPr/>
+        </p:nvPicPr>
+        <p:blipFill>
+          <a:blip r:embed="rId2"/>
+          <a:stretch>
+            <a:fillRect/>
+          </a:stretch>
+        </p:blipFill>
+        <p:spPr>
+          <a:xfrm>
+            <a:off x="11018520" y="82296"/>
+            <a:ext cx="750171" cy="914400"/>
+          </a:xfrm>
+          <a:prstGeom prst="rect">
+            <a:avLst/>
+          </a:prstGeom>
+        </p:spPr>
+      </p:pic>
+      <p:sp>
+        <p:nvSpPr>
+          <p:cNvPr id="6" name="TextBox 5"/>
+          <p:cNvSpPr txBox="1"/>
+          <p:nvPr/>
+        </p:nvSpPr>
+        <p:spPr>
+          <a:xfrm>
+            <a:off x="640080" y="1600200"/>
+            <a:ext cx="10881360" cy="4572000"/>
+          </a:xfrm>
+          <a:prstGeom prst="rect">
+            <a:avLst/>
+          </a:prstGeom>
+          <a:noFill/>
+        </p:spPr>
+        <p:txBody>
+          <a:bodyPr wrap="square">
+            <a:spAutoFit/>
+          </a:bodyPr>
+          <a:lstStyle/>
+          <a:p>
+            <a:pPr>
+              <a:lnSpc>
+                <a:spcPct val="115000"/>
+              </a:lnSpc>
+              <a:spcAft>
+                <a:spcPts val="1200"/>
+              </a:spcAft>
+            </a:pPr>
+            <a:r>
+              <a:rPr sz="2300" b="1">
+                <a:solidFill>
+                  <a:srgbClr val="C46224"/>
+                </a:solidFill>
+                <a:latin typeface="Verdana"/>
+              </a:rPr>
+              <a:t>▸  </a:t>
+            </a:r>
+            <a:r>
+              <a:rPr sz="2300">
+                <a:solidFill>
+                  <a:srgbClr val="2B2B26"/>
+                </a:solidFill>
+                <a:latin typeface="Verdana"/>
+              </a:rPr>
+              <a:t>You do not need a big policy to start.</a:t>
+            </a:r>
+          </a:p>
+          <a:p>
+            <a:pPr>
+              <a:lnSpc>
+                <a:spcPct val="115000"/>
+              </a:lnSpc>
+              <a:spcAft>
+                <a:spcPts val="1200"/>
+              </a:spcAft>
+            </a:pPr>
+            <a:r>
+              <a:rPr sz="2300" b="1">
+                <a:solidFill>
+                  <a:srgbClr val="C46224"/>
+                </a:solidFill>
+                <a:latin typeface="Verdana"/>
+              </a:rPr>
+              <a:t>▸  </a:t>
+            </a:r>
+            <a:r>
+              <a:rPr sz="2300">
+                <a:solidFill>
+                  <a:srgbClr val="2B2B26"/>
+                </a:solidFill>
+                <a:latin typeface="Verdana"/>
+              </a:rPr>
+              <a:t>A small policy is better than no policy.</a:t>
+            </a:r>
+          </a:p>
+          <a:p>
+            <a:pPr>
+              <a:lnSpc>
+                <a:spcPct val="115000"/>
+              </a:lnSpc>
+              <a:spcAft>
+                <a:spcPts val="1200"/>
+              </a:spcAft>
+            </a:pPr>
+            <a:r>
+              <a:rPr sz="2300" b="1">
+                <a:solidFill>
+                  <a:srgbClr val="C46224"/>
+                </a:solidFill>
+                <a:latin typeface="Verdana"/>
+              </a:rPr>
+              <a:t>▸  </a:t>
+            </a:r>
+            <a:r>
+              <a:rPr sz="2300">
+                <a:solidFill>
+                  <a:srgbClr val="2B2B26"/>
+                </a:solidFill>
+                <a:latin typeface="Verdana"/>
+              </a:rPr>
+              <a:t>Coverage costs less when you are young and healthy.</a:t>
+            </a:r>
+          </a:p>
+          <a:p>
+            <a:pPr>
+              <a:lnSpc>
+                <a:spcPct val="115000"/>
+              </a:lnSpc>
+              <a:spcAft>
+                <a:spcPts val="1200"/>
+              </a:spcAft>
+            </a:pPr>
+            <a:r>
+              <a:rPr sz="2300" b="1">
+                <a:solidFill>
+                  <a:srgbClr val="C46224"/>
+                </a:solidFill>
+                <a:latin typeface="Verdana"/>
+              </a:rPr>
+              <a:t>▸  </a:t>
+            </a:r>
+            <a:r>
+              <a:rPr sz="2300">
+                <a:solidFill>
+                  <a:srgbClr val="2B2B26"/>
+                </a:solidFill>
+                <a:latin typeface="Verdana"/>
+              </a:rPr>
+              <a:t>Waiting can cost more — or it can be too late to get it.</a:t>
+            </a:r>
+          </a:p>
+        </p:txBody>
+      </p:sp>
+      <p:sp>
+        <p:nvSpPr>
+          <p:cNvPr id="7" name="TextBox 6"/>
+          <p:cNvSpPr txBox="1"/>
+          <p:nvPr/>
+        </p:nvSpPr>
+        <p:spPr>
+          <a:xfrm>
+            <a:off x="502920" y="6473952"/>
+            <a:ext cx="11155680" cy="292608"/>
+          </a:xfrm>
+          <a:prstGeom prst="rect">
+            <a:avLst/>
+          </a:prstGeom>
+          <a:noFill/>
+        </p:spPr>
+        <p:txBody>
+          <a:bodyPr wrap="square" anchor="t">
+            <a:spAutoFit/>
+          </a:bodyPr>
+          <a:lstStyle/>
+          <a:p>
+            <a:pPr algn="l">
+              <a:lnSpc>
+                <a:spcPct val="112000"/>
+              </a:lnSpc>
+            </a:pPr>
+            <a:r>
+              <a:rPr sz="1150" b="0" i="0">
+                <a:solidFill>
+                  <a:srgbClr val="7A7466"/>
+                </a:solidFill>
+                <a:latin typeface="Verdana"/>
+              </a:rPr>
+              <a:t>Southern Oak Financial &amp; Wellness  •  southernoakfw.org</a:t>
+            </a:r>
+          </a:p>
+        </p:txBody>
+      </p:sp>
+    </p:spTree>
+  </p:cSld>
+  <p:clrMapOvr>
+    <a:masterClrMapping/>
+  </p:clrMapOvr>
+</p:sld>
+</file>
+
+<file path=ppt/slides/slide8.xml><?xml version="1.0" encoding="utf-8"?>
+<p:sld xmlns:a="http://schemas.openxmlformats.org/drawingml/2006/main" xmlns:p="http://schemas.openxmlformats.org/presentationml/2006/main" xmlns:r="http://schemas.openxmlformats.org/officeDocument/2006/relationships">
+  <p:cSld>
+    <p:bg>
+      <p:bgPr>
+        <a:solidFill>
+          <a:srgbClr val="FAF5EA"/>
+        </a:solidFill>
+        <a:effectLst/>
+      </p:bgPr>
+    </p:bg>
+    <p:spTree>
+      <p:nvGrpSpPr>
+        <p:cNvPr id="1" name=""/>
+        <p:cNvGrpSpPr/>
+        <p:nvPr/>
+      </p:nvGrpSpPr>
+      <p:grpSpPr/>
+      <p:sp>
+        <p:nvSpPr>
+          <p:cNvPr id="2" name="Rectangle 1"/>
           <p:cNvSpPr/>
           <p:nvPr/>
         </p:nvSpPr>
         <p:spPr>
           <a:xfrm>
             <a:off x="0" y="0"/>
-            <a:ext cx="12191695" cy="1051560"/>
+            <a:ext cx="12191695" cy="1078992"/>
           </a:xfrm>
           <a:prstGeom prst="rect">
             <a:avLst/>
           </a:prstGeom>
           <a:solidFill>
-            <a:srgbClr val="2E4A2B"/>
+            <a:srgbClr val="3E4A2E"/>
           </a:solidFill>
           <a:ln>
             <a:noFill/>
@@ -6397,179 +7266,20 @@
       </p:sp>
       <p:sp>
         <p:nvSpPr>
-          <p:cNvPr id="4" name="TextBox 3"/>
-          <p:cNvSpPr txBox="1"/>
-          <p:nvPr/>
-        </p:nvSpPr>
-        <p:spPr>
-          <a:xfrm>
-            <a:off x="548640" y="164592"/>
-            <a:ext cx="11064240" cy="777240"/>
-          </a:xfrm>
-          <a:prstGeom prst="rect">
-            <a:avLst/>
-          </a:prstGeom>
-          <a:noFill/>
-        </p:spPr>
-        <p:txBody>
-          <a:bodyPr wrap="square">
-            <a:spAutoFit/>
-          </a:bodyPr>
-          <a:lstStyle/>
-          <a:p>
-            <a:pPr algn="l"/>
-            <a:r>
-              <a:rPr sz="4000" b="1">
-                <a:solidFill>
-                  <a:srgbClr val="FFFFFF"/>
-                </a:solidFill>
-                <a:latin typeface="Georgia"/>
-              </a:rPr>
-              <a:t>First Help: Make Medication Time Easier</a:t>
-            </a:r>
-          </a:p>
-        </p:txBody>
-      </p:sp>
-      <p:sp>
-        <p:nvSpPr>
-          <p:cNvPr id="5" name="TextBox 4"/>
-          <p:cNvSpPr txBox="1"/>
-          <p:nvPr/>
-        </p:nvSpPr>
-        <p:spPr>
-          <a:xfrm>
-            <a:off x="822960" y="1554480"/>
-            <a:ext cx="10607040" cy="4480560"/>
-          </a:xfrm>
-          <a:prstGeom prst="rect">
-            <a:avLst/>
-          </a:prstGeom>
-          <a:noFill/>
-        </p:spPr>
-        <p:txBody>
-          <a:bodyPr wrap="square">
-            <a:spAutoFit/>
-          </a:bodyPr>
-          <a:lstStyle/>
-          <a:p>
-            <a:pPr algn="l"/>
-            <a:r>
-              <a:rPr sz="2700" b="0">
-                <a:solidFill>
-                  <a:srgbClr val="222222"/>
-                </a:solidFill>
-                <a:latin typeface="Calibri"/>
-              </a:rPr>
-              <a:t>•  One clean list: name, dose, and what it is for</a:t>
-            </a:r>
-          </a:p>
-          <a:p>
-            <a:pPr algn="l"/>
-            <a:r>
-              <a:rPr sz="2700" b="0">
-                <a:solidFill>
-                  <a:srgbClr val="222222"/>
-                </a:solidFill>
-                <a:latin typeface="Calibri"/>
-              </a:rPr>
-              <a:t>•  Same time each day, tied to a routine you already do</a:t>
-            </a:r>
-          </a:p>
-          <a:p>
-            <a:pPr algn="l"/>
-            <a:r>
-              <a:rPr sz="2700" b="0">
-                <a:solidFill>
-                  <a:srgbClr val="222222"/>
-                </a:solidFill>
-                <a:latin typeface="Calibri"/>
-              </a:rPr>
-              <a:t>•  Ask the pharmacy your questions — that is their job</a:t>
-            </a:r>
-          </a:p>
-          <a:p>
-            <a:pPr algn="l"/>
-            <a:r>
-              <a:rPr sz="2700" b="0">
-                <a:solidFill>
-                  <a:srgbClr val="222222"/>
-                </a:solidFill>
-                <a:latin typeface="Calibri"/>
-              </a:rPr>
-              <a:t>•  Keep the list on your phone AND on paper</a:t>
-            </a:r>
-          </a:p>
-        </p:txBody>
-      </p:sp>
-      <p:sp>
-        <p:nvSpPr>
-          <p:cNvPr id="6" name="TextBox 5"/>
-          <p:cNvSpPr txBox="1"/>
-          <p:nvPr/>
-        </p:nvSpPr>
-        <p:spPr>
-          <a:xfrm>
-            <a:off x="548640" y="6355080"/>
-            <a:ext cx="11064240" cy="365760"/>
-          </a:xfrm>
-          <a:prstGeom prst="rect">
-            <a:avLst/>
-          </a:prstGeom>
-          <a:noFill/>
-        </p:spPr>
-        <p:txBody>
-          <a:bodyPr wrap="square">
-            <a:spAutoFit/>
-          </a:bodyPr>
-          <a:lstStyle/>
-          <a:p>
-            <a:pPr algn="l"/>
-            <a:r>
-              <a:rPr sz="1400" b="0">
-                <a:solidFill>
-                  <a:srgbClr val="2E4A2B"/>
-                </a:solidFill>
-                <a:latin typeface="Calibri"/>
-              </a:rPr>
-              <a:t>Southern Oak Financial &amp; Wellness — Free Zoom Webinar</a:t>
-            </a:r>
-          </a:p>
-        </p:txBody>
-      </p:sp>
-    </p:spTree>
-  </p:cSld>
-  <p:clrMapOvr>
-    <a:masterClrMapping/>
-  </p:clrMapOvr>
-</p:sld>
-</file>
-
-<file path=ppt/slides/slide6.xml><?xml version="1.0" encoding="utf-8"?>
-<p:sld xmlns:a="http://schemas.openxmlformats.org/drawingml/2006/main" xmlns:p="http://schemas.openxmlformats.org/presentationml/2006/main" xmlns:r="http://schemas.openxmlformats.org/officeDocument/2006/relationships">
-  <p:cSld>
-    <p:spTree>
-      <p:nvGrpSpPr>
-        <p:cNvPr id="1" name=""/>
-        <p:cNvGrpSpPr/>
-        <p:nvPr/>
-      </p:nvGrpSpPr>
-      <p:grpSpPr/>
-      <p:sp>
-        <p:nvSpPr>
-          <p:cNvPr id="2" name="Rectangle 1"/>
+          <p:cNvPr id="3" name="Rectangle 2"/>
           <p:cNvSpPr/>
           <p:nvPr/>
         </p:nvSpPr>
         <p:spPr>
           <a:xfrm>
-            <a:off x="0" y="0"/>
-            <a:ext cx="12191695" cy="6858000"/>
+            <a:off x="0" y="1078992"/>
+            <a:ext cx="12191695" cy="50292"/>
           </a:xfrm>
           <a:prstGeom prst="rect">
             <a:avLst/>
           </a:prstGeom>
           <a:solidFill>
-            <a:srgbClr val="FAF4E6"/>
+            <a:srgbClr val="C46224"/>
           </a:solidFill>
           <a:ln>
             <a:noFill/>
@@ -6600,20 +7310,283 @@
       </p:sp>
       <p:sp>
         <p:nvSpPr>
-          <p:cNvPr id="3" name="Rectangle 2"/>
+          <p:cNvPr id="4" name="TextBox 3"/>
+          <p:cNvSpPr txBox="1"/>
+          <p:nvPr/>
+        </p:nvSpPr>
+        <p:spPr>
+          <a:xfrm>
+            <a:off x="502920" y="146304"/>
+            <a:ext cx="9692640" cy="822960"/>
+          </a:xfrm>
+          <a:prstGeom prst="rect">
+            <a:avLst/>
+          </a:prstGeom>
+          <a:noFill/>
+        </p:spPr>
+        <p:txBody>
+          <a:bodyPr wrap="square" anchor="ctr">
+            <a:spAutoFit/>
+          </a:bodyPr>
+          <a:lstStyle/>
+          <a:p>
+            <a:pPr algn="l">
+              <a:lnSpc>
+                <a:spcPct val="112000"/>
+              </a:lnSpc>
+            </a:pPr>
+            <a:r>
+              <a:rPr sz="3100" b="1" i="0">
+                <a:solidFill>
+                  <a:srgbClr val="FFFFFF"/>
+                </a:solidFill>
+                <a:latin typeface="Georgia"/>
+              </a:rPr>
+              <a:t>One Very Important Rule</a:t>
+            </a:r>
+          </a:p>
+        </p:txBody>
+      </p:sp>
+      <p:pic>
+        <p:nvPicPr>
+          <p:cNvPr id="5" name="Picture 4" descr="southern-oak-logo.png"/>
+          <p:cNvPicPr>
+            <a:picLocks noChangeAspect="1"/>
+          </p:cNvPicPr>
+          <p:nvPr/>
+        </p:nvPicPr>
+        <p:blipFill>
+          <a:blip r:embed="rId2"/>
+          <a:stretch>
+            <a:fillRect/>
+          </a:stretch>
+        </p:blipFill>
+        <p:spPr>
+          <a:xfrm>
+            <a:off x="11018520" y="82296"/>
+            <a:ext cx="750171" cy="914400"/>
+          </a:xfrm>
+          <a:prstGeom prst="rect">
+            <a:avLst/>
+          </a:prstGeom>
+        </p:spPr>
+      </p:pic>
+      <p:sp>
+        <p:nvSpPr>
+          <p:cNvPr id="6" name="TextBox 5"/>
+          <p:cNvSpPr txBox="1"/>
+          <p:nvPr/>
+        </p:nvSpPr>
+        <p:spPr>
+          <a:xfrm>
+            <a:off x="640080" y="1600200"/>
+            <a:ext cx="10881360" cy="4572000"/>
+          </a:xfrm>
+          <a:prstGeom prst="rect">
+            <a:avLst/>
+          </a:prstGeom>
+          <a:noFill/>
+        </p:spPr>
+        <p:txBody>
+          <a:bodyPr wrap="square">
+            <a:spAutoFit/>
+          </a:bodyPr>
+          <a:lstStyle/>
+          <a:p>
+            <a:pPr>
+              <a:lnSpc>
+                <a:spcPct val="115000"/>
+              </a:lnSpc>
+              <a:spcAft>
+                <a:spcPts val="1200"/>
+              </a:spcAft>
+            </a:pPr>
+            <a:r>
+              <a:rPr sz="2300" b="1">
+                <a:solidFill>
+                  <a:srgbClr val="C46224"/>
+                </a:solidFill>
+                <a:latin typeface="Verdana"/>
+              </a:rPr>
+              <a:t>▸  </a:t>
+            </a:r>
+            <a:r>
+              <a:rPr sz="2300">
+                <a:solidFill>
+                  <a:srgbClr val="2B2B26"/>
+                </a:solidFill>
+                <a:latin typeface="Verdana"/>
+              </a:rPr>
+              <a:t>Do NOT name a child who gets SSI or Medicaid as the one who gets the money.</a:t>
+            </a:r>
+          </a:p>
+          <a:p>
+            <a:pPr>
+              <a:lnSpc>
+                <a:spcPct val="115000"/>
+              </a:lnSpc>
+              <a:spcAft>
+                <a:spcPts val="1200"/>
+              </a:spcAft>
+            </a:pPr>
+            <a:r>
+              <a:rPr sz="2300" b="1">
+                <a:solidFill>
+                  <a:srgbClr val="C46224"/>
+                </a:solidFill>
+                <a:latin typeface="Verdana"/>
+              </a:rPr>
+              <a:t>▸  </a:t>
+            </a:r>
+            <a:r>
+              <a:rPr sz="2300">
+                <a:solidFill>
+                  <a:srgbClr val="2B2B26"/>
+                </a:solidFill>
+                <a:latin typeface="Verdana"/>
+              </a:rPr>
+              <a:t>That money can stop your child's benefits.</a:t>
+            </a:r>
+          </a:p>
+          <a:p>
+            <a:pPr>
+              <a:lnSpc>
+                <a:spcPct val="115000"/>
+              </a:lnSpc>
+              <a:spcAft>
+                <a:spcPts val="1200"/>
+              </a:spcAft>
+            </a:pPr>
+            <a:r>
+              <a:rPr sz="2300" b="1">
+                <a:solidFill>
+                  <a:srgbClr val="C46224"/>
+                </a:solidFill>
+                <a:latin typeface="Verdana"/>
+              </a:rPr>
+              <a:t>▸  </a:t>
+            </a:r>
+            <a:r>
+              <a:rPr sz="2300">
+                <a:solidFill>
+                  <a:srgbClr val="2B2B26"/>
+                </a:solidFill>
+                <a:latin typeface="Verdana"/>
+              </a:rPr>
+              <a:t>Most families use a Special Needs Trust instead.</a:t>
+            </a:r>
+          </a:p>
+          <a:p>
+            <a:pPr>
+              <a:lnSpc>
+                <a:spcPct val="115000"/>
+              </a:lnSpc>
+              <a:spcAft>
+                <a:spcPts val="1200"/>
+              </a:spcAft>
+            </a:pPr>
+            <a:r>
+              <a:rPr sz="2300" b="1">
+                <a:solidFill>
+                  <a:srgbClr val="C46224"/>
+                </a:solidFill>
+                <a:latin typeface="Verdana"/>
+              </a:rPr>
+              <a:t>▸  </a:t>
+            </a:r>
+            <a:r>
+              <a:rPr sz="2300">
+                <a:solidFill>
+                  <a:srgbClr val="2B2B26"/>
+                </a:solidFill>
+                <a:latin typeface="Verdana"/>
+              </a:rPr>
+              <a:t>An attorney sets up the trust. We can point you to the right first step.</a:t>
+            </a:r>
+          </a:p>
+        </p:txBody>
+      </p:sp>
+      <p:sp>
+        <p:nvSpPr>
+          <p:cNvPr id="7" name="TextBox 6"/>
+          <p:cNvSpPr txBox="1"/>
+          <p:nvPr/>
+        </p:nvSpPr>
+        <p:spPr>
+          <a:xfrm>
+            <a:off x="502920" y="6473952"/>
+            <a:ext cx="11155680" cy="292608"/>
+          </a:xfrm>
+          <a:prstGeom prst="rect">
+            <a:avLst/>
+          </a:prstGeom>
+          <a:noFill/>
+        </p:spPr>
+        <p:txBody>
+          <a:bodyPr wrap="square" anchor="t">
+            <a:spAutoFit/>
+          </a:bodyPr>
+          <a:lstStyle/>
+          <a:p>
+            <a:pPr algn="l">
+              <a:lnSpc>
+                <a:spcPct val="112000"/>
+              </a:lnSpc>
+            </a:pPr>
+            <a:r>
+              <a:rPr sz="1150" b="0" i="0">
+                <a:solidFill>
+                  <a:srgbClr val="7A7466"/>
+                </a:solidFill>
+                <a:latin typeface="Verdana"/>
+              </a:rPr>
+              <a:t>Southern Oak Financial &amp; Wellness  •  southernoakfw.org</a:t>
+            </a:r>
+          </a:p>
+        </p:txBody>
+      </p:sp>
+    </p:spTree>
+  </p:cSld>
+  <p:clrMapOvr>
+    <a:masterClrMapping/>
+  </p:clrMapOvr>
+</p:sld>
+</file>
+
+<file path=ppt/slides/slide9.xml><?xml version="1.0" encoding="utf-8"?>
+<p:sld xmlns:a="http://schemas.openxmlformats.org/drawingml/2006/main" xmlns:p="http://schemas.openxmlformats.org/presentationml/2006/main" xmlns:r="http://schemas.openxmlformats.org/officeDocument/2006/relationships">
+  <p:cSld>
+    <p:bg>
+      <p:bgPr>
+        <a:solidFill>
+          <a:srgbClr val="FAF5EA"/>
+        </a:solidFill>
+        <a:effectLst/>
+      </p:bgPr>
+    </p:bg>
+    <p:spTree>
+      <p:nvGrpSpPr>
+        <p:cNvPr id="1" name=""/>
+        <p:cNvGrpSpPr/>
+        <p:nvPr/>
+      </p:nvGrpSpPr>
+      <p:grpSpPr/>
+      <p:sp>
+        <p:nvSpPr>
+          <p:cNvPr id="2" name="Rectangle 1"/>
           <p:cNvSpPr/>
           <p:nvPr/>
         </p:nvSpPr>
         <p:spPr>
           <a:xfrm>
             <a:off x="0" y="0"/>
-            <a:ext cx="12191695" cy="1051560"/>
+            <a:ext cx="12191695" cy="1078992"/>
           </a:xfrm>
           <a:prstGeom prst="rect">
             <a:avLst/>
           </a:prstGeom>
           <a:solidFill>
-            <a:srgbClr val="2E4A2B"/>
+            <a:srgbClr val="3E4A2E"/>
           </a:solidFill>
           <a:ln>
             <a:noFill/>
@@ -6644,179 +7617,20 @@
       </p:sp>
       <p:sp>
         <p:nvSpPr>
-          <p:cNvPr id="4" name="TextBox 3"/>
-          <p:cNvSpPr txBox="1"/>
-          <p:nvPr/>
-        </p:nvSpPr>
-        <p:spPr>
-          <a:xfrm>
-            <a:off x="548640" y="164592"/>
-            <a:ext cx="11064240" cy="777240"/>
-          </a:xfrm>
-          <a:prstGeom prst="rect">
-            <a:avLst/>
-          </a:prstGeom>
-          <a:noFill/>
-        </p:spPr>
-        <p:txBody>
-          <a:bodyPr wrap="square">
-            <a:spAutoFit/>
-          </a:bodyPr>
-          <a:lstStyle/>
-          <a:p>
-            <a:pPr algn="l"/>
-            <a:r>
-              <a:rPr sz="4000" b="1">
-                <a:solidFill>
-                  <a:srgbClr val="FFFFFF"/>
-                </a:solidFill>
-                <a:latin typeface="Georgia"/>
-              </a:rPr>
-              <a:t>Your Free Medication Check</a:t>
-            </a:r>
-          </a:p>
-        </p:txBody>
-      </p:sp>
-      <p:sp>
-        <p:nvSpPr>
-          <p:cNvPr id="5" name="TextBox 4"/>
-          <p:cNvSpPr txBox="1"/>
-          <p:nvPr/>
-        </p:nvSpPr>
-        <p:spPr>
-          <a:xfrm>
-            <a:off x="822960" y="1554480"/>
-            <a:ext cx="10607040" cy="4480560"/>
-          </a:xfrm>
-          <a:prstGeom prst="rect">
-            <a:avLst/>
-          </a:prstGeom>
-          <a:noFill/>
-        </p:spPr>
-        <p:txBody>
-          <a:bodyPr wrap="square">
-            <a:spAutoFit/>
-          </a:bodyPr>
-          <a:lstStyle/>
-          <a:p>
-            <a:pPr algn="l"/>
-            <a:r>
-              <a:rPr sz="2700" b="0">
-                <a:solidFill>
-                  <a:srgbClr val="222222"/>
-                </a:solidFill>
-                <a:latin typeface="Calibri"/>
-              </a:rPr>
-              <a:t>•  We look at your child's full medication list with you</a:t>
-            </a:r>
-          </a:p>
-          <a:p>
-            <a:pPr algn="l"/>
-            <a:r>
-              <a:rPr sz="2700" b="0">
-                <a:solidFill>
-                  <a:srgbClr val="222222"/>
-                </a:solidFill>
-                <a:latin typeface="Calibri"/>
-              </a:rPr>
-              <a:t>•  We look for programs that can lower the cost</a:t>
-            </a:r>
-          </a:p>
-          <a:p>
-            <a:pPr algn="l"/>
-            <a:r>
-              <a:rPr sz="2700" b="0">
-                <a:solidFill>
-                  <a:srgbClr val="222222"/>
-                </a:solidFill>
-                <a:latin typeface="Calibri"/>
-              </a:rPr>
-              <a:t>•  Many families pay more than they have to</a:t>
-            </a:r>
-          </a:p>
-          <a:p>
-            <a:pPr algn="l"/>
-            <a:r>
-              <a:rPr sz="2700" b="0">
-                <a:solidFill>
-                  <a:srgbClr val="222222"/>
-                </a:solidFill>
-                <a:latin typeface="Calibri"/>
-              </a:rPr>
-              <a:t>•  The check is FREE for everyone — always</a:t>
-            </a:r>
-          </a:p>
-        </p:txBody>
-      </p:sp>
-      <p:sp>
-        <p:nvSpPr>
-          <p:cNvPr id="6" name="TextBox 5"/>
-          <p:cNvSpPr txBox="1"/>
-          <p:nvPr/>
-        </p:nvSpPr>
-        <p:spPr>
-          <a:xfrm>
-            <a:off x="548640" y="6355080"/>
-            <a:ext cx="11064240" cy="365760"/>
-          </a:xfrm>
-          <a:prstGeom prst="rect">
-            <a:avLst/>
-          </a:prstGeom>
-          <a:noFill/>
-        </p:spPr>
-        <p:txBody>
-          <a:bodyPr wrap="square">
-            <a:spAutoFit/>
-          </a:bodyPr>
-          <a:lstStyle/>
-          <a:p>
-            <a:pPr algn="l"/>
-            <a:r>
-              <a:rPr sz="1400" b="0">
-                <a:solidFill>
-                  <a:srgbClr val="2E4A2B"/>
-                </a:solidFill>
-                <a:latin typeface="Calibri"/>
-              </a:rPr>
-              <a:t>Southern Oak Financial &amp; Wellness — Free Zoom Webinar</a:t>
-            </a:r>
-          </a:p>
-        </p:txBody>
-      </p:sp>
-    </p:spTree>
-  </p:cSld>
-  <p:clrMapOvr>
-    <a:masterClrMapping/>
-  </p:clrMapOvr>
-</p:sld>
-</file>
-
-<file path=ppt/slides/slide7.xml><?xml version="1.0" encoding="utf-8"?>
-<p:sld xmlns:a="http://schemas.openxmlformats.org/drawingml/2006/main" xmlns:p="http://schemas.openxmlformats.org/presentationml/2006/main" xmlns:r="http://schemas.openxmlformats.org/officeDocument/2006/relationships">
-  <p:cSld>
-    <p:spTree>
-      <p:nvGrpSpPr>
-        <p:cNvPr id="1" name=""/>
-        <p:cNvGrpSpPr/>
-        <p:nvPr/>
-      </p:nvGrpSpPr>
-      <p:grpSpPr/>
-      <p:sp>
-        <p:nvSpPr>
-          <p:cNvPr id="2" name="Rectangle 1"/>
+          <p:cNvPr id="3" name="Rectangle 2"/>
           <p:cNvSpPr/>
           <p:nvPr/>
         </p:nvSpPr>
         <p:spPr>
           <a:xfrm>
-            <a:off x="0" y="0"/>
-            <a:ext cx="12191695" cy="6858000"/>
+            <a:off x="0" y="1078992"/>
+            <a:ext cx="12191695" cy="50292"/>
           </a:xfrm>
           <a:prstGeom prst="rect">
             <a:avLst/>
           </a:prstGeom>
           <a:solidFill>
-            <a:srgbClr val="FAF4E6"/>
+            <a:srgbClr val="C46224"/>
           </a:solidFill>
           <a:ln>
             <a:noFill/>
@@ -6847,58 +7661,14 @@
       </p:sp>
       <p:sp>
         <p:nvSpPr>
-          <p:cNvPr id="3" name="Rectangle 2"/>
-          <p:cNvSpPr/>
-          <p:nvPr/>
-        </p:nvSpPr>
-        <p:spPr>
-          <a:xfrm>
-            <a:off x="0" y="0"/>
-            <a:ext cx="12191695" cy="1051560"/>
-          </a:xfrm>
-          <a:prstGeom prst="rect">
-            <a:avLst/>
-          </a:prstGeom>
-          <a:solidFill>
-            <a:srgbClr val="2E4A2B"/>
-          </a:solidFill>
-          <a:ln>
-            <a:noFill/>
-          </a:ln>
-          <a:effectLst/>
-        </p:spPr>
-        <p:style>
-          <a:lnRef idx="1">
-            <a:schemeClr val="accent1"/>
-          </a:lnRef>
-          <a:fillRef idx="3">
-            <a:schemeClr val="accent1"/>
-          </a:fillRef>
-          <a:effectRef idx="2">
-            <a:schemeClr val="accent1"/>
-          </a:effectRef>
-          <a:fontRef idx="minor">
-            <a:schemeClr val="lt1"/>
-          </a:fontRef>
-        </p:style>
-        <p:txBody>
-          <a:bodyPr rtlCol="0" anchor="ctr"/>
-          <a:lstStyle/>
-          <a:p>
-            <a:pPr algn="ctr"/>
-          </a:p>
-        </p:txBody>
-      </p:sp>
-      <p:sp>
-        <p:nvSpPr>
           <p:cNvPr id="4" name="TextBox 3"/>
           <p:cNvSpPr txBox="1"/>
           <p:nvPr/>
         </p:nvSpPr>
         <p:spPr>
           <a:xfrm>
-            <a:off x="548640" y="164592"/>
-            <a:ext cx="11064240" cy="777240"/>
+            <a:off x="502920" y="146304"/>
+            <a:ext cx="9692640" cy="822960"/>
           </a:xfrm>
           <a:prstGeom prst="rect">
             <a:avLst/>
@@ -6906,34 +7676,62 @@
           <a:noFill/>
         </p:spPr>
         <p:txBody>
-          <a:bodyPr wrap="square">
+          <a:bodyPr wrap="square" anchor="ctr">
             <a:spAutoFit/>
           </a:bodyPr>
           <a:lstStyle/>
           <a:p>
-            <a:pPr algn="l"/>
-            <a:r>
-              <a:rPr sz="4000" b="1">
+            <a:pPr algn="l">
+              <a:lnSpc>
+                <a:spcPct val="112000"/>
+              </a:lnSpc>
+            </a:pPr>
+            <a:r>
+              <a:rPr sz="3100" b="1" i="0">
                 <a:solidFill>
                   <a:srgbClr val="FFFFFF"/>
                 </a:solidFill>
                 <a:latin typeface="Georgia"/>
               </a:rPr>
-              <a:t>Money Basics for Caregiving Families</a:t>
-            </a:r>
-          </a:p>
-        </p:txBody>
-      </p:sp>
-      <p:sp>
-        <p:nvSpPr>
-          <p:cNvPr id="5" name="TextBox 4"/>
+              <a:t>What It Does Not Do</a:t>
+            </a:r>
+          </a:p>
+        </p:txBody>
+      </p:sp>
+      <p:pic>
+        <p:nvPicPr>
+          <p:cNvPr id="5" name="Picture 4" descr="southern-oak-logo.png"/>
+          <p:cNvPicPr>
+            <a:picLocks noChangeAspect="1"/>
+          </p:cNvPicPr>
+          <p:nvPr/>
+        </p:nvPicPr>
+        <p:blipFill>
+          <a:blip r:embed="rId2"/>
+          <a:stretch>
+            <a:fillRect/>
+          </a:stretch>
+        </p:blipFill>
+        <p:spPr>
+          <a:xfrm>
+            <a:off x="11018520" y="82296"/>
+            <a:ext cx="750171" cy="914400"/>
+          </a:xfrm>
+          <a:prstGeom prst="rect">
+            <a:avLst/>
+          </a:prstGeom>
+        </p:spPr>
+      </p:pic>
+      <p:sp>
+        <p:nvSpPr>
+          <p:cNvPr id="6" name="TextBox 5"/>
           <p:cNvSpPr txBox="1"/>
           <p:nvPr/>
         </p:nvSpPr>
         <p:spPr>
           <a:xfrm>
-            <a:off x="822960" y="1554480"/>
-            <a:ext cx="10607040" cy="4480560"/>
+            <a:off x="640080" y="1600200"/>
+            <a:ext cx="10881360" cy="4572000"/>
           </a:xfrm>
           <a:prstGeom prst="rect">
             <a:avLst/>
@@ -6946,65 +7744,129 @@
           </a:bodyPr>
           <a:lstStyle/>
           <a:p>
-            <a:pPr algn="l"/>
-            <a:r>
-              <a:rPr sz="2700" b="0">
-                <a:solidFill>
-                  <a:srgbClr val="222222"/>
-                </a:solidFill>
-                <a:latin typeface="Calibri"/>
-              </a:rPr>
-              <a:t>•  Know what comes in and what goes out</a:t>
-            </a:r>
-          </a:p>
-          <a:p>
-            <a:pPr algn="l"/>
-            <a:r>
-              <a:rPr sz="2700" b="0">
-                <a:solidFill>
-                  <a:srgbClr val="222222"/>
-                </a:solidFill>
-                <a:latin typeface="Calibri"/>
-              </a:rPr>
-              <a:t>•  Write the bills on one page — that page is your map</a:t>
-            </a:r>
-          </a:p>
-          <a:p>
-            <a:pPr algn="l"/>
-            <a:r>
-              <a:rPr sz="2700" b="0">
-                <a:solidFill>
-                  <a:srgbClr val="222222"/>
-                </a:solidFill>
-                <a:latin typeface="Calibri"/>
-              </a:rPr>
-              <a:t>•  Look for the bills that can be lowered first</a:t>
-            </a:r>
-          </a:p>
-          <a:p>
-            <a:pPr algn="l"/>
-            <a:r>
-              <a:rPr sz="2700" b="0">
-                <a:solidFill>
-                  <a:srgbClr val="222222"/>
-                </a:solidFill>
-                <a:latin typeface="Calibri"/>
-              </a:rPr>
-              <a:t>•  Small steps beat big stress</a:t>
-            </a:r>
-          </a:p>
-        </p:txBody>
-      </p:sp>
-      <p:sp>
-        <p:nvSpPr>
-          <p:cNvPr id="6" name="TextBox 5"/>
+            <a:pPr>
+              <a:lnSpc>
+                <a:spcPct val="115000"/>
+              </a:lnSpc>
+              <a:spcAft>
+                <a:spcPts val="1200"/>
+              </a:spcAft>
+            </a:pPr>
+            <a:r>
+              <a:rPr sz="2300" b="1">
+                <a:solidFill>
+                  <a:srgbClr val="C46224"/>
+                </a:solidFill>
+                <a:latin typeface="Verdana"/>
+              </a:rPr>
+              <a:t>▸  </a:t>
+            </a:r>
+            <a:r>
+              <a:rPr sz="2300">
+                <a:solidFill>
+                  <a:srgbClr val="2B2B26"/>
+                </a:solidFill>
+                <a:latin typeface="Verdana"/>
+              </a:rPr>
+              <a:t>It does not promise you will be approved. The company decides.</a:t>
+            </a:r>
+          </a:p>
+          <a:p>
+            <a:pPr>
+              <a:lnSpc>
+                <a:spcPct val="115000"/>
+              </a:lnSpc>
+              <a:spcAft>
+                <a:spcPts val="1200"/>
+              </a:spcAft>
+            </a:pPr>
+            <a:r>
+              <a:rPr sz="2300" b="1">
+                <a:solidFill>
+                  <a:srgbClr val="C46224"/>
+                </a:solidFill>
+                <a:latin typeface="Verdana"/>
+              </a:rPr>
+              <a:t>▸  </a:t>
+            </a:r>
+            <a:r>
+              <a:rPr sz="2300">
+                <a:solidFill>
+                  <a:srgbClr val="2B2B26"/>
+                </a:solidFill>
+                <a:latin typeface="Verdana"/>
+              </a:rPr>
+              <a:t>It is not a bank account, and it is not long-term care insurance.</a:t>
+            </a:r>
+          </a:p>
+          <a:p>
+            <a:pPr>
+              <a:lnSpc>
+                <a:spcPct val="115000"/>
+              </a:lnSpc>
+              <a:spcAft>
+                <a:spcPts val="1200"/>
+              </a:spcAft>
+            </a:pPr>
+            <a:r>
+              <a:rPr sz="2300" b="1">
+                <a:solidFill>
+                  <a:srgbClr val="C46224"/>
+                </a:solidFill>
+                <a:latin typeface="Verdana"/>
+              </a:rPr>
+              <a:t>▸  </a:t>
+            </a:r>
+            <a:r>
+              <a:rPr sz="2300">
+                <a:solidFill>
+                  <a:srgbClr val="2B2B26"/>
+                </a:solidFill>
+                <a:latin typeface="Verdana"/>
+              </a:rPr>
+              <a:t>Using Living Benefits lowers the money left at the end.</a:t>
+            </a:r>
+          </a:p>
+          <a:p>
+            <a:pPr>
+              <a:lnSpc>
+                <a:spcPct val="115000"/>
+              </a:lnSpc>
+              <a:spcAft>
+                <a:spcPts val="1200"/>
+              </a:spcAft>
+            </a:pPr>
+            <a:r>
+              <a:rPr sz="2300" b="1">
+                <a:solidFill>
+                  <a:srgbClr val="C46224"/>
+                </a:solidFill>
+                <a:latin typeface="Verdana"/>
+              </a:rPr>
+              <a:t>▸  </a:t>
+            </a:r>
+            <a:r>
+              <a:rPr sz="2300">
+                <a:solidFill>
+                  <a:srgbClr val="2B2B26"/>
+                </a:solidFill>
+                <a:latin typeface="Verdana"/>
+              </a:rPr>
+              <a:t>We read the real rules with you — no surprises, no pressure.</a:t>
+            </a:r>
+          </a:p>
+        </p:txBody>
+      </p:sp>
+      <p:sp>
+        <p:nvSpPr>
+          <p:cNvPr id="7" name="TextBox 6"/>
           <p:cNvSpPr txBox="1"/>
           <p:nvPr/>
         </p:nvSpPr>
         <p:spPr>
           <a:xfrm>
-            <a:off x="548640" y="6355080"/>
-            <a:ext cx="11064240" cy="365760"/>
+            <a:off x="502920" y="6473952"/>
+            <a:ext cx="11155680" cy="292608"/>
           </a:xfrm>
           <a:prstGeom prst="rect">
             <a:avLst/>
@@ -7012,514 +7874,24 @@
           <a:noFill/>
         </p:spPr>
         <p:txBody>
-          <a:bodyPr wrap="square">
+          <a:bodyPr wrap="square" anchor="t">
             <a:spAutoFit/>
           </a:bodyPr>
           <a:lstStyle/>
           <a:p>
-            <a:pPr algn="l"/>
-            <a:r>
-              <a:rPr sz="1400" b="0">
-                <a:solidFill>
-                  <a:srgbClr val="2E4A2B"/>
-                </a:solidFill>
-                <a:latin typeface="Calibri"/>
-              </a:rPr>
-              <a:t>Southern Oak Financial &amp; Wellness — Free Zoom Webinar</a:t>
-            </a:r>
-          </a:p>
-        </p:txBody>
-      </p:sp>
-    </p:spTree>
-  </p:cSld>
-  <p:clrMapOvr>
-    <a:masterClrMapping/>
-  </p:clrMapOvr>
-</p:sld>
-</file>
-
-<file path=ppt/slides/slide8.xml><?xml version="1.0" encoding="utf-8"?>
-<p:sld xmlns:a="http://schemas.openxmlformats.org/drawingml/2006/main" xmlns:p="http://schemas.openxmlformats.org/presentationml/2006/main" xmlns:r="http://schemas.openxmlformats.org/officeDocument/2006/relationships">
-  <p:cSld>
-    <p:spTree>
-      <p:nvGrpSpPr>
-        <p:cNvPr id="1" name=""/>
-        <p:cNvGrpSpPr/>
-        <p:nvPr/>
-      </p:nvGrpSpPr>
-      <p:grpSpPr/>
-      <p:sp>
-        <p:nvSpPr>
-          <p:cNvPr id="2" name="Rectangle 1"/>
-          <p:cNvSpPr/>
-          <p:nvPr/>
-        </p:nvSpPr>
-        <p:spPr>
-          <a:xfrm>
-            <a:off x="0" y="0"/>
-            <a:ext cx="12191695" cy="6858000"/>
-          </a:xfrm>
-          <a:prstGeom prst="rect">
-            <a:avLst/>
-          </a:prstGeom>
-          <a:solidFill>
-            <a:srgbClr val="FAF4E6"/>
-          </a:solidFill>
-          <a:ln>
-            <a:noFill/>
-          </a:ln>
-          <a:effectLst/>
-        </p:spPr>
-        <p:style>
-          <a:lnRef idx="1">
-            <a:schemeClr val="accent1"/>
-          </a:lnRef>
-          <a:fillRef idx="3">
-            <a:schemeClr val="accent1"/>
-          </a:fillRef>
-          <a:effectRef idx="2">
-            <a:schemeClr val="accent1"/>
-          </a:effectRef>
-          <a:fontRef idx="minor">
-            <a:schemeClr val="lt1"/>
-          </a:fontRef>
-        </p:style>
-        <p:txBody>
-          <a:bodyPr rtlCol="0" anchor="ctr"/>
-          <a:lstStyle/>
-          <a:p>
-            <a:pPr algn="ctr"/>
-          </a:p>
-        </p:txBody>
-      </p:sp>
-      <p:sp>
-        <p:nvSpPr>
-          <p:cNvPr id="3" name="Rectangle 2"/>
-          <p:cNvSpPr/>
-          <p:nvPr/>
-        </p:nvSpPr>
-        <p:spPr>
-          <a:xfrm>
-            <a:off x="0" y="0"/>
-            <a:ext cx="12191695" cy="1051560"/>
-          </a:xfrm>
-          <a:prstGeom prst="rect">
-            <a:avLst/>
-          </a:prstGeom>
-          <a:solidFill>
-            <a:srgbClr val="2E4A2B"/>
-          </a:solidFill>
-          <a:ln>
-            <a:noFill/>
-          </a:ln>
-          <a:effectLst/>
-        </p:spPr>
-        <p:style>
-          <a:lnRef idx="1">
-            <a:schemeClr val="accent1"/>
-          </a:lnRef>
-          <a:fillRef idx="3">
-            <a:schemeClr val="accent1"/>
-          </a:fillRef>
-          <a:effectRef idx="2">
-            <a:schemeClr val="accent1"/>
-          </a:effectRef>
-          <a:fontRef idx="minor">
-            <a:schemeClr val="lt1"/>
-          </a:fontRef>
-        </p:style>
-        <p:txBody>
-          <a:bodyPr rtlCol="0" anchor="ctr"/>
-          <a:lstStyle/>
-          <a:p>
-            <a:pPr algn="ctr"/>
-          </a:p>
-        </p:txBody>
-      </p:sp>
-      <p:sp>
-        <p:nvSpPr>
-          <p:cNvPr id="4" name="TextBox 3"/>
-          <p:cNvSpPr txBox="1"/>
-          <p:nvPr/>
-        </p:nvSpPr>
-        <p:spPr>
-          <a:xfrm>
-            <a:off x="548640" y="164592"/>
-            <a:ext cx="11064240" cy="777240"/>
-          </a:xfrm>
-          <a:prstGeom prst="rect">
-            <a:avLst/>
-          </a:prstGeom>
-          <a:noFill/>
-        </p:spPr>
-        <p:txBody>
-          <a:bodyPr wrap="square">
-            <a:spAutoFit/>
-          </a:bodyPr>
-          <a:lstStyle/>
-          <a:p>
-            <a:pPr algn="l"/>
-            <a:r>
-              <a:rPr sz="4000" b="1">
-                <a:solidFill>
-                  <a:srgbClr val="FFFFFF"/>
-                </a:solidFill>
-                <a:latin typeface="Georgia"/>
-              </a:rPr>
-              <a:t>Call and Ask: Bill Companies</a:t>
-            </a:r>
-          </a:p>
-        </p:txBody>
-      </p:sp>
-      <p:sp>
-        <p:nvSpPr>
-          <p:cNvPr id="5" name="TextBox 4"/>
-          <p:cNvSpPr txBox="1"/>
-          <p:nvPr/>
-        </p:nvSpPr>
-        <p:spPr>
-          <a:xfrm>
-            <a:off x="822960" y="1554480"/>
-            <a:ext cx="10607040" cy="4480560"/>
-          </a:xfrm>
-          <a:prstGeom prst="rect">
-            <a:avLst/>
-          </a:prstGeom>
-          <a:noFill/>
-        </p:spPr>
-        <p:txBody>
-          <a:bodyPr wrap="square">
-            <a:spAutoFit/>
-          </a:bodyPr>
-          <a:lstStyle/>
-          <a:p>
-            <a:pPr algn="l"/>
-            <a:r>
-              <a:rPr sz="2700" b="0">
-                <a:solidFill>
-                  <a:srgbClr val="222222"/>
-                </a:solidFill>
-                <a:latin typeface="Calibri"/>
-              </a:rPr>
-              <a:t>•  Many companies have hardship or discount programs</a:t>
-            </a:r>
-          </a:p>
-          <a:p>
-            <a:pPr algn="l"/>
-            <a:r>
-              <a:rPr sz="2700" b="0">
-                <a:solidFill>
-                  <a:srgbClr val="222222"/>
-                </a:solidFill>
-                <a:latin typeface="Calibri"/>
-              </a:rPr>
-              <a:t>•  You can ask for a lower price or more time</a:t>
-            </a:r>
-          </a:p>
-          <a:p>
-            <a:pPr algn="l"/>
-            <a:r>
-              <a:rPr sz="2700" b="0">
-                <a:solidFill>
-                  <a:srgbClr val="222222"/>
-                </a:solidFill>
-                <a:latin typeface="Calibri"/>
-              </a:rPr>
-              <a:t>•  Be kind, be honest, write down who you talked to</a:t>
-            </a:r>
-          </a:p>
-          <a:p>
-            <a:pPr algn="l"/>
-            <a:r>
-              <a:rPr sz="2700" b="0">
-                <a:solidFill>
-                  <a:srgbClr val="222222"/>
-                </a:solidFill>
-                <a:latin typeface="Calibri"/>
-              </a:rPr>
-              <a:t>•  One call can free up real money every month</a:t>
-            </a:r>
-          </a:p>
-        </p:txBody>
-      </p:sp>
-      <p:sp>
-        <p:nvSpPr>
-          <p:cNvPr id="6" name="TextBox 5"/>
-          <p:cNvSpPr txBox="1"/>
-          <p:nvPr/>
-        </p:nvSpPr>
-        <p:spPr>
-          <a:xfrm>
-            <a:off x="548640" y="6355080"/>
-            <a:ext cx="11064240" cy="365760"/>
-          </a:xfrm>
-          <a:prstGeom prst="rect">
-            <a:avLst/>
-          </a:prstGeom>
-          <a:noFill/>
-        </p:spPr>
-        <p:txBody>
-          <a:bodyPr wrap="square">
-            <a:spAutoFit/>
-          </a:bodyPr>
-          <a:lstStyle/>
-          <a:p>
-            <a:pPr algn="l"/>
-            <a:r>
-              <a:rPr sz="1400" b="0">
-                <a:solidFill>
-                  <a:srgbClr val="2E4A2B"/>
-                </a:solidFill>
-                <a:latin typeface="Calibri"/>
-              </a:rPr>
-              <a:t>Southern Oak Financial &amp; Wellness — Free Zoom Webinar</a:t>
-            </a:r>
-          </a:p>
-        </p:txBody>
-      </p:sp>
-    </p:spTree>
-  </p:cSld>
-  <p:clrMapOvr>
-    <a:masterClrMapping/>
-  </p:clrMapOvr>
-</p:sld>
-</file>
-
-<file path=ppt/slides/slide9.xml><?xml version="1.0" encoding="utf-8"?>
-<p:sld xmlns:a="http://schemas.openxmlformats.org/drawingml/2006/main" xmlns:p="http://schemas.openxmlformats.org/presentationml/2006/main" xmlns:r="http://schemas.openxmlformats.org/officeDocument/2006/relationships">
-  <p:cSld>
-    <p:spTree>
-      <p:nvGrpSpPr>
-        <p:cNvPr id="1" name=""/>
-        <p:cNvGrpSpPr/>
-        <p:nvPr/>
-      </p:nvGrpSpPr>
-      <p:grpSpPr/>
-      <p:sp>
-        <p:nvSpPr>
-          <p:cNvPr id="2" name="Rectangle 1"/>
-          <p:cNvSpPr/>
-          <p:nvPr/>
-        </p:nvSpPr>
-        <p:spPr>
-          <a:xfrm>
-            <a:off x="0" y="0"/>
-            <a:ext cx="12191695" cy="6858000"/>
-          </a:xfrm>
-          <a:prstGeom prst="rect">
-            <a:avLst/>
-          </a:prstGeom>
-          <a:solidFill>
-            <a:srgbClr val="FAF4E6"/>
-          </a:solidFill>
-          <a:ln>
-            <a:noFill/>
-          </a:ln>
-          <a:effectLst/>
-        </p:spPr>
-        <p:style>
-          <a:lnRef idx="1">
-            <a:schemeClr val="accent1"/>
-          </a:lnRef>
-          <a:fillRef idx="3">
-            <a:schemeClr val="accent1"/>
-          </a:fillRef>
-          <a:effectRef idx="2">
-            <a:schemeClr val="accent1"/>
-          </a:effectRef>
-          <a:fontRef idx="minor">
-            <a:schemeClr val="lt1"/>
-          </a:fontRef>
-        </p:style>
-        <p:txBody>
-          <a:bodyPr rtlCol="0" anchor="ctr"/>
-          <a:lstStyle/>
-          <a:p>
-            <a:pPr algn="ctr"/>
-          </a:p>
-        </p:txBody>
-      </p:sp>
-      <p:sp>
-        <p:nvSpPr>
-          <p:cNvPr id="3" name="Rectangle 2"/>
-          <p:cNvSpPr/>
-          <p:nvPr/>
-        </p:nvSpPr>
-        <p:spPr>
-          <a:xfrm>
-            <a:off x="0" y="0"/>
-            <a:ext cx="12191695" cy="1051560"/>
-          </a:xfrm>
-          <a:prstGeom prst="rect">
-            <a:avLst/>
-          </a:prstGeom>
-          <a:solidFill>
-            <a:srgbClr val="2E4A2B"/>
-          </a:solidFill>
-          <a:ln>
-            <a:noFill/>
-          </a:ln>
-          <a:effectLst/>
-        </p:spPr>
-        <p:style>
-          <a:lnRef idx="1">
-            <a:schemeClr val="accent1"/>
-          </a:lnRef>
-          <a:fillRef idx="3">
-            <a:schemeClr val="accent1"/>
-          </a:fillRef>
-          <a:effectRef idx="2">
-            <a:schemeClr val="accent1"/>
-          </a:effectRef>
-          <a:fontRef idx="minor">
-            <a:schemeClr val="lt1"/>
-          </a:fontRef>
-        </p:style>
-        <p:txBody>
-          <a:bodyPr rtlCol="0" anchor="ctr"/>
-          <a:lstStyle/>
-          <a:p>
-            <a:pPr algn="ctr"/>
-          </a:p>
-        </p:txBody>
-      </p:sp>
-      <p:sp>
-        <p:nvSpPr>
-          <p:cNvPr id="4" name="TextBox 3"/>
-          <p:cNvSpPr txBox="1"/>
-          <p:nvPr/>
-        </p:nvSpPr>
-        <p:spPr>
-          <a:xfrm>
-            <a:off x="548640" y="164592"/>
-            <a:ext cx="11064240" cy="777240"/>
-          </a:xfrm>
-          <a:prstGeom prst="rect">
-            <a:avLst/>
-          </a:prstGeom>
-          <a:noFill/>
-        </p:spPr>
-        <p:txBody>
-          <a:bodyPr wrap="square">
-            <a:spAutoFit/>
-          </a:bodyPr>
-          <a:lstStyle/>
-          <a:p>
-            <a:pPr algn="l"/>
-            <a:r>
-              <a:rPr sz="4000" b="1">
-                <a:solidFill>
-                  <a:srgbClr val="FFFFFF"/>
-                </a:solidFill>
-                <a:latin typeface="Georgia"/>
-              </a:rPr>
-              <a:t>Where Help Lives: 2-1-1</a:t>
-            </a:r>
-          </a:p>
-        </p:txBody>
-      </p:sp>
-      <p:sp>
-        <p:nvSpPr>
-          <p:cNvPr id="5" name="TextBox 4"/>
-          <p:cNvSpPr txBox="1"/>
-          <p:nvPr/>
-        </p:nvSpPr>
-        <p:spPr>
-          <a:xfrm>
-            <a:off x="822960" y="1554480"/>
-            <a:ext cx="10607040" cy="4480560"/>
-          </a:xfrm>
-          <a:prstGeom prst="rect">
-            <a:avLst/>
-          </a:prstGeom>
-          <a:noFill/>
-        </p:spPr>
-        <p:txBody>
-          <a:bodyPr wrap="square">
-            <a:spAutoFit/>
-          </a:bodyPr>
-          <a:lstStyle/>
-          <a:p>
-            <a:pPr algn="l"/>
-            <a:r>
-              <a:rPr sz="2700" b="0">
-                <a:solidFill>
-                  <a:srgbClr val="222222"/>
-                </a:solidFill>
-                <a:latin typeface="Calibri"/>
-              </a:rPr>
-              <a:t>•  Dial 2-1-1 — free, local, real people</a:t>
-            </a:r>
-          </a:p>
-          <a:p>
-            <a:pPr algn="l"/>
-            <a:r>
-              <a:rPr sz="2700" b="0">
-                <a:solidFill>
-                  <a:srgbClr val="222222"/>
-                </a:solidFill>
-                <a:latin typeface="Calibri"/>
-              </a:rPr>
-              <a:t>•  Food, bills, rides, respite and more</a:t>
-            </a:r>
-          </a:p>
-          <a:p>
-            <a:pPr algn="l"/>
-            <a:r>
-              <a:rPr sz="2700" b="0">
-                <a:solidFill>
-                  <a:srgbClr val="222222"/>
-                </a:solidFill>
-                <a:latin typeface="Calibri"/>
-              </a:rPr>
-              <a:t>•  Help for San Antonio and the Rio Grande Valley</a:t>
-            </a:r>
-          </a:p>
-          <a:p>
-            <a:pPr algn="l"/>
-            <a:r>
-              <a:rPr sz="2700" b="0">
-                <a:solidFill>
-                  <a:srgbClr val="222222"/>
-                </a:solidFill>
-                <a:latin typeface="Calibri"/>
-              </a:rPr>
-              <a:t>•  You do not have to know what to ask for — just call</a:t>
-            </a:r>
-          </a:p>
-        </p:txBody>
-      </p:sp>
-      <p:sp>
-        <p:nvSpPr>
-          <p:cNvPr id="6" name="TextBox 5"/>
-          <p:cNvSpPr txBox="1"/>
-          <p:nvPr/>
-        </p:nvSpPr>
-        <p:spPr>
-          <a:xfrm>
-            <a:off x="548640" y="6355080"/>
-            <a:ext cx="11064240" cy="365760"/>
-          </a:xfrm>
-          <a:prstGeom prst="rect">
-            <a:avLst/>
-          </a:prstGeom>
-          <a:noFill/>
-        </p:spPr>
-        <p:txBody>
-          <a:bodyPr wrap="square">
-            <a:spAutoFit/>
-          </a:bodyPr>
-          <a:lstStyle/>
-          <a:p>
-            <a:pPr algn="l"/>
-            <a:r>
-              <a:rPr sz="1400" b="0">
-                <a:solidFill>
-                  <a:srgbClr val="2E4A2B"/>
-                </a:solidFill>
-                <a:latin typeface="Calibri"/>
-              </a:rPr>
-              <a:t>Southern Oak Financial &amp; Wellness — Free Zoom Webinar</a:t>
+            <a:pPr algn="l">
+              <a:lnSpc>
+                <a:spcPct val="112000"/>
+              </a:lnSpc>
+            </a:pPr>
+            <a:r>
+              <a:rPr sz="1150" b="0" i="0">
+                <a:solidFill>
+                  <a:srgbClr val="7A7466"/>
+                </a:solidFill>
+                <a:latin typeface="Verdana"/>
+              </a:rPr>
+              <a:t>Southern Oak Financial &amp; Wellness  •  southernoakfw.org</a:t>
             </a:r>
           </a:p>
         </p:txBody>

--- a/assets/Caregiver-Webinar-Nov13.pptx
+++ b/assets/Caregiver-Webinar-Nov13.pptx
@@ -4278,29 +4278,13 @@
               </a:lnSpc>
             </a:pPr>
             <a:r>
-              <a:rPr sz="4300" b="1" i="0">
+              <a:rPr sz="4800" b="1" i="0">
                 <a:solidFill>
                   <a:srgbClr val="FFFFFF"/>
                 </a:solidFill>
                 <a:latin typeface="Georgia"/>
               </a:rPr>
-              <a:t>Caregivers:</a:t>
-            </a:r>
-          </a:p>
-          <a:p>
-            <a:pPr algn="ctr">
-              <a:lnSpc>
-                <a:spcPct val="115000"/>
-              </a:lnSpc>
-            </a:pPr>
-            <a:r>
-              <a:rPr sz="4300" b="1" i="0">
-                <a:solidFill>
-                  <a:srgbClr val="FFFFFF"/>
-                </a:solidFill>
-                <a:latin typeface="Georgia"/>
-              </a:rPr>
-              <a:t>Why You Need Life Insurance Coverage</a:t>
+              <a:t>Protecting Your Income</a:t>
             </a:r>
           </a:p>
         </p:txBody>
@@ -4339,7 +4323,7 @@
                 </a:solidFill>
                 <a:latin typeface="Verdana"/>
               </a:rPr>
-              <a:t>A Free Zoom Webinar for Family Caregivers</a:t>
+              <a:t>Be prepared when life happens — Living Benefits can help.</a:t>
             </a:r>
           </a:p>
         </p:txBody>
